--- a/Training/GitHub_Training_Day.pptx
+++ b/Training/GitHub_Training_Day.pptx
@@ -4332,7 +4332,7 @@
           <a:lstStyle/>
           <a:p>
             <a:r>
-              <a:t>Detail for this session: Training/06_Session_6_VS_Code_Integration_and_Notebooks.md</a:t>
+              <a:t>Detail for this session: Training/07_Session_7_Issues_Projects_and_Discussions.md</a:t>
             </a:r>
           </a:p>
         </p:txBody>
@@ -5032,7 +5032,7 @@
           <a:lstStyle/>
           <a:p>
             <a:r>
-              <a:t>Detail for this session: Training/07_Session_7_Issues_Projects_and_Discussions.md</a:t>
+              <a:t>Detail for this session: Training/08_Session_8_Codespaces_and_Copilot_Exercise.md</a:t>
             </a:r>
           </a:p>
         </p:txBody>
@@ -5942,7 +5942,7 @@
           <a:lstStyle/>
           <a:p>
             <a:r>
-              <a:t>Detail for this session: Training/08_Session_8_Codespaces_and_Copilot_Exercise.md</a:t>
+              <a:t>Detail for this session: Training/09_Session_9_Group_Exercises_and_Consolidation.md</a:t>
             </a:r>
           </a:p>
         </p:txBody>
@@ -20609,7 +20609,7 @@
                 </a:solidFill>
                 <a:latin typeface="Arial"/>
               </a:rPr>
-              <a:t>Running SQL Against the Academy Dataset</a:t>
+              <a:t>Codespaces vs Local</a:t>
             </a:r>
           </a:p>
         </p:txBody>
@@ -20648,63 +20648,91 @@
                 </a:solidFill>
                 <a:latin typeface="Arial"/>
               </a:rPr>
-              <a:t>The ndr-hb-abuhb-academy project</a:t>
-            </a:r>
-          </a:p>
-          <a:p>
-            <a:pPr marL="342900" indent="-342900" algn="l">
-              <a:lnSpc>
-                <a:spcPct val="90000"/>
-              </a:lnSpc>
-              <a:spcBef>
-                <a:spcPts val="1000"/>
-              </a:spcBef>
-              <a:spcAft>
-                <a:spcPts val="0"/>
-              </a:spcAft>
-              <a:buClr>
-                <a:srgbClr val="44546A"/>
-              </a:buClr>
-              <a:buSzPts val="1600"/>
-              <a:buFont typeface="Arial"/>
-              <a:buChar char="•"/>
-            </a:pPr>
-            <a:r>
-              <a:rPr sz="1600" b="0">
-                <a:solidFill>
-                  <a:srgbClr val="44546A"/>
-                </a:solidFill>
-                <a:latin typeface="Arial"/>
-              </a:rPr>
-              <a:t>A Google Cloud project for training, with a SQL_Basic_Training dataset</a:t>
-            </a:r>
-          </a:p>
-          <a:p>
-            <a:pPr marL="342900" indent="-342900" algn="l">
-              <a:lnSpc>
-                <a:spcPct val="90000"/>
-              </a:lnSpc>
-              <a:spcBef>
-                <a:spcPts val="1000"/>
-              </a:spcBef>
-              <a:spcAft>
-                <a:spcPts val="0"/>
-              </a:spcAft>
-              <a:buClr>
-                <a:srgbClr val="44546A"/>
-              </a:buClr>
-              <a:buSzPts val="1600"/>
-              <a:buFont typeface="Arial"/>
-              <a:buChar char="•"/>
-            </a:pPr>
-            <a:r>
-              <a:rPr sz="1600" b="0">
-                <a:solidFill>
-                  <a:srgbClr val="44546A"/>
-                </a:solidFill>
-                <a:latin typeface="Arial"/>
-              </a:rPr>
-              <a:t>Your SQL lives in Git as a file, so every change is tracked and reviewed</a:t>
+              <a:t>Prefer a Codespace when</a:t>
+            </a:r>
+          </a:p>
+          <a:p>
+            <a:pPr marL="342900" indent="-342900" algn="l">
+              <a:lnSpc>
+                <a:spcPct val="90000"/>
+              </a:lnSpc>
+              <a:spcBef>
+                <a:spcPts val="1000"/>
+              </a:spcBef>
+              <a:spcAft>
+                <a:spcPts val="0"/>
+              </a:spcAft>
+              <a:buClr>
+                <a:srgbClr val="44546A"/>
+              </a:buClr>
+              <a:buSzPts val="1600"/>
+              <a:buFont typeface="Arial"/>
+              <a:buChar char="•"/>
+            </a:pPr>
+            <a:r>
+              <a:rPr sz="1600" b="0">
+                <a:solidFill>
+                  <a:srgbClr val="44546A"/>
+                </a:solidFill>
+                <a:latin typeface="Arial"/>
+              </a:rPr>
+              <a:t>Onboarding new joiners</a:t>
+            </a:r>
+          </a:p>
+          <a:p>
+            <a:pPr marL="342900" indent="-342900" algn="l">
+              <a:lnSpc>
+                <a:spcPct val="90000"/>
+              </a:lnSpc>
+              <a:spcBef>
+                <a:spcPts val="1000"/>
+              </a:spcBef>
+              <a:spcAft>
+                <a:spcPts val="0"/>
+              </a:spcAft>
+              <a:buClr>
+                <a:srgbClr val="44546A"/>
+              </a:buClr>
+              <a:buSzPts val="1600"/>
+              <a:buFont typeface="Arial"/>
+              <a:buChar char="•"/>
+            </a:pPr>
+            <a:r>
+              <a:rPr sz="1600" b="0">
+                <a:solidFill>
+                  <a:srgbClr val="44546A"/>
+                </a:solidFill>
+                <a:latin typeface="Arial"/>
+              </a:rPr>
+              <a:t>Reviewing with identical tooling</a:t>
+            </a:r>
+          </a:p>
+          <a:p>
+            <a:pPr marL="342900" indent="-342900" algn="l">
+              <a:lnSpc>
+                <a:spcPct val="90000"/>
+              </a:lnSpc>
+              <a:spcBef>
+                <a:spcPts val="1000"/>
+              </a:spcBef>
+              <a:spcAft>
+                <a:spcPts val="0"/>
+              </a:spcAft>
+              <a:buClr>
+                <a:srgbClr val="44546A"/>
+              </a:buClr>
+              <a:buSzPts val="1600"/>
+              <a:buFont typeface="Arial"/>
+              <a:buChar char="•"/>
+            </a:pPr>
+            <a:r>
+              <a:rPr sz="1600" b="0">
+                <a:solidFill>
+                  <a:srgbClr val="44546A"/>
+                </a:solidFill>
+                <a:latin typeface="Arial"/>
+              </a:rPr>
+              <a:t>You want least-privilege, scoped secrets</a:t>
             </a:r>
           </a:p>
           <a:p>
@@ -20750,91 +20778,63 @@
                 </a:solidFill>
                 <a:latin typeface="Arial"/>
               </a:rPr>
-              <a:t>Three habits from the script</a:t>
-            </a:r>
-          </a:p>
-          <a:p>
-            <a:pPr marL="342900" indent="-342900" algn="l">
-              <a:lnSpc>
-                <a:spcPct val="90000"/>
-              </a:lnSpc>
-              <a:spcBef>
-                <a:spcPts val="1000"/>
-              </a:spcBef>
-              <a:spcAft>
-                <a:spcPts val="0"/>
-              </a:spcAft>
-              <a:buClr>
-                <a:srgbClr val="44546A"/>
-              </a:buClr>
-              <a:buSzPts val="1600"/>
-              <a:buFont typeface="Arial"/>
-              <a:buChar char="•"/>
-            </a:pPr>
-            <a:r>
-              <a:rPr sz="1600" b="0">
-                <a:solidFill>
-                  <a:srgbClr val="44546A"/>
-                </a:solidFill>
-                <a:latin typeface="Arial"/>
-              </a:rPr>
-              <a:t>Preview with SELECT * and always add LIMIT</a:t>
-            </a:r>
-          </a:p>
-          <a:p>
-            <a:pPr marL="342900" indent="-342900" algn="l">
-              <a:lnSpc>
-                <a:spcPct val="90000"/>
-              </a:lnSpc>
-              <a:spcBef>
-                <a:spcPts val="1000"/>
-              </a:spcBef>
-              <a:spcAft>
-                <a:spcPts val="0"/>
-              </a:spcAft>
-              <a:buClr>
-                <a:srgbClr val="44546A"/>
-              </a:buClr>
-              <a:buSzPts val="1600"/>
-              <a:buFont typeface="Arial"/>
-              <a:buChar char="•"/>
-            </a:pPr>
-            <a:r>
-              <a:rPr sz="1600" b="0">
-                <a:solidFill>
-                  <a:srgbClr val="44546A"/>
-                </a:solidFill>
-                <a:latin typeface="Arial"/>
-              </a:rPr>
-              <a:t>Name only the columns you need</a:t>
-            </a:r>
-          </a:p>
-          <a:p>
-            <a:pPr marL="342900" indent="-342900" algn="l">
-              <a:lnSpc>
-                <a:spcPct val="90000"/>
-              </a:lnSpc>
-              <a:spcBef>
-                <a:spcPts val="1000"/>
-              </a:spcBef>
-              <a:spcAft>
-                <a:spcPts val="0"/>
-              </a:spcAft>
-              <a:buClr>
-                <a:srgbClr val="44546A"/>
-              </a:buClr>
-              <a:buSzPts val="1600"/>
-              <a:buFont typeface="Arial"/>
-              <a:buChar char="•"/>
-            </a:pPr>
-            <a:r>
-              <a:rPr sz="1600" b="0">
-                <a:solidFill>
-                  <a:srgbClr val="44546A"/>
-                </a:solidFill>
-                <a:latin typeface="Arial"/>
-              </a:rPr>
-              <a:t>Use SELECT DISTINCT for a unique list of values</a:t>
+              <a:t>Prefer local when</a:t>
+            </a:r>
+          </a:p>
+          <a:p>
+            <a:pPr marL="342900" indent="-342900" algn="l">
+              <a:lnSpc>
+                <a:spcPct val="90000"/>
+              </a:lnSpc>
+              <a:spcBef>
+                <a:spcPts val="1000"/>
+              </a:spcBef>
+              <a:spcAft>
+                <a:spcPts val="0"/>
+              </a:spcAft>
+              <a:buClr>
+                <a:srgbClr val="44546A"/>
+              </a:buClr>
+              <a:buSzPts val="1600"/>
+              <a:buFont typeface="Arial"/>
+              <a:buChar char="•"/>
+            </a:pPr>
+            <a:r>
+              <a:rPr sz="1600" b="0">
+                <a:solidFill>
+                  <a:srgbClr val="44546A"/>
+                </a:solidFill>
+                <a:latin typeface="Arial"/>
+              </a:rPr>
+              <a:t>Working with heavy compute or large datasets</a:t>
+            </a:r>
+          </a:p>
+          <a:p>
+            <a:pPr marL="342900" indent="-342900" algn="l">
+              <a:lnSpc>
+                <a:spcPct val="90000"/>
+              </a:lnSpc>
+              <a:spcBef>
+                <a:spcPts val="1000"/>
+              </a:spcBef>
+              <a:spcAft>
+                <a:spcPts val="0"/>
+              </a:spcAft>
+              <a:buClr>
+                <a:srgbClr val="44546A"/>
+              </a:buClr>
+              <a:buSzPts val="1600"/>
+              <a:buFont typeface="Arial"/>
+              <a:buChar char="•"/>
+            </a:pPr>
+            <a:r>
+              <a:rPr sz="1600" b="0">
+                <a:solidFill>
+                  <a:srgbClr val="44546A"/>
+                </a:solidFill>
+                <a:latin typeface="Arial"/>
+              </a:rPr>
+              <a:t>The network is unreliable</a:t>
             </a:r>
           </a:p>
           <a:p>
@@ -20880,7 +20880,7 @@
                 </a:solidFill>
                 <a:latin typeface="Arial"/>
               </a:rPr>
-              <a:t>BigQuery needs backticks round a table name with hyphens. Never commit results or data.</a:t>
+              <a:t>We try Codespaces hands-on in Session 8.</a:t>
             </a:r>
           </a:p>
         </p:txBody>
@@ -20925,7 +20925,7 @@
                 </a:solidFill>
                 <a:latin typeface="Arial"/>
               </a:rPr>
-              <a:t>Codespaces vs Local</a:t>
+              <a:t>Your Area: Checkpoint 6</a:t>
             </a:r>
           </a:p>
         </p:txBody>
@@ -20964,91 +20964,119 @@
                 </a:solidFill>
                 <a:latin typeface="Arial"/>
               </a:rPr>
-              <a:t>Prefer a Codespace when</a:t>
-            </a:r>
-          </a:p>
-          <a:p>
-            <a:pPr marL="342900" indent="-342900" algn="l">
-              <a:lnSpc>
-                <a:spcPct val="90000"/>
-              </a:lnSpc>
-              <a:spcBef>
-                <a:spcPts val="1000"/>
-              </a:spcBef>
-              <a:spcAft>
-                <a:spcPts val="0"/>
-              </a:spcAft>
-              <a:buClr>
-                <a:srgbClr val="44546A"/>
-              </a:buClr>
-              <a:buSzPts val="1600"/>
-              <a:buFont typeface="Arial"/>
-              <a:buChar char="•"/>
-            </a:pPr>
-            <a:r>
-              <a:rPr sz="1600" b="0">
-                <a:solidFill>
-                  <a:srgbClr val="44546A"/>
-                </a:solidFill>
-                <a:latin typeface="Arial"/>
-              </a:rPr>
-              <a:t>Onboarding new joiners</a:t>
-            </a:r>
-          </a:p>
-          <a:p>
-            <a:pPr marL="342900" indent="-342900" algn="l">
-              <a:lnSpc>
-                <a:spcPct val="90000"/>
-              </a:lnSpc>
-              <a:spcBef>
-                <a:spcPts val="1000"/>
-              </a:spcBef>
-              <a:spcAft>
-                <a:spcPts val="0"/>
-              </a:spcAft>
-              <a:buClr>
-                <a:srgbClr val="44546A"/>
-              </a:buClr>
-              <a:buSzPts val="1600"/>
-              <a:buFont typeface="Arial"/>
-              <a:buChar char="•"/>
-            </a:pPr>
-            <a:r>
-              <a:rPr sz="1600" b="0">
-                <a:solidFill>
-                  <a:srgbClr val="44546A"/>
-                </a:solidFill>
-                <a:latin typeface="Arial"/>
-              </a:rPr>
-              <a:t>Reviewing with identical tooling</a:t>
-            </a:r>
-          </a:p>
-          <a:p>
-            <a:pPr marL="342900" indent="-342900" algn="l">
-              <a:lnSpc>
-                <a:spcPct val="90000"/>
-              </a:lnSpc>
-              <a:spcBef>
-                <a:spcPts val="1000"/>
-              </a:spcBef>
-              <a:spcAft>
-                <a:spcPts val="0"/>
-              </a:spcAft>
-              <a:buClr>
-                <a:srgbClr val="44546A"/>
-              </a:buClr>
-              <a:buSzPts val="1600"/>
-              <a:buFont typeface="Arial"/>
-              <a:buChar char="•"/>
-            </a:pPr>
-            <a:r>
-              <a:rPr sz="1600" b="0">
-                <a:solidFill>
-                  <a:srgbClr val="44546A"/>
-                </a:solidFill>
-                <a:latin typeface="Arial"/>
-              </a:rPr>
-              <a:t>You want least-privilege, scoped secrets</a:t>
+              <a:t>Add a clean notebook (4 minutes)</a:t>
+            </a:r>
+          </a:p>
+          <a:p>
+            <a:pPr marL="342900" indent="-342900" algn="l">
+              <a:lnSpc>
+                <a:spcPct val="90000"/>
+              </a:lnSpc>
+              <a:spcBef>
+                <a:spcPts val="1000"/>
+              </a:spcBef>
+              <a:spcAft>
+                <a:spcPts val="0"/>
+              </a:spcAft>
+              <a:buClr>
+                <a:srgbClr val="44546A"/>
+              </a:buClr>
+              <a:buSzPts val="1600"/>
+              <a:buFont typeface="Arial"/>
+              <a:buChar char="•"/>
+            </a:pPr>
+            <a:r>
+              <a:rPr sz="1600" b="0">
+                <a:solidFill>
+                  <a:srgbClr val="44546A"/>
+                </a:solidFill>
+                <a:latin typeface="Arial"/>
+              </a:rPr>
+              <a:t>Open the repository in VS Code on your branch</a:t>
+            </a:r>
+          </a:p>
+          <a:p>
+            <a:pPr marL="342900" indent="-342900" algn="l">
+              <a:lnSpc>
+                <a:spcPct val="90000"/>
+              </a:lnSpc>
+              <a:spcBef>
+                <a:spcPts val="1000"/>
+              </a:spcBef>
+              <a:spcAft>
+                <a:spcPts val="0"/>
+              </a:spcAft>
+              <a:buClr>
+                <a:srgbClr val="44546A"/>
+              </a:buClr>
+              <a:buSzPts val="1600"/>
+              <a:buFont typeface="Arial"/>
+              <a:buChar char="•"/>
+            </a:pPr>
+            <a:r>
+              <a:rPr sz="1600" b="0">
+                <a:solidFill>
+                  <a:srgbClr val="44546A"/>
+                </a:solidFill>
+                <a:latin typeface="Arial"/>
+              </a:rPr>
+              <a:t>Create starter.ipynb with one cell that prints a greeting, then run it</a:t>
+            </a:r>
+          </a:p>
+          <a:p>
+            <a:pPr marL="342900" indent="-342900" algn="l">
+              <a:lnSpc>
+                <a:spcPct val="90000"/>
+              </a:lnSpc>
+              <a:spcBef>
+                <a:spcPts val="1000"/>
+              </a:spcBef>
+              <a:spcAft>
+                <a:spcPts val="0"/>
+              </a:spcAft>
+              <a:buClr>
+                <a:srgbClr val="44546A"/>
+              </a:buClr>
+              <a:buSzPts val="1600"/>
+              <a:buFont typeface="Arial"/>
+              <a:buChar char="•"/>
+            </a:pPr>
+            <a:r>
+              <a:rPr sz="1600" b="0">
+                <a:solidFill>
+                  <a:srgbClr val="44546A"/>
+                </a:solidFill>
+                <a:latin typeface="Arial"/>
+              </a:rPr>
+              <a:t>Clear all outputs before you commit</a:t>
+            </a:r>
+          </a:p>
+          <a:p>
+            <a:pPr marL="342900" indent="-342900" algn="l">
+              <a:lnSpc>
+                <a:spcPct val="90000"/>
+              </a:lnSpc>
+              <a:spcBef>
+                <a:spcPts val="1000"/>
+              </a:spcBef>
+              <a:spcAft>
+                <a:spcPts val="0"/>
+              </a:spcAft>
+              <a:buClr>
+                <a:srgbClr val="44546A"/>
+              </a:buClr>
+              <a:buSzPts val="1600"/>
+              <a:buFont typeface="Arial"/>
+              <a:buChar char="•"/>
+            </a:pPr>
+            <a:r>
+              <a:rPr sz="1600" b="0">
+                <a:solidFill>
+                  <a:srgbClr val="44546A"/>
+                </a:solidFill>
+                <a:latin typeface="Arial"/>
+              </a:rPr>
+              <a:t>Commit and push from the Source Control panel</a:t>
             </a:r>
           </a:p>
           <a:p>
@@ -21094,109 +21122,35 @@
                 </a:solidFill>
                 <a:latin typeface="Arial"/>
               </a:rPr>
-              <a:t>Prefer local when</a:t>
-            </a:r>
-          </a:p>
-          <a:p>
-            <a:pPr marL="342900" indent="-342900" algn="l">
-              <a:lnSpc>
-                <a:spcPct val="90000"/>
-              </a:lnSpc>
-              <a:spcBef>
-                <a:spcPts val="1000"/>
-              </a:spcBef>
-              <a:spcAft>
-                <a:spcPts val="0"/>
-              </a:spcAft>
-              <a:buClr>
-                <a:srgbClr val="44546A"/>
-              </a:buClr>
-              <a:buSzPts val="1600"/>
-              <a:buFont typeface="Arial"/>
-              <a:buChar char="•"/>
-            </a:pPr>
-            <a:r>
-              <a:rPr sz="1600" b="0">
-                <a:solidFill>
-                  <a:srgbClr val="44546A"/>
-                </a:solidFill>
-                <a:latin typeface="Arial"/>
-              </a:rPr>
-              <a:t>Working with heavy compute or large datasets</a:t>
-            </a:r>
-          </a:p>
-          <a:p>
-            <a:pPr marL="342900" indent="-342900" algn="l">
-              <a:lnSpc>
-                <a:spcPct val="90000"/>
-              </a:lnSpc>
-              <a:spcBef>
-                <a:spcPts val="1000"/>
-              </a:spcBef>
-              <a:spcAft>
-                <a:spcPts val="0"/>
-              </a:spcAft>
-              <a:buClr>
-                <a:srgbClr val="44546A"/>
-              </a:buClr>
-              <a:buSzPts val="1600"/>
-              <a:buFont typeface="Arial"/>
-              <a:buChar char="•"/>
-            </a:pPr>
-            <a:r>
-              <a:rPr sz="1600" b="0">
-                <a:solidFill>
-                  <a:srgbClr val="44546A"/>
-                </a:solidFill>
-                <a:latin typeface="Arial"/>
-              </a:rPr>
-              <a:t>The network is unreliable</a:t>
-            </a:r>
-          </a:p>
-          <a:p>
-            <a:pPr marL="0" indent="0" algn="l">
-              <a:lnSpc>
-                <a:spcPct val="90000"/>
-              </a:lnSpc>
-              <a:spcBef>
-                <a:spcPts val="1000"/>
-              </a:spcBef>
-              <a:spcAft>
-                <a:spcPts val="0"/>
-              </a:spcAft>
-              <a:buNone/>
-            </a:pPr>
-            <a:r>
-              <a:rPr sz="1600" b="0">
-                <a:solidFill>
-                  <a:srgbClr val="44546A"/>
-                </a:solidFill>
-                <a:latin typeface="Arial"/>
-              </a:rPr>
-              <a:t/>
-            </a:r>
-          </a:p>
-          <a:p>
-            <a:pPr marL="0" indent="0" algn="l">
-              <a:lnSpc>
-                <a:spcPct val="90000"/>
-              </a:lnSpc>
-              <a:spcBef>
-                <a:spcPts val="1000"/>
-              </a:spcBef>
-              <a:spcAft>
-                <a:spcPts val="0"/>
-              </a:spcAft>
-              <a:buNone/>
-            </a:pPr>
-            <a:r>
-              <a:rPr sz="1400" b="0">
-                <a:solidFill>
-                  <a:srgbClr val="44546A"/>
-                </a:solidFill>
-                <a:latin typeface="Arial"/>
-              </a:rPr>
-              <a:t>We try Codespaces hands-on in Session 8.</a:t>
+              <a:t>Your folder now contains</a:t>
+            </a:r>
+          </a:p>
+          <a:p>
+            <a:pPr marL="342900" indent="-342900" algn="l">
+              <a:lnSpc>
+                <a:spcPct val="90000"/>
+              </a:lnSpc>
+              <a:spcBef>
+                <a:spcPts val="1000"/>
+              </a:spcBef>
+              <a:spcAft>
+                <a:spcPts val="0"/>
+              </a:spcAft>
+              <a:buClr>
+                <a:srgbClr val="44546A"/>
+              </a:buClr>
+              <a:buSzPts val="1600"/>
+              <a:buFont typeface="Arial"/>
+              <a:buChar char="•"/>
+            </a:pPr>
+            <a:r>
+              <a:rPr sz="1600" b="0">
+                <a:solidFill>
+                  <a:srgbClr val="44546A"/>
+                </a:solidFill>
+                <a:latin typeface="Arial"/>
+              </a:rPr>
+              <a:t>starter.ipynb committed with its outputs cleared</a:t>
             </a:r>
           </a:p>
         </p:txBody>
@@ -21234,14 +21188,17 @@
           <a:bodyPr/>
           <a:lstStyle/>
           <a:p>
-            <a:r>
-              <a:rPr sz="2800" b="1">
-                <a:solidFill>
-                  <a:srgbClr val="002060"/>
-                </a:solidFill>
-                <a:latin typeface="Arial"/>
-              </a:rPr>
-              <a:t>Your Area: Checkpoint 6</a:t>
+            <a:pPr marL="0" indent="0" algn="l">
+              <a:buNone/>
+            </a:pPr>
+            <a:r>
+              <a:rPr sz="3600" b="1">
+                <a:solidFill>
+                  <a:srgbClr val="FFFFFF"/>
+                </a:solidFill>
+                <a:latin typeface="Arial"/>
+              </a:rPr>
+              <a:t>Issues, Projects and Discussions</a:t>
             </a:r>
           </a:p>
         </p:txBody>
@@ -21262,211 +21219,16 @@
           <a:lstStyle/>
           <a:p>
             <a:pPr marL="0" indent="0" algn="l">
-              <a:lnSpc>
-                <a:spcPct val="90000"/>
-              </a:lnSpc>
-              <a:spcBef>
-                <a:spcPts val="0"/>
-              </a:spcBef>
-              <a:spcAft>
-                <a:spcPts val="0"/>
-              </a:spcAft>
-              <a:buNone/>
-            </a:pPr>
-            <a:r>
-              <a:rPr sz="1800" b="1">
-                <a:solidFill>
-                  <a:srgbClr val="002060"/>
-                </a:solidFill>
-                <a:latin typeface="Arial"/>
-              </a:rPr>
-              <a:t>Add a clean notebook and your SQL (7 minutes)</a:t>
-            </a:r>
-          </a:p>
-          <a:p>
-            <a:pPr marL="342900" indent="-342900" algn="l">
-              <a:lnSpc>
-                <a:spcPct val="90000"/>
-              </a:lnSpc>
-              <a:spcBef>
-                <a:spcPts val="1000"/>
-              </a:spcBef>
-              <a:spcAft>
-                <a:spcPts val="0"/>
-              </a:spcAft>
-              <a:buClr>
-                <a:srgbClr val="44546A"/>
-              </a:buClr>
-              <a:buSzPts val="1600"/>
-              <a:buFont typeface="Arial"/>
-              <a:buChar char="•"/>
-            </a:pPr>
-            <a:r>
-              <a:rPr sz="1600" b="0">
-                <a:solidFill>
-                  <a:srgbClr val="44546A"/>
-                </a:solidFill>
-                <a:latin typeface="Arial"/>
-              </a:rPr>
-              <a:t>Create starter.ipynb with one cell that prints a greeting, run it, then clear all outputs</a:t>
-            </a:r>
-          </a:p>
-          <a:p>
-            <a:pPr marL="342900" indent="-342900" algn="l">
-              <a:lnSpc>
-                <a:spcPct val="90000"/>
-              </a:lnSpc>
-              <a:spcBef>
-                <a:spcPts val="1000"/>
-              </a:spcBef>
-              <a:spcAft>
-                <a:spcPts val="0"/>
-              </a:spcAft>
-              <a:buClr>
-                <a:srgbClr val="44546A"/>
-              </a:buClr>
-              <a:buSzPts val="1600"/>
-              <a:buFont typeface="Arial"/>
-              <a:buChar char="•"/>
-            </a:pPr>
-            <a:r>
-              <a:rPr sz="1600" b="0">
-                <a:solidFill>
-                  <a:srgbClr val="44546A"/>
-                </a:solidFill>
-                <a:latin typeface="Arial"/>
-              </a:rPr>
-              <a:t>Copy Training/exercises/sql-basics/referrals_basics.sql into your folder as referrals.sql</a:t>
-            </a:r>
-          </a:p>
-          <a:p>
-            <a:pPr marL="342900" indent="-342900" algn="l">
-              <a:lnSpc>
-                <a:spcPct val="90000"/>
-              </a:lnSpc>
-              <a:spcBef>
-                <a:spcPts val="1000"/>
-              </a:spcBef>
-              <a:spcAft>
-                <a:spcPts val="0"/>
-              </a:spcAft>
-              <a:buClr>
-                <a:srgbClr val="44546A"/>
-              </a:buClr>
-              <a:buSzPts val="1600"/>
-              <a:buFont typeface="Arial"/>
-              <a:buChar char="•"/>
-            </a:pPr>
-            <a:r>
-              <a:rPr sz="1600" b="0">
-                <a:solidFill>
-                  <a:srgbClr val="44546A"/>
-                </a:solidFill>
-                <a:latin typeface="Arial"/>
-              </a:rPr>
-              <a:t>Run the queries in the BigQuery console, then change one and run it again</a:t>
-            </a:r>
-          </a:p>
-          <a:p>
-            <a:pPr marL="342900" indent="-342900" algn="l">
-              <a:lnSpc>
-                <a:spcPct val="90000"/>
-              </a:lnSpc>
-              <a:spcBef>
-                <a:spcPts val="1000"/>
-              </a:spcBef>
-              <a:spcAft>
-                <a:spcPts val="0"/>
-              </a:spcAft>
-              <a:buClr>
-                <a:srgbClr val="44546A"/>
-              </a:buClr>
-              <a:buSzPts val="1600"/>
-              <a:buFont typeface="Arial"/>
-              <a:buChar char="•"/>
-            </a:pPr>
-            <a:r>
-              <a:rPr sz="1600" b="0">
-                <a:solidFill>
-                  <a:srgbClr val="44546A"/>
-                </a:solidFill>
-                <a:latin typeface="Arial"/>
-              </a:rPr>
-              <a:t>Commit and push both files from the Source Control view</a:t>
-            </a:r>
-          </a:p>
-          <a:p>
-            <a:pPr marL="0" indent="0" algn="l">
-              <a:lnSpc>
-                <a:spcPct val="90000"/>
-              </a:lnSpc>
-              <a:spcBef>
-                <a:spcPts val="1000"/>
-              </a:spcBef>
-              <a:spcAft>
-                <a:spcPts val="0"/>
-              </a:spcAft>
-              <a:buNone/>
-            </a:pPr>
-            <a:r>
-              <a:rPr sz="1600" b="0">
-                <a:solidFill>
-                  <a:srgbClr val="44546A"/>
-                </a:solidFill>
-                <a:latin typeface="Arial"/>
-              </a:rPr>
-              <a:t/>
-            </a:r>
-          </a:p>
-          <a:p>
-            <a:pPr marL="0" indent="0" algn="l">
-              <a:lnSpc>
-                <a:spcPct val="90000"/>
-              </a:lnSpc>
-              <a:spcBef>
-                <a:spcPts val="1000"/>
-              </a:spcBef>
-              <a:spcAft>
-                <a:spcPts val="0"/>
-              </a:spcAft>
-              <a:buNone/>
-            </a:pPr>
-            <a:r>
-              <a:rPr sz="1800" b="1">
-                <a:solidFill>
-                  <a:srgbClr val="002060"/>
-                </a:solidFill>
-                <a:latin typeface="Arial"/>
-              </a:rPr>
-              <a:t>Your folder now contains</a:t>
-            </a:r>
-          </a:p>
-          <a:p>
-            <a:pPr marL="342900" indent="-342900" algn="l">
-              <a:lnSpc>
-                <a:spcPct val="90000"/>
-              </a:lnSpc>
-              <a:spcBef>
-                <a:spcPts val="1000"/>
-              </a:spcBef>
-              <a:spcAft>
-                <a:spcPts val="0"/>
-              </a:spcAft>
-              <a:buClr>
-                <a:srgbClr val="44546A"/>
-              </a:buClr>
-              <a:buSzPts val="1600"/>
-              <a:buFont typeface="Arial"/>
-              <a:buChar char="•"/>
-            </a:pPr>
-            <a:r>
-              <a:rPr sz="1600" b="0">
-                <a:solidFill>
-                  <a:srgbClr val="44546A"/>
-                </a:solidFill>
-                <a:latin typeface="Arial"/>
-              </a:rPr>
-              <a:t>starter.ipynb with outputs cleared, and referrals.sql, committed and pushed</a:t>
+              <a:buNone/>
+            </a:pPr>
+            <a:r>
+              <a:rPr sz="1800" b="0">
+                <a:solidFill>
+                  <a:srgbClr val="01B0FF"/>
+                </a:solidFill>
+                <a:latin typeface="Arial"/>
+              </a:rPr>
+              <a:t>Session 7 | 35 minutes</a:t>
             </a:r>
           </a:p>
         </p:txBody>
@@ -21504,17 +21266,14 @@
           <a:bodyPr/>
           <a:lstStyle/>
           <a:p>
-            <a:pPr marL="0" indent="0" algn="l">
-              <a:buNone/>
-            </a:pPr>
-            <a:r>
-              <a:rPr sz="3600" b="1">
-                <a:solidFill>
-                  <a:srgbClr val="FFFFFF"/>
-                </a:solidFill>
-                <a:latin typeface="Arial"/>
-              </a:rPr>
-              <a:t>Issues, Projects and Discussions</a:t>
+            <a:r>
+              <a:rPr sz="2800" b="1">
+                <a:solidFill>
+                  <a:srgbClr val="002060"/>
+                </a:solidFill>
+                <a:latin typeface="Arial"/>
+              </a:rPr>
+              <a:t>GitHub Issues</a:t>
             </a:r>
           </a:p>
         </p:txBody>
@@ -21535,16 +21294,211 @@
           <a:lstStyle/>
           <a:p>
             <a:pPr marL="0" indent="0" algn="l">
-              <a:buNone/>
-            </a:pPr>
-            <a:r>
-              <a:rPr sz="1800" b="0">
-                <a:solidFill>
-                  <a:srgbClr val="01B0FF"/>
-                </a:solidFill>
-                <a:latin typeface="Arial"/>
-              </a:rPr>
-              <a:t>Session 7 | 35 minutes</a:t>
+              <a:lnSpc>
+                <a:spcPct val="90000"/>
+              </a:lnSpc>
+              <a:spcBef>
+                <a:spcPts val="0"/>
+              </a:spcBef>
+              <a:spcAft>
+                <a:spcPts val="0"/>
+              </a:spcAft>
+              <a:buNone/>
+            </a:pPr>
+            <a:r>
+              <a:rPr sz="1800" b="1">
+                <a:solidFill>
+                  <a:srgbClr val="002060"/>
+                </a:solidFill>
+                <a:latin typeface="Arial"/>
+              </a:rPr>
+              <a:t>The team's to-do list</a:t>
+            </a:r>
+          </a:p>
+          <a:p>
+            <a:pPr marL="342900" indent="-342900" algn="l">
+              <a:lnSpc>
+                <a:spcPct val="90000"/>
+              </a:lnSpc>
+              <a:spcBef>
+                <a:spcPts val="1000"/>
+              </a:spcBef>
+              <a:spcAft>
+                <a:spcPts val="0"/>
+              </a:spcAft>
+              <a:buClr>
+                <a:srgbClr val="44546A"/>
+              </a:buClr>
+              <a:buSzPts val="1600"/>
+              <a:buFont typeface="Arial"/>
+              <a:buChar char="•"/>
+            </a:pPr>
+            <a:r>
+              <a:rPr sz="1600" b="0">
+                <a:solidFill>
+                  <a:srgbClr val="44546A"/>
+                </a:solidFill>
+                <a:latin typeface="Arial"/>
+              </a:rPr>
+              <a:t>Track bugs, feature requests, data issues and project tasks</a:t>
+            </a:r>
+          </a:p>
+          <a:p>
+            <a:pPr marL="342900" indent="-342900" algn="l">
+              <a:lnSpc>
+                <a:spcPct val="90000"/>
+              </a:lnSpc>
+              <a:spcBef>
+                <a:spcPts val="1000"/>
+              </a:spcBef>
+              <a:spcAft>
+                <a:spcPts val="0"/>
+              </a:spcAft>
+              <a:buClr>
+                <a:srgbClr val="44546A"/>
+              </a:buClr>
+              <a:buSzPts val="1600"/>
+              <a:buFont typeface="Arial"/>
+              <a:buChar char="•"/>
+            </a:pPr>
+            <a:r>
+              <a:rPr sz="1600" b="0">
+                <a:solidFill>
+                  <a:srgbClr val="44546A"/>
+                </a:solidFill>
+                <a:latin typeface="Arial"/>
+              </a:rPr>
+              <a:t>Assign owners, add labels and set milestones</a:t>
+            </a:r>
+          </a:p>
+          <a:p>
+            <a:pPr marL="342900" indent="-342900" algn="l">
+              <a:lnSpc>
+                <a:spcPct val="90000"/>
+              </a:lnSpc>
+              <a:spcBef>
+                <a:spcPts val="1000"/>
+              </a:spcBef>
+              <a:spcAft>
+                <a:spcPts val="0"/>
+              </a:spcAft>
+              <a:buClr>
+                <a:srgbClr val="44546A"/>
+              </a:buClr>
+              <a:buSzPts val="1600"/>
+              <a:buFont typeface="Arial"/>
+              <a:buChar char="•"/>
+            </a:pPr>
+            <a:r>
+              <a:rPr sz="1600" b="0">
+                <a:solidFill>
+                  <a:srgbClr val="44546A"/>
+                </a:solidFill>
+                <a:latin typeface="Arial"/>
+              </a:rPr>
+              <a:t>Link to code: writing "closes #12" in a commit closes the issue on merge</a:t>
+            </a:r>
+          </a:p>
+          <a:p>
+            <a:pPr marL="0" indent="0" algn="l">
+              <a:lnSpc>
+                <a:spcPct val="90000"/>
+              </a:lnSpc>
+              <a:spcBef>
+                <a:spcPts val="1000"/>
+              </a:spcBef>
+              <a:spcAft>
+                <a:spcPts val="0"/>
+              </a:spcAft>
+              <a:buNone/>
+            </a:pPr>
+            <a:r>
+              <a:rPr sz="1600" b="0">
+                <a:solidFill>
+                  <a:srgbClr val="44546A"/>
+                </a:solidFill>
+                <a:latin typeface="Arial"/>
+              </a:rPr>
+              <a:t/>
+            </a:r>
+          </a:p>
+          <a:p>
+            <a:pPr marL="0" indent="0" algn="l">
+              <a:lnSpc>
+                <a:spcPct val="90000"/>
+              </a:lnSpc>
+              <a:spcBef>
+                <a:spcPts val="1000"/>
+              </a:spcBef>
+              <a:spcAft>
+                <a:spcPts val="0"/>
+              </a:spcAft>
+              <a:buNone/>
+            </a:pPr>
+            <a:r>
+              <a:rPr sz="1800" b="1">
+                <a:solidFill>
+                  <a:srgbClr val="002060"/>
+                </a:solidFill>
+                <a:latin typeface="Arial"/>
+              </a:rPr>
+              <a:t>Effective issues</a:t>
+            </a:r>
+          </a:p>
+          <a:p>
+            <a:pPr marL="342900" indent="-342900" algn="l">
+              <a:lnSpc>
+                <a:spcPct val="90000"/>
+              </a:lnSpc>
+              <a:spcBef>
+                <a:spcPts val="1000"/>
+              </a:spcBef>
+              <a:spcAft>
+                <a:spcPts val="0"/>
+              </a:spcAft>
+              <a:buClr>
+                <a:srgbClr val="44546A"/>
+              </a:buClr>
+              <a:buSzPts val="1600"/>
+              <a:buFont typeface="Arial"/>
+              <a:buChar char="•"/>
+            </a:pPr>
+            <a:r>
+              <a:rPr sz="1600" b="0">
+                <a:solidFill>
+                  <a:srgbClr val="44546A"/>
+                </a:solidFill>
+                <a:latin typeface="Arial"/>
+              </a:rPr>
+              <a:t>Use templates — clinical context, description, acceptance criteria</a:t>
+            </a:r>
+          </a:p>
+          <a:p>
+            <a:pPr marL="342900" indent="-342900" algn="l">
+              <a:lnSpc>
+                <a:spcPct val="90000"/>
+              </a:lnSpc>
+              <a:spcBef>
+                <a:spcPts val="1000"/>
+              </a:spcBef>
+              <a:spcAft>
+                <a:spcPts val="0"/>
+              </a:spcAft>
+              <a:buClr>
+                <a:srgbClr val="44546A"/>
+              </a:buClr>
+              <a:buSzPts val="1600"/>
+              <a:buFont typeface="Arial"/>
+              <a:buChar char="•"/>
+            </a:pPr>
+            <a:r>
+              <a:rPr sz="1600" b="0">
+                <a:solidFill>
+                  <a:srgbClr val="44546A"/>
+                </a:solidFill>
+                <a:latin typeface="Arial"/>
+              </a:rPr>
+              <a:t>Make the definition of done clear</a:t>
             </a:r>
           </a:p>
         </p:txBody>
@@ -21930,276 +21884,6 @@
 </file>
 
 <file path=ppt/slides/slide50.xml><?xml version="1.0" encoding="utf-8"?>
-<p:sld xmlns:a="http://schemas.openxmlformats.org/drawingml/2006/main" xmlns:p="http://schemas.openxmlformats.org/presentationml/2006/main" xmlns:r="http://schemas.openxmlformats.org/officeDocument/2006/relationships">
-  <p:cSld>
-    <p:spTree>
-      <p:nvGrpSpPr>
-        <p:cNvPr id="1" name=""/>
-        <p:cNvGrpSpPr/>
-        <p:nvPr/>
-      </p:nvGrpSpPr>
-      <p:grpSpPr/>
-      <p:sp>
-        <p:nvSpPr>
-          <p:cNvPr id="2" name="Title 1"/>
-          <p:cNvSpPr>
-            <a:spLocks noGrp="1"/>
-          </p:cNvSpPr>
-          <p:nvPr>
-            <p:ph type="title"/>
-          </p:nvPr>
-        </p:nvSpPr>
-        <p:spPr/>
-        <p:txBody>
-          <a:bodyPr/>
-          <a:lstStyle/>
-          <a:p>
-            <a:r>
-              <a:rPr sz="2800" b="1">
-                <a:solidFill>
-                  <a:srgbClr val="002060"/>
-                </a:solidFill>
-                <a:latin typeface="Arial"/>
-              </a:rPr>
-              <a:t>GitHub Issues</a:t>
-            </a:r>
-          </a:p>
-        </p:txBody>
-      </p:sp>
-      <p:sp>
-        <p:nvSpPr>
-          <p:cNvPr id="3" name="Text Placeholder 2"/>
-          <p:cNvSpPr>
-            <a:spLocks noGrp="1"/>
-          </p:cNvSpPr>
-          <p:nvPr>
-            <p:ph type="body" idx="1"/>
-          </p:nvPr>
-        </p:nvSpPr>
-        <p:spPr/>
-        <p:txBody>
-          <a:bodyPr/>
-          <a:lstStyle/>
-          <a:p>
-            <a:pPr marL="0" indent="0" algn="l">
-              <a:lnSpc>
-                <a:spcPct val="90000"/>
-              </a:lnSpc>
-              <a:spcBef>
-                <a:spcPts val="0"/>
-              </a:spcBef>
-              <a:spcAft>
-                <a:spcPts val="0"/>
-              </a:spcAft>
-              <a:buNone/>
-            </a:pPr>
-            <a:r>
-              <a:rPr sz="1800" b="1">
-                <a:solidFill>
-                  <a:srgbClr val="002060"/>
-                </a:solidFill>
-                <a:latin typeface="Arial"/>
-              </a:rPr>
-              <a:t>The team's to-do list</a:t>
-            </a:r>
-          </a:p>
-          <a:p>
-            <a:pPr marL="342900" indent="-342900" algn="l">
-              <a:lnSpc>
-                <a:spcPct val="90000"/>
-              </a:lnSpc>
-              <a:spcBef>
-                <a:spcPts val="1000"/>
-              </a:spcBef>
-              <a:spcAft>
-                <a:spcPts val="0"/>
-              </a:spcAft>
-              <a:buClr>
-                <a:srgbClr val="44546A"/>
-              </a:buClr>
-              <a:buSzPts val="1600"/>
-              <a:buFont typeface="Arial"/>
-              <a:buChar char="•"/>
-            </a:pPr>
-            <a:r>
-              <a:rPr sz="1600" b="0">
-                <a:solidFill>
-                  <a:srgbClr val="44546A"/>
-                </a:solidFill>
-                <a:latin typeface="Arial"/>
-              </a:rPr>
-              <a:t>Track bugs, feature requests, data issues and project tasks</a:t>
-            </a:r>
-          </a:p>
-          <a:p>
-            <a:pPr marL="342900" indent="-342900" algn="l">
-              <a:lnSpc>
-                <a:spcPct val="90000"/>
-              </a:lnSpc>
-              <a:spcBef>
-                <a:spcPts val="1000"/>
-              </a:spcBef>
-              <a:spcAft>
-                <a:spcPts val="0"/>
-              </a:spcAft>
-              <a:buClr>
-                <a:srgbClr val="44546A"/>
-              </a:buClr>
-              <a:buSzPts val="1600"/>
-              <a:buFont typeface="Arial"/>
-              <a:buChar char="•"/>
-            </a:pPr>
-            <a:r>
-              <a:rPr sz="1600" b="0">
-                <a:solidFill>
-                  <a:srgbClr val="44546A"/>
-                </a:solidFill>
-                <a:latin typeface="Arial"/>
-              </a:rPr>
-              <a:t>Assign owners, add labels and set milestones</a:t>
-            </a:r>
-          </a:p>
-          <a:p>
-            <a:pPr marL="342900" indent="-342900" algn="l">
-              <a:lnSpc>
-                <a:spcPct val="90000"/>
-              </a:lnSpc>
-              <a:spcBef>
-                <a:spcPts val="1000"/>
-              </a:spcBef>
-              <a:spcAft>
-                <a:spcPts val="0"/>
-              </a:spcAft>
-              <a:buClr>
-                <a:srgbClr val="44546A"/>
-              </a:buClr>
-              <a:buSzPts val="1600"/>
-              <a:buFont typeface="Arial"/>
-              <a:buChar char="•"/>
-            </a:pPr>
-            <a:r>
-              <a:rPr sz="1600" b="0">
-                <a:solidFill>
-                  <a:srgbClr val="44546A"/>
-                </a:solidFill>
-                <a:latin typeface="Arial"/>
-              </a:rPr>
-              <a:t>Link to code: writing "closes #12" in a commit closes the issue on merge</a:t>
-            </a:r>
-          </a:p>
-          <a:p>
-            <a:pPr marL="0" indent="0" algn="l">
-              <a:lnSpc>
-                <a:spcPct val="90000"/>
-              </a:lnSpc>
-              <a:spcBef>
-                <a:spcPts val="1000"/>
-              </a:spcBef>
-              <a:spcAft>
-                <a:spcPts val="0"/>
-              </a:spcAft>
-              <a:buNone/>
-            </a:pPr>
-            <a:r>
-              <a:rPr sz="1600" b="0">
-                <a:solidFill>
-                  <a:srgbClr val="44546A"/>
-                </a:solidFill>
-                <a:latin typeface="Arial"/>
-              </a:rPr>
-              <a:t/>
-            </a:r>
-          </a:p>
-          <a:p>
-            <a:pPr marL="0" indent="0" algn="l">
-              <a:lnSpc>
-                <a:spcPct val="90000"/>
-              </a:lnSpc>
-              <a:spcBef>
-                <a:spcPts val="1000"/>
-              </a:spcBef>
-              <a:spcAft>
-                <a:spcPts val="0"/>
-              </a:spcAft>
-              <a:buNone/>
-            </a:pPr>
-            <a:r>
-              <a:rPr sz="1800" b="1">
-                <a:solidFill>
-                  <a:srgbClr val="002060"/>
-                </a:solidFill>
-                <a:latin typeface="Arial"/>
-              </a:rPr>
-              <a:t>Effective issues</a:t>
-            </a:r>
-          </a:p>
-          <a:p>
-            <a:pPr marL="342900" indent="-342900" algn="l">
-              <a:lnSpc>
-                <a:spcPct val="90000"/>
-              </a:lnSpc>
-              <a:spcBef>
-                <a:spcPts val="1000"/>
-              </a:spcBef>
-              <a:spcAft>
-                <a:spcPts val="0"/>
-              </a:spcAft>
-              <a:buClr>
-                <a:srgbClr val="44546A"/>
-              </a:buClr>
-              <a:buSzPts val="1600"/>
-              <a:buFont typeface="Arial"/>
-              <a:buChar char="•"/>
-            </a:pPr>
-            <a:r>
-              <a:rPr sz="1600" b="0">
-                <a:solidFill>
-                  <a:srgbClr val="44546A"/>
-                </a:solidFill>
-                <a:latin typeface="Arial"/>
-              </a:rPr>
-              <a:t>Use templates — clinical context, description, acceptance criteria</a:t>
-            </a:r>
-          </a:p>
-          <a:p>
-            <a:pPr marL="342900" indent="-342900" algn="l">
-              <a:lnSpc>
-                <a:spcPct val="90000"/>
-              </a:lnSpc>
-              <a:spcBef>
-                <a:spcPts val="1000"/>
-              </a:spcBef>
-              <a:spcAft>
-                <a:spcPts val="0"/>
-              </a:spcAft>
-              <a:buClr>
-                <a:srgbClr val="44546A"/>
-              </a:buClr>
-              <a:buSzPts val="1600"/>
-              <a:buFont typeface="Arial"/>
-              <a:buChar char="•"/>
-            </a:pPr>
-            <a:r>
-              <a:rPr sz="1600" b="0">
-                <a:solidFill>
-                  <a:srgbClr val="44546A"/>
-                </a:solidFill>
-                <a:latin typeface="Arial"/>
-              </a:rPr>
-              <a:t>Make the definition of done clear</a:t>
-            </a:r>
-          </a:p>
-        </p:txBody>
-      </p:sp>
-    </p:spTree>
-  </p:cSld>
-  <p:clrMapOvr>
-    <a:masterClrMapping/>
-  </p:clrMapOvr>
-</p:sld>
-</file>
-
-<file path=ppt/slides/slide51.xml><?xml version="1.0" encoding="utf-8"?>
 <p:sld xmlns:a="http://schemas.openxmlformats.org/drawingml/2006/main" xmlns:p="http://schemas.openxmlformats.org/presentationml/2006/main" xmlns:r="http://schemas.openxmlformats.org/officeDocument/2006/relationships">
   <p:cSld>
     <p:spTree>
@@ -22452,7 +22136,7 @@
 </p:sld>
 </file>
 
-<file path=ppt/slides/slide52.xml><?xml version="1.0" encoding="utf-8"?>
+<file path=ppt/slides/slide51.xml><?xml version="1.0" encoding="utf-8"?>
 <p:sld xmlns:a="http://schemas.openxmlformats.org/drawingml/2006/main" xmlns:p="http://schemas.openxmlformats.org/presentationml/2006/main" xmlns:r="http://schemas.openxmlformats.org/officeDocument/2006/relationships">
   <p:cSld>
     <p:spTree>
@@ -22751,6 +22435,248 @@
 </p:sld>
 </file>
 
+<file path=ppt/slides/slide52.xml><?xml version="1.0" encoding="utf-8"?>
+<p:sld xmlns:a="http://schemas.openxmlformats.org/drawingml/2006/main" xmlns:p="http://schemas.openxmlformats.org/presentationml/2006/main" xmlns:r="http://schemas.openxmlformats.org/officeDocument/2006/relationships">
+  <p:cSld>
+    <p:spTree>
+      <p:nvGrpSpPr>
+        <p:cNvPr id="1" name=""/>
+        <p:cNvGrpSpPr/>
+        <p:nvPr/>
+      </p:nvGrpSpPr>
+      <p:grpSpPr/>
+      <p:sp>
+        <p:nvSpPr>
+          <p:cNvPr id="2" name="Title 1"/>
+          <p:cNvSpPr>
+            <a:spLocks noGrp="1"/>
+          </p:cNvSpPr>
+          <p:nvPr>
+            <p:ph type="title"/>
+          </p:nvPr>
+        </p:nvSpPr>
+        <p:spPr/>
+        <p:txBody>
+          <a:bodyPr/>
+          <a:lstStyle/>
+          <a:p>
+            <a:r>
+              <a:rPr sz="2800" b="1">
+                <a:solidFill>
+                  <a:srgbClr val="002060"/>
+                </a:solidFill>
+                <a:latin typeface="Arial"/>
+              </a:rPr>
+              <a:t>GitHub Actions for Automation</a:t>
+            </a:r>
+          </a:p>
+        </p:txBody>
+      </p:sp>
+      <p:sp>
+        <p:nvSpPr>
+          <p:cNvPr id="3" name="Text Placeholder 2"/>
+          <p:cNvSpPr>
+            <a:spLocks noGrp="1"/>
+          </p:cNvSpPr>
+          <p:nvPr>
+            <p:ph type="body" idx="1"/>
+          </p:nvPr>
+        </p:nvSpPr>
+        <p:spPr/>
+        <p:txBody>
+          <a:bodyPr/>
+          <a:lstStyle/>
+          <a:p>
+            <a:pPr marL="0" indent="0" algn="l">
+              <a:lnSpc>
+                <a:spcPct val="90000"/>
+              </a:lnSpc>
+              <a:spcBef>
+                <a:spcPts val="0"/>
+              </a:spcBef>
+              <a:spcAft>
+                <a:spcPts val="0"/>
+              </a:spcAft>
+              <a:buNone/>
+            </a:pPr>
+            <a:r>
+              <a:rPr sz="1800" b="1">
+                <a:solidFill>
+                  <a:srgbClr val="002060"/>
+                </a:solidFill>
+                <a:latin typeface="Arial"/>
+              </a:rPr>
+              <a:t>What can be automated</a:t>
+            </a:r>
+          </a:p>
+          <a:p>
+            <a:pPr marL="342900" indent="-342900" algn="l">
+              <a:lnSpc>
+                <a:spcPct val="90000"/>
+              </a:lnSpc>
+              <a:spcBef>
+                <a:spcPts val="1000"/>
+              </a:spcBef>
+              <a:spcAft>
+                <a:spcPts val="0"/>
+              </a:spcAft>
+              <a:buClr>
+                <a:srgbClr val="44546A"/>
+              </a:buClr>
+              <a:buSzPts val="1600"/>
+              <a:buFont typeface="Arial"/>
+              <a:buChar char="•"/>
+            </a:pPr>
+            <a:r>
+              <a:rPr sz="1600" b="0">
+                <a:solidFill>
+                  <a:srgbClr val="44546A"/>
+                </a:solidFill>
+                <a:latin typeface="Arial"/>
+              </a:rPr>
+              <a:t>Data quality and freshness checks</a:t>
+            </a:r>
+          </a:p>
+          <a:p>
+            <a:pPr marL="342900" indent="-342900" algn="l">
+              <a:lnSpc>
+                <a:spcPct val="90000"/>
+              </a:lnSpc>
+              <a:spcBef>
+                <a:spcPts val="1000"/>
+              </a:spcBef>
+              <a:spcAft>
+                <a:spcPts val="0"/>
+              </a:spcAft>
+              <a:buClr>
+                <a:srgbClr val="44546A"/>
+              </a:buClr>
+              <a:buSzPts val="1600"/>
+              <a:buFont typeface="Arial"/>
+              <a:buChar char="•"/>
+            </a:pPr>
+            <a:r>
+              <a:rPr sz="1600" b="0">
+                <a:solidFill>
+                  <a:srgbClr val="44546A"/>
+                </a:solidFill>
+                <a:latin typeface="Arial"/>
+              </a:rPr>
+              <a:t>Scheduled monthly or quarterly reports</a:t>
+            </a:r>
+          </a:p>
+          <a:p>
+            <a:pPr marL="342900" indent="-342900" algn="l">
+              <a:lnSpc>
+                <a:spcPct val="90000"/>
+              </a:lnSpc>
+              <a:spcBef>
+                <a:spcPts val="1000"/>
+              </a:spcBef>
+              <a:spcAft>
+                <a:spcPts val="0"/>
+              </a:spcAft>
+              <a:buClr>
+                <a:srgbClr val="44546A"/>
+              </a:buClr>
+              <a:buSzPts val="1600"/>
+              <a:buFont typeface="Arial"/>
+              <a:buChar char="•"/>
+            </a:pPr>
+            <a:r>
+              <a:rPr sz="1600" b="0">
+                <a:solidFill>
+                  <a:srgbClr val="44546A"/>
+                </a:solidFill>
+                <a:latin typeface="Arial"/>
+              </a:rPr>
+              <a:t>Unit tests for calculations</a:t>
+            </a:r>
+          </a:p>
+          <a:p>
+            <a:pPr marL="342900" indent="-342900" algn="l">
+              <a:lnSpc>
+                <a:spcPct val="90000"/>
+              </a:lnSpc>
+              <a:spcBef>
+                <a:spcPts val="1000"/>
+              </a:spcBef>
+              <a:spcAft>
+                <a:spcPts val="0"/>
+              </a:spcAft>
+              <a:buClr>
+                <a:srgbClr val="44546A"/>
+              </a:buClr>
+              <a:buSzPts val="1600"/>
+              <a:buFont typeface="Arial"/>
+              <a:buChar char="•"/>
+            </a:pPr>
+            <a:r>
+              <a:rPr sz="1600" b="0">
+                <a:solidFill>
+                  <a:srgbClr val="44546A"/>
+                </a:solidFill>
+                <a:latin typeface="Arial"/>
+              </a:rPr>
+              <a:t>Notifications to Teams or email</a:t>
+            </a:r>
+          </a:p>
+          <a:p>
+            <a:pPr marL="0" indent="0" algn="l">
+              <a:lnSpc>
+                <a:spcPct val="90000"/>
+              </a:lnSpc>
+              <a:spcBef>
+                <a:spcPts val="1000"/>
+              </a:spcBef>
+              <a:spcAft>
+                <a:spcPts val="0"/>
+              </a:spcAft>
+              <a:buNone/>
+            </a:pPr>
+            <a:r>
+              <a:rPr sz="1600" b="0">
+                <a:solidFill>
+                  <a:srgbClr val="44546A"/>
+                </a:solidFill>
+                <a:latin typeface="Arial"/>
+              </a:rPr>
+              <a:t/>
+            </a:r>
+          </a:p>
+          <a:p>
+            <a:pPr marL="0" indent="0" algn="l">
+              <a:lnSpc>
+                <a:spcPct val="90000"/>
+              </a:lnSpc>
+              <a:spcBef>
+                <a:spcPts val="1000"/>
+              </a:spcBef>
+              <a:spcAft>
+                <a:spcPts val="0"/>
+              </a:spcAft>
+              <a:buNone/>
+            </a:pPr>
+            <a:r>
+              <a:rPr sz="1400" b="0">
+                <a:solidFill>
+                  <a:srgbClr val="44546A"/>
+                </a:solidFill>
+                <a:latin typeface="Arial"/>
+              </a:rPr>
+              <a:t>Actions are workflow files stored in the repository, so automation is reviewed like any other code.</a:t>
+            </a:r>
+          </a:p>
+        </p:txBody>
+      </p:sp>
+    </p:spTree>
+  </p:cSld>
+  <p:clrMapOvr>
+    <a:masterClrMapping/>
+  </p:clrMapOvr>
+</p:sld>
+</file>
+
 <file path=ppt/slides/slide53.xml><?xml version="1.0" encoding="utf-8"?>
 <p:sld xmlns:a="http://schemas.openxmlformats.org/drawingml/2006/main" xmlns:p="http://schemas.openxmlformats.org/presentationml/2006/main" xmlns:r="http://schemas.openxmlformats.org/officeDocument/2006/relationships">
   <p:cSld>
@@ -22783,7 +22709,7 @@
                 </a:solidFill>
                 <a:latin typeface="Arial"/>
               </a:rPr>
-              <a:t>GitHub Actions for Automation</a:t>
+              <a:t>GitHub Advanced Security: What It Is</a:t>
             </a:r>
           </a:p>
         </p:txBody>
@@ -22822,119 +22748,63 @@
                 </a:solidFill>
                 <a:latin typeface="Arial"/>
               </a:rPr>
-              <a:t>What can be automated</a:t>
-            </a:r>
-          </a:p>
-          <a:p>
-            <a:pPr marL="342900" indent="-342900" algn="l">
-              <a:lnSpc>
-                <a:spcPct val="90000"/>
-              </a:lnSpc>
-              <a:spcBef>
-                <a:spcPts val="1000"/>
-              </a:spcBef>
-              <a:spcAft>
-                <a:spcPts val="0"/>
-              </a:spcAft>
-              <a:buClr>
-                <a:srgbClr val="44546A"/>
-              </a:buClr>
-              <a:buSzPts val="1600"/>
-              <a:buFont typeface="Arial"/>
-              <a:buChar char="•"/>
-            </a:pPr>
-            <a:r>
-              <a:rPr sz="1600" b="0">
-                <a:solidFill>
-                  <a:srgbClr val="44546A"/>
-                </a:solidFill>
-                <a:latin typeface="Arial"/>
-              </a:rPr>
-              <a:t>Data quality and freshness checks</a:t>
-            </a:r>
-          </a:p>
-          <a:p>
-            <a:pPr marL="342900" indent="-342900" algn="l">
-              <a:lnSpc>
-                <a:spcPct val="90000"/>
-              </a:lnSpc>
-              <a:spcBef>
-                <a:spcPts val="1000"/>
-              </a:spcBef>
-              <a:spcAft>
-                <a:spcPts val="0"/>
-              </a:spcAft>
-              <a:buClr>
-                <a:srgbClr val="44546A"/>
-              </a:buClr>
-              <a:buSzPts val="1600"/>
-              <a:buFont typeface="Arial"/>
-              <a:buChar char="•"/>
-            </a:pPr>
-            <a:r>
-              <a:rPr sz="1600" b="0">
-                <a:solidFill>
-                  <a:srgbClr val="44546A"/>
-                </a:solidFill>
-                <a:latin typeface="Arial"/>
-              </a:rPr>
-              <a:t>Scheduled monthly or quarterly reports</a:t>
-            </a:r>
-          </a:p>
-          <a:p>
-            <a:pPr marL="342900" indent="-342900" algn="l">
-              <a:lnSpc>
-                <a:spcPct val="90000"/>
-              </a:lnSpc>
-              <a:spcBef>
-                <a:spcPts val="1000"/>
-              </a:spcBef>
-              <a:spcAft>
-                <a:spcPts val="0"/>
-              </a:spcAft>
-              <a:buClr>
-                <a:srgbClr val="44546A"/>
-              </a:buClr>
-              <a:buSzPts val="1600"/>
-              <a:buFont typeface="Arial"/>
-              <a:buChar char="•"/>
-            </a:pPr>
-            <a:r>
-              <a:rPr sz="1600" b="0">
-                <a:solidFill>
-                  <a:srgbClr val="44546A"/>
-                </a:solidFill>
-                <a:latin typeface="Arial"/>
-              </a:rPr>
-              <a:t>Unit tests for calculations</a:t>
-            </a:r>
-          </a:p>
-          <a:p>
-            <a:pPr marL="342900" indent="-342900" algn="l">
-              <a:lnSpc>
-                <a:spcPct val="90000"/>
-              </a:lnSpc>
-              <a:spcBef>
-                <a:spcPts val="1000"/>
-              </a:spcBef>
-              <a:spcAft>
-                <a:spcPts val="0"/>
-              </a:spcAft>
-              <a:buClr>
-                <a:srgbClr val="44546A"/>
-              </a:buClr>
-              <a:buSzPts val="1600"/>
-              <a:buFont typeface="Arial"/>
-              <a:buChar char="•"/>
-            </a:pPr>
-            <a:r>
-              <a:rPr sz="1600" b="0">
-                <a:solidFill>
-                  <a:srgbClr val="44546A"/>
-                </a:solidFill>
-                <a:latin typeface="Arial"/>
-              </a:rPr>
-              <a:t>Notifications to Teams or email</a:t>
+              <a:t>Two products, both for private repositories on paid plans</a:t>
+            </a:r>
+          </a:p>
+          <a:p>
+            <a:pPr marL="342900" indent="-342900" algn="l">
+              <a:lnSpc>
+                <a:spcPct val="90000"/>
+              </a:lnSpc>
+              <a:spcBef>
+                <a:spcPts val="1000"/>
+              </a:spcBef>
+              <a:spcAft>
+                <a:spcPts val="0"/>
+              </a:spcAft>
+              <a:buClr>
+                <a:srgbClr val="44546A"/>
+              </a:buClr>
+              <a:buSzPts val="1600"/>
+              <a:buFont typeface="Arial"/>
+              <a:buChar char="•"/>
+            </a:pPr>
+            <a:r>
+              <a:rPr sz="1600" b="0">
+                <a:solidFill>
+                  <a:srgbClr val="44546A"/>
+                </a:solidFill>
+                <a:latin typeface="Arial"/>
+              </a:rPr>
+              <a:t>Secret Protection — secret scanning, push protection and custom patterns</a:t>
+            </a:r>
+          </a:p>
+          <a:p>
+            <a:pPr marL="342900" indent="-342900" algn="l">
+              <a:lnSpc>
+                <a:spcPct val="90000"/>
+              </a:lnSpc>
+              <a:spcBef>
+                <a:spcPts val="1000"/>
+              </a:spcBef>
+              <a:spcAft>
+                <a:spcPts val="0"/>
+              </a:spcAft>
+              <a:buClr>
+                <a:srgbClr val="44546A"/>
+              </a:buClr>
+              <a:buSzPts val="1600"/>
+              <a:buFont typeface="Arial"/>
+              <a:buChar char="•"/>
+            </a:pPr>
+            <a:r>
+              <a:rPr sz="1600" b="0">
+                <a:solidFill>
+                  <a:srgbClr val="44546A"/>
+                </a:solidFill>
+                <a:latin typeface="Arial"/>
+              </a:rPr>
+              <a:t>Code Security — code scanning with CodeQL, Copilot Autofix, dependency review</a:t>
             </a:r>
           </a:p>
           <a:p>
@@ -22974,13 +22844,87 @@
               <a:buNone/>
             </a:pPr>
             <a:r>
+              <a:rPr sz="1800" b="1">
+                <a:solidFill>
+                  <a:srgbClr val="002060"/>
+                </a:solidFill>
+                <a:latin typeface="Arial"/>
+              </a:rPr>
+              <a:t>Available on every plan</a:t>
+            </a:r>
+          </a:p>
+          <a:p>
+            <a:pPr marL="342900" indent="-342900" algn="l">
+              <a:lnSpc>
+                <a:spcPct val="90000"/>
+              </a:lnSpc>
+              <a:spcBef>
+                <a:spcPts val="1000"/>
+              </a:spcBef>
+              <a:spcAft>
+                <a:spcPts val="0"/>
+              </a:spcAft>
+              <a:buClr>
+                <a:srgbClr val="44546A"/>
+              </a:buClr>
+              <a:buSzPts val="1600"/>
+              <a:buFont typeface="Arial"/>
+              <a:buChar char="•"/>
+            </a:pPr>
+            <a:r>
+              <a:rPr sz="1600" b="0">
+                <a:solidFill>
+                  <a:srgbClr val="44546A"/>
+                </a:solidFill>
+                <a:latin typeface="Arial"/>
+              </a:rPr>
+              <a:t>Dependency graph, Dependabot alerts and Dependabot updates</a:t>
+            </a:r>
+          </a:p>
+          <a:p>
+            <a:pPr marL="0" indent="0" algn="l">
+              <a:lnSpc>
+                <a:spcPct val="90000"/>
+              </a:lnSpc>
+              <a:spcBef>
+                <a:spcPts val="1000"/>
+              </a:spcBef>
+              <a:spcAft>
+                <a:spcPts val="0"/>
+              </a:spcAft>
+              <a:buNone/>
+            </a:pPr>
+            <a:r>
+              <a:rPr sz="1600" b="0">
+                <a:solidFill>
+                  <a:srgbClr val="44546A"/>
+                </a:solidFill>
+                <a:latin typeface="Arial"/>
+              </a:rPr>
+              <a:t/>
+            </a:r>
+          </a:p>
+          <a:p>
+            <a:pPr marL="0" indent="0" algn="l">
+              <a:lnSpc>
+                <a:spcPct val="90000"/>
+              </a:lnSpc>
+              <a:spcBef>
+                <a:spcPts val="1000"/>
+              </a:spcBef>
+              <a:spcAft>
+                <a:spcPts val="0"/>
+              </a:spcAft>
+              <a:buNone/>
+            </a:pPr>
+            <a:r>
               <a:rPr sz="1400" b="0">
                 <a:solidFill>
                   <a:srgbClr val="44546A"/>
                 </a:solidFill>
                 <a:latin typeface="Arial"/>
               </a:rPr>
-              <a:t>Actions are workflow files stored in the repository, so automation is reviewed like any other code.</a:t>
+              <a:t>Both products are available to ABUHB private repositories. The GitHub admin team switches them on per repository.</a:t>
             </a:r>
           </a:p>
         </p:txBody>
@@ -22994,266 +22938,6 @@
 </file>
 
 <file path=ppt/slides/slide54.xml><?xml version="1.0" encoding="utf-8"?>
-<p:sld xmlns:a="http://schemas.openxmlformats.org/drawingml/2006/main" xmlns:p="http://schemas.openxmlformats.org/presentationml/2006/main" xmlns:r="http://schemas.openxmlformats.org/officeDocument/2006/relationships">
-  <p:cSld>
-    <p:spTree>
-      <p:nvGrpSpPr>
-        <p:cNvPr id="1" name=""/>
-        <p:cNvGrpSpPr/>
-        <p:nvPr/>
-      </p:nvGrpSpPr>
-      <p:grpSpPr/>
-      <p:sp>
-        <p:nvSpPr>
-          <p:cNvPr id="2" name="Title 1"/>
-          <p:cNvSpPr>
-            <a:spLocks noGrp="1"/>
-          </p:cNvSpPr>
-          <p:nvPr>
-            <p:ph type="title"/>
-          </p:nvPr>
-        </p:nvSpPr>
-        <p:spPr/>
-        <p:txBody>
-          <a:bodyPr/>
-          <a:lstStyle/>
-          <a:p>
-            <a:r>
-              <a:rPr sz="2800" b="1">
-                <a:solidFill>
-                  <a:srgbClr val="002060"/>
-                </a:solidFill>
-                <a:latin typeface="Arial"/>
-              </a:rPr>
-              <a:t>GitHub Advanced Security: What It Is</a:t>
-            </a:r>
-          </a:p>
-        </p:txBody>
-      </p:sp>
-      <p:sp>
-        <p:nvSpPr>
-          <p:cNvPr id="3" name="Text Placeholder 2"/>
-          <p:cNvSpPr>
-            <a:spLocks noGrp="1"/>
-          </p:cNvSpPr>
-          <p:nvPr>
-            <p:ph type="body" idx="1"/>
-          </p:nvPr>
-        </p:nvSpPr>
-        <p:spPr/>
-        <p:txBody>
-          <a:bodyPr/>
-          <a:lstStyle/>
-          <a:p>
-            <a:pPr marL="0" indent="0" algn="l">
-              <a:lnSpc>
-                <a:spcPct val="90000"/>
-              </a:lnSpc>
-              <a:spcBef>
-                <a:spcPts val="0"/>
-              </a:spcBef>
-              <a:spcAft>
-                <a:spcPts val="0"/>
-              </a:spcAft>
-              <a:buNone/>
-            </a:pPr>
-            <a:r>
-              <a:rPr sz="1800" b="1">
-                <a:solidFill>
-                  <a:srgbClr val="002060"/>
-                </a:solidFill>
-                <a:latin typeface="Arial"/>
-              </a:rPr>
-              <a:t>Two products, both for private repositories on paid plans</a:t>
-            </a:r>
-          </a:p>
-          <a:p>
-            <a:pPr marL="342900" indent="-342900" algn="l">
-              <a:lnSpc>
-                <a:spcPct val="90000"/>
-              </a:lnSpc>
-              <a:spcBef>
-                <a:spcPts val="1000"/>
-              </a:spcBef>
-              <a:spcAft>
-                <a:spcPts val="0"/>
-              </a:spcAft>
-              <a:buClr>
-                <a:srgbClr val="44546A"/>
-              </a:buClr>
-              <a:buSzPts val="1600"/>
-              <a:buFont typeface="Arial"/>
-              <a:buChar char="•"/>
-            </a:pPr>
-            <a:r>
-              <a:rPr sz="1600" b="0">
-                <a:solidFill>
-                  <a:srgbClr val="44546A"/>
-                </a:solidFill>
-                <a:latin typeface="Arial"/>
-              </a:rPr>
-              <a:t>Secret Protection — secret scanning, push protection and custom patterns</a:t>
-            </a:r>
-          </a:p>
-          <a:p>
-            <a:pPr marL="342900" indent="-342900" algn="l">
-              <a:lnSpc>
-                <a:spcPct val="90000"/>
-              </a:lnSpc>
-              <a:spcBef>
-                <a:spcPts val="1000"/>
-              </a:spcBef>
-              <a:spcAft>
-                <a:spcPts val="0"/>
-              </a:spcAft>
-              <a:buClr>
-                <a:srgbClr val="44546A"/>
-              </a:buClr>
-              <a:buSzPts val="1600"/>
-              <a:buFont typeface="Arial"/>
-              <a:buChar char="•"/>
-            </a:pPr>
-            <a:r>
-              <a:rPr sz="1600" b="0">
-                <a:solidFill>
-                  <a:srgbClr val="44546A"/>
-                </a:solidFill>
-                <a:latin typeface="Arial"/>
-              </a:rPr>
-              <a:t>Code Security — code scanning with CodeQL, Copilot Autofix, dependency review</a:t>
-            </a:r>
-          </a:p>
-          <a:p>
-            <a:pPr marL="0" indent="0" algn="l">
-              <a:lnSpc>
-                <a:spcPct val="90000"/>
-              </a:lnSpc>
-              <a:spcBef>
-                <a:spcPts val="1000"/>
-              </a:spcBef>
-              <a:spcAft>
-                <a:spcPts val="0"/>
-              </a:spcAft>
-              <a:buNone/>
-            </a:pPr>
-            <a:r>
-              <a:rPr sz="1600" b="0">
-                <a:solidFill>
-                  <a:srgbClr val="44546A"/>
-                </a:solidFill>
-                <a:latin typeface="Arial"/>
-              </a:rPr>
-              <a:t/>
-            </a:r>
-          </a:p>
-          <a:p>
-            <a:pPr marL="0" indent="0" algn="l">
-              <a:lnSpc>
-                <a:spcPct val="90000"/>
-              </a:lnSpc>
-              <a:spcBef>
-                <a:spcPts val="1000"/>
-              </a:spcBef>
-              <a:spcAft>
-                <a:spcPts val="0"/>
-              </a:spcAft>
-              <a:buNone/>
-            </a:pPr>
-            <a:r>
-              <a:rPr sz="1800" b="1">
-                <a:solidFill>
-                  <a:srgbClr val="002060"/>
-                </a:solidFill>
-                <a:latin typeface="Arial"/>
-              </a:rPr>
-              <a:t>Available on every plan</a:t>
-            </a:r>
-          </a:p>
-          <a:p>
-            <a:pPr marL="342900" indent="-342900" algn="l">
-              <a:lnSpc>
-                <a:spcPct val="90000"/>
-              </a:lnSpc>
-              <a:spcBef>
-                <a:spcPts val="1000"/>
-              </a:spcBef>
-              <a:spcAft>
-                <a:spcPts val="0"/>
-              </a:spcAft>
-              <a:buClr>
-                <a:srgbClr val="44546A"/>
-              </a:buClr>
-              <a:buSzPts val="1600"/>
-              <a:buFont typeface="Arial"/>
-              <a:buChar char="•"/>
-            </a:pPr>
-            <a:r>
-              <a:rPr sz="1600" b="0">
-                <a:solidFill>
-                  <a:srgbClr val="44546A"/>
-                </a:solidFill>
-                <a:latin typeface="Arial"/>
-              </a:rPr>
-              <a:t>Dependency graph, Dependabot alerts and Dependabot updates</a:t>
-            </a:r>
-          </a:p>
-          <a:p>
-            <a:pPr marL="0" indent="0" algn="l">
-              <a:lnSpc>
-                <a:spcPct val="90000"/>
-              </a:lnSpc>
-              <a:spcBef>
-                <a:spcPts val="1000"/>
-              </a:spcBef>
-              <a:spcAft>
-                <a:spcPts val="0"/>
-              </a:spcAft>
-              <a:buNone/>
-            </a:pPr>
-            <a:r>
-              <a:rPr sz="1600" b="0">
-                <a:solidFill>
-                  <a:srgbClr val="44546A"/>
-                </a:solidFill>
-                <a:latin typeface="Arial"/>
-              </a:rPr>
-              <a:t/>
-            </a:r>
-          </a:p>
-          <a:p>
-            <a:pPr marL="0" indent="0" algn="l">
-              <a:lnSpc>
-                <a:spcPct val="90000"/>
-              </a:lnSpc>
-              <a:spcBef>
-                <a:spcPts val="1000"/>
-              </a:spcBef>
-              <a:spcAft>
-                <a:spcPts val="0"/>
-              </a:spcAft>
-              <a:buNone/>
-            </a:pPr>
-            <a:r>
-              <a:rPr sz="1400" b="0">
-                <a:solidFill>
-                  <a:srgbClr val="44546A"/>
-                </a:solidFill>
-                <a:latin typeface="Arial"/>
-              </a:rPr>
-              <a:t>Both products are available to ABUHB private repositories. The GitHub admin team switches them on per repository.</a:t>
-            </a:r>
-          </a:p>
-        </p:txBody>
-      </p:sp>
-    </p:spTree>
-  </p:cSld>
-  <p:clrMapOvr>
-    <a:masterClrMapping/>
-  </p:clrMapOvr>
-</p:sld>
-</file>
-
-<file path=ppt/slides/slide55.xml><?xml version="1.0" encoding="utf-8"?>
 <p:sld xmlns:a="http://schemas.openxmlformats.org/drawingml/2006/main" xmlns:p="http://schemas.openxmlformats.org/presentationml/2006/main" xmlns:r="http://schemas.openxmlformats.org/officeDocument/2006/relationships">
   <p:cSld>
     <p:spTree>
@@ -23552,6 +23236,350 @@
 </p:sld>
 </file>
 
+<file path=ppt/slides/slide55.xml><?xml version="1.0" encoding="utf-8"?>
+<p:sld xmlns:a="http://schemas.openxmlformats.org/drawingml/2006/main" xmlns:p="http://schemas.openxmlformats.org/presentationml/2006/main" xmlns:r="http://schemas.openxmlformats.org/officeDocument/2006/relationships">
+  <p:cSld>
+    <p:spTree>
+      <p:nvGrpSpPr>
+        <p:cNvPr id="1" name=""/>
+        <p:cNvGrpSpPr/>
+        <p:nvPr/>
+      </p:nvGrpSpPr>
+      <p:grpSpPr/>
+      <p:sp>
+        <p:nvSpPr>
+          <p:cNvPr id="2" name="Title 1"/>
+          <p:cNvSpPr>
+            <a:spLocks noGrp="1"/>
+          </p:cNvSpPr>
+          <p:nvPr>
+            <p:ph type="title"/>
+          </p:nvPr>
+        </p:nvSpPr>
+        <p:spPr/>
+        <p:txBody>
+          <a:bodyPr/>
+          <a:lstStyle/>
+          <a:p>
+            <a:r>
+              <a:rPr sz="2800" b="1">
+                <a:solidFill>
+                  <a:srgbClr val="002060"/>
+                </a:solidFill>
+                <a:latin typeface="Arial"/>
+              </a:rPr>
+              <a:t>Reading and Acting on Security Alerts</a:t>
+            </a:r>
+          </a:p>
+        </p:txBody>
+      </p:sp>
+      <p:sp>
+        <p:nvSpPr>
+          <p:cNvPr id="3" name="Text Placeholder 2"/>
+          <p:cNvSpPr>
+            <a:spLocks noGrp="1"/>
+          </p:cNvSpPr>
+          <p:nvPr>
+            <p:ph type="body" idx="1"/>
+          </p:nvPr>
+        </p:nvSpPr>
+        <p:spPr/>
+        <p:txBody>
+          <a:bodyPr/>
+          <a:lstStyle/>
+          <a:p>
+            <a:pPr marL="0" indent="0" algn="l">
+              <a:lnSpc>
+                <a:spcPct val="90000"/>
+              </a:lnSpc>
+              <a:spcBef>
+                <a:spcPts val="0"/>
+              </a:spcBef>
+              <a:spcAft>
+                <a:spcPts val="0"/>
+              </a:spcAft>
+              <a:buNone/>
+            </a:pPr>
+            <a:r>
+              <a:rPr sz="1800" b="1">
+                <a:solidFill>
+                  <a:srgbClr val="002060"/>
+                </a:solidFill>
+                <a:latin typeface="Arial"/>
+              </a:rPr>
+              <a:t>Where to look</a:t>
+            </a:r>
+          </a:p>
+          <a:p>
+            <a:pPr marL="342900" indent="-342900" algn="l">
+              <a:lnSpc>
+                <a:spcPct val="90000"/>
+              </a:lnSpc>
+              <a:spcBef>
+                <a:spcPts val="1000"/>
+              </a:spcBef>
+              <a:spcAft>
+                <a:spcPts val="0"/>
+              </a:spcAft>
+              <a:buClr>
+                <a:srgbClr val="44546A"/>
+              </a:buClr>
+              <a:buSzPts val="1600"/>
+              <a:buFont typeface="Arial"/>
+              <a:buChar char="•"/>
+            </a:pPr>
+            <a:r>
+              <a:rPr sz="1600" b="0">
+                <a:solidFill>
+                  <a:srgbClr val="44546A"/>
+                </a:solidFill>
+                <a:latin typeface="Arial"/>
+              </a:rPr>
+              <a:t>The Security tab of the repository lists every alert, with severity</a:t>
+            </a:r>
+          </a:p>
+          <a:p>
+            <a:pPr marL="342900" indent="-342900" algn="l">
+              <a:lnSpc>
+                <a:spcPct val="90000"/>
+              </a:lnSpc>
+              <a:spcBef>
+                <a:spcPts val="1000"/>
+              </a:spcBef>
+              <a:spcAft>
+                <a:spcPts val="0"/>
+              </a:spcAft>
+              <a:buClr>
+                <a:srgbClr val="44546A"/>
+              </a:buClr>
+              <a:buSzPts val="1600"/>
+              <a:buFont typeface="Arial"/>
+              <a:buChar char="•"/>
+            </a:pPr>
+            <a:r>
+              <a:rPr sz="1600" b="0">
+                <a:solidFill>
+                  <a:srgbClr val="44546A"/>
+                </a:solidFill>
+                <a:latin typeface="Arial"/>
+              </a:rPr>
+              <a:t>Pull request checks show new problems before they merge</a:t>
+            </a:r>
+          </a:p>
+          <a:p>
+            <a:pPr marL="0" indent="0" algn="l">
+              <a:lnSpc>
+                <a:spcPct val="90000"/>
+              </a:lnSpc>
+              <a:spcBef>
+                <a:spcPts val="1000"/>
+              </a:spcBef>
+              <a:spcAft>
+                <a:spcPts val="0"/>
+              </a:spcAft>
+              <a:buNone/>
+            </a:pPr>
+            <a:r>
+              <a:rPr sz="1600" b="0">
+                <a:solidFill>
+                  <a:srgbClr val="44546A"/>
+                </a:solidFill>
+                <a:latin typeface="Arial"/>
+              </a:rPr>
+              <a:t/>
+            </a:r>
+          </a:p>
+          <a:p>
+            <a:pPr marL="0" indent="0" algn="l">
+              <a:lnSpc>
+                <a:spcPct val="90000"/>
+              </a:lnSpc>
+              <a:spcBef>
+                <a:spcPts val="1000"/>
+              </a:spcBef>
+              <a:spcAft>
+                <a:spcPts val="0"/>
+              </a:spcAft>
+              <a:buNone/>
+            </a:pPr>
+            <a:r>
+              <a:rPr sz="1800" b="1">
+                <a:solidFill>
+                  <a:srgbClr val="002060"/>
+                </a:solidFill>
+                <a:latin typeface="Arial"/>
+              </a:rPr>
+              <a:t>What to do</a:t>
+            </a:r>
+          </a:p>
+          <a:p>
+            <a:pPr marL="342900" indent="-342900" algn="l">
+              <a:lnSpc>
+                <a:spcPct val="90000"/>
+              </a:lnSpc>
+              <a:spcBef>
+                <a:spcPts val="1000"/>
+              </a:spcBef>
+              <a:spcAft>
+                <a:spcPts val="0"/>
+              </a:spcAft>
+              <a:buClr>
+                <a:srgbClr val="44546A"/>
+              </a:buClr>
+              <a:buSzPts val="1600"/>
+              <a:buFont typeface="Arial"/>
+              <a:buChar char="•"/>
+            </a:pPr>
+            <a:r>
+              <a:rPr sz="1600" b="0">
+                <a:solidFill>
+                  <a:srgbClr val="44546A"/>
+                </a:solidFill>
+                <a:latin typeface="Arial"/>
+              </a:rPr>
+              <a:t>Secret alert — revoke the secret, tell the admin team, then clean up</a:t>
+            </a:r>
+          </a:p>
+          <a:p>
+            <a:pPr marL="342900" indent="-342900" algn="l">
+              <a:lnSpc>
+                <a:spcPct val="90000"/>
+              </a:lnSpc>
+              <a:spcBef>
+                <a:spcPts val="1000"/>
+              </a:spcBef>
+              <a:spcAft>
+                <a:spcPts val="0"/>
+              </a:spcAft>
+              <a:buClr>
+                <a:srgbClr val="44546A"/>
+              </a:buClr>
+              <a:buSzPts val="1600"/>
+              <a:buFont typeface="Arial"/>
+              <a:buChar char="•"/>
+            </a:pPr>
+            <a:r>
+              <a:rPr sz="1600" b="0">
+                <a:solidFill>
+                  <a:srgbClr val="44546A"/>
+                </a:solidFill>
+                <a:latin typeface="Arial"/>
+              </a:rPr>
+              <a:t>Code alert — read the explanation, fix it, or review a Copilot Autofix suggestion</a:t>
+            </a:r>
+          </a:p>
+          <a:p>
+            <a:pPr marL="342900" indent="-342900" algn="l">
+              <a:lnSpc>
+                <a:spcPct val="90000"/>
+              </a:lnSpc>
+              <a:spcBef>
+                <a:spcPts val="1000"/>
+              </a:spcBef>
+              <a:spcAft>
+                <a:spcPts val="0"/>
+              </a:spcAft>
+              <a:buClr>
+                <a:srgbClr val="44546A"/>
+              </a:buClr>
+              <a:buSzPts val="1600"/>
+              <a:buFont typeface="Arial"/>
+              <a:buChar char="•"/>
+            </a:pPr>
+            <a:r>
+              <a:rPr sz="1600" b="0">
+                <a:solidFill>
+                  <a:srgbClr val="44546A"/>
+                </a:solidFill>
+                <a:latin typeface="Arial"/>
+              </a:rPr>
+              <a:t>Dependency alert — merge the Dependabot pull request after the tests pass</a:t>
+            </a:r>
+          </a:p>
+          <a:p>
+            <a:pPr marL="342900" indent="-342900" algn="l">
+              <a:lnSpc>
+                <a:spcPct val="90000"/>
+              </a:lnSpc>
+              <a:spcBef>
+                <a:spcPts val="1000"/>
+              </a:spcBef>
+              <a:spcAft>
+                <a:spcPts val="0"/>
+              </a:spcAft>
+              <a:buClr>
+                <a:srgbClr val="44546A"/>
+              </a:buClr>
+              <a:buSzPts val="1600"/>
+              <a:buFont typeface="Arial"/>
+              <a:buChar char="•"/>
+            </a:pPr>
+            <a:r>
+              <a:rPr sz="1600" b="0">
+                <a:solidFill>
+                  <a:srgbClr val="44546A"/>
+                </a:solidFill>
+                <a:latin typeface="Arial"/>
+              </a:rPr>
+              <a:t>Dismiss only with a reason that a colleague could check</a:t>
+            </a:r>
+          </a:p>
+          <a:p>
+            <a:pPr marL="0" indent="0" algn="l">
+              <a:lnSpc>
+                <a:spcPct val="90000"/>
+              </a:lnSpc>
+              <a:spcBef>
+                <a:spcPts val="1000"/>
+              </a:spcBef>
+              <a:spcAft>
+                <a:spcPts val="0"/>
+              </a:spcAft>
+              <a:buNone/>
+            </a:pPr>
+            <a:r>
+              <a:rPr sz="1600" b="0">
+                <a:solidFill>
+                  <a:srgbClr val="44546A"/>
+                </a:solidFill>
+                <a:latin typeface="Arial"/>
+              </a:rPr>
+              <a:t/>
+            </a:r>
+          </a:p>
+          <a:p>
+            <a:pPr marL="0" indent="0" algn="l">
+              <a:lnSpc>
+                <a:spcPct val="90000"/>
+              </a:lnSpc>
+              <a:spcBef>
+                <a:spcPts val="1000"/>
+              </a:spcBef>
+              <a:spcAft>
+                <a:spcPts val="0"/>
+              </a:spcAft>
+              <a:buNone/>
+            </a:pPr>
+            <a:r>
+              <a:rPr sz="1400" b="1">
+                <a:solidFill>
+                  <a:srgbClr val="002060"/>
+                </a:solidFill>
+                <a:latin typeface="Arial"/>
+              </a:rPr>
+              <a:t>An alert is a prompt to act, not a verdict. A human decides.</a:t>
+            </a:r>
+          </a:p>
+        </p:txBody>
+      </p:sp>
+    </p:spTree>
+  </p:cSld>
+  <p:clrMapOvr>
+    <a:masterClrMapping/>
+  </p:clrMapOvr>
+</p:sld>
+</file>
+
 <file path=ppt/slides/slide56.xml><?xml version="1.0" encoding="utf-8"?>
 <p:sld xmlns:a="http://schemas.openxmlformats.org/drawingml/2006/main" xmlns:p="http://schemas.openxmlformats.org/presentationml/2006/main" xmlns:r="http://schemas.openxmlformats.org/officeDocument/2006/relationships">
   <p:cSld>
@@ -23584,7 +23612,7 @@
                 </a:solidFill>
                 <a:latin typeface="Arial"/>
               </a:rPr>
-              <a:t>Reading and Acting on Security Alerts</a:t>
+              <a:t>Your Area: Checkpoint 7</a:t>
             </a:r>
           </a:p>
         </p:txBody>
@@ -23623,63 +23651,119 @@
                 </a:solidFill>
                 <a:latin typeface="Arial"/>
               </a:rPr>
-              <a:t>Where to look</a:t>
-            </a:r>
-          </a:p>
-          <a:p>
-            <a:pPr marL="342900" indent="-342900" algn="l">
-              <a:lnSpc>
-                <a:spcPct val="90000"/>
-              </a:lnSpc>
-              <a:spcBef>
-                <a:spcPts val="1000"/>
-              </a:spcBef>
-              <a:spcAft>
-                <a:spcPts val="0"/>
-              </a:spcAft>
-              <a:buClr>
-                <a:srgbClr val="44546A"/>
-              </a:buClr>
-              <a:buSzPts val="1600"/>
-              <a:buFont typeface="Arial"/>
-              <a:buChar char="•"/>
-            </a:pPr>
-            <a:r>
-              <a:rPr sz="1600" b="0">
-                <a:solidFill>
-                  <a:srgbClr val="44546A"/>
-                </a:solidFill>
-                <a:latin typeface="Arial"/>
-              </a:rPr>
-              <a:t>The Security tab of the repository lists every alert, with severity</a:t>
-            </a:r>
-          </a:p>
-          <a:p>
-            <a:pPr marL="342900" indent="-342900" algn="l">
-              <a:lnSpc>
-                <a:spcPct val="90000"/>
-              </a:lnSpc>
-              <a:spcBef>
-                <a:spcPts val="1000"/>
-              </a:spcBef>
-              <a:spcAft>
-                <a:spcPts val="0"/>
-              </a:spcAft>
-              <a:buClr>
-                <a:srgbClr val="44546A"/>
-              </a:buClr>
-              <a:buSzPts val="1600"/>
-              <a:buFont typeface="Arial"/>
-              <a:buChar char="•"/>
-            </a:pPr>
-            <a:r>
-              <a:rPr sz="1600" b="0">
-                <a:solidFill>
-                  <a:srgbClr val="44546A"/>
-                </a:solidFill>
-                <a:latin typeface="Arial"/>
-              </a:rPr>
-              <a:t>Pull request checks show new problems before they merge</a:t>
+              <a:t>Raise an issue and pin your tools (5 minutes)</a:t>
+            </a:r>
+          </a:p>
+          <a:p>
+            <a:pPr marL="342900" indent="-342900" algn="l">
+              <a:lnSpc>
+                <a:spcPct val="90000"/>
+              </a:lnSpc>
+              <a:spcBef>
+                <a:spcPts val="1000"/>
+              </a:spcBef>
+              <a:spcAft>
+                <a:spcPts val="0"/>
+              </a:spcAft>
+              <a:buClr>
+                <a:srgbClr val="44546A"/>
+              </a:buClr>
+              <a:buSzPts val="1600"/>
+              <a:buFont typeface="Arial"/>
+              <a:buChar char="•"/>
+            </a:pPr>
+            <a:r>
+              <a:rPr sz="1600" b="0">
+                <a:solidFill>
+                  <a:srgbClr val="44546A"/>
+                </a:solidFill>
+                <a:latin typeface="Arial"/>
+              </a:rPr>
+              <a:t>Open an issue titled Area: &lt;your-folder&gt; with a checklist of what you have added</a:t>
+            </a:r>
+          </a:p>
+          <a:p>
+            <a:pPr marL="342900" indent="-342900" algn="l">
+              <a:lnSpc>
+                <a:spcPct val="90000"/>
+              </a:lnSpc>
+              <a:spcBef>
+                <a:spcPts val="1000"/>
+              </a:spcBef>
+              <a:spcAft>
+                <a:spcPts val="0"/>
+              </a:spcAft>
+              <a:buClr>
+                <a:srgbClr val="44546A"/>
+              </a:buClr>
+              <a:buSzPts val="1600"/>
+              <a:buFont typeface="Arial"/>
+              <a:buChar char="•"/>
+            </a:pPr>
+            <a:r>
+              <a:rPr sz="1600" b="0">
+                <a:solidFill>
+                  <a:srgbClr val="44546A"/>
+                </a:solidFill>
+                <a:latin typeface="Arial"/>
+              </a:rPr>
+              <a:t>Add requirements.txt listing pandas and matplotlib with the versions you choose</a:t>
+            </a:r>
+          </a:p>
+          <a:p>
+            <a:pPr marL="342900" indent="-342900" algn="l">
+              <a:lnSpc>
+                <a:spcPct val="90000"/>
+              </a:lnSpc>
+              <a:spcBef>
+                <a:spcPts val="1000"/>
+              </a:spcBef>
+              <a:spcAft>
+                <a:spcPts val="0"/>
+              </a:spcAft>
+              <a:buClr>
+                <a:srgbClr val="44546A"/>
+              </a:buClr>
+              <a:buSzPts val="1600"/>
+              <a:buFont typeface="Arial"/>
+              <a:buChar char="•"/>
+            </a:pPr>
+            <a:r>
+              <a:rPr sz="1600" b="0">
+                <a:solidFill>
+                  <a:srgbClr val="44546A"/>
+                </a:solidFill>
+                <a:latin typeface="Arial"/>
+              </a:rPr>
+              <a:t>Link the issue from your pull request by writing Closes #&lt;issue number&gt;</a:t>
+            </a:r>
+          </a:p>
+          <a:p>
+            <a:pPr marL="342900" indent="-342900" algn="l">
+              <a:lnSpc>
+                <a:spcPct val="90000"/>
+              </a:lnSpc>
+              <a:spcBef>
+                <a:spcPts val="1000"/>
+              </a:spcBef>
+              <a:spcAft>
+                <a:spcPts val="0"/>
+              </a:spcAft>
+              <a:buClr>
+                <a:srgbClr val="44546A"/>
+              </a:buClr>
+              <a:buSzPts val="1600"/>
+              <a:buFont typeface="Arial"/>
+              <a:buChar char="•"/>
+            </a:pPr>
+            <a:r>
+              <a:rPr sz="1600" b="0">
+                <a:solidFill>
+                  <a:srgbClr val="44546A"/>
+                </a:solidFill>
+                <a:latin typeface="Arial"/>
+              </a:rPr>
+              <a:t>Open the Security tab and note which alert types are switched on</a:t>
             </a:r>
           </a:p>
           <a:p>
@@ -23725,165 +23809,35 @@
                 </a:solidFill>
                 <a:latin typeface="Arial"/>
               </a:rPr>
-              <a:t>What to do</a:t>
-            </a:r>
-          </a:p>
-          <a:p>
-            <a:pPr marL="342900" indent="-342900" algn="l">
-              <a:lnSpc>
-                <a:spcPct val="90000"/>
-              </a:lnSpc>
-              <a:spcBef>
-                <a:spcPts val="1000"/>
-              </a:spcBef>
-              <a:spcAft>
-                <a:spcPts val="0"/>
-              </a:spcAft>
-              <a:buClr>
-                <a:srgbClr val="44546A"/>
-              </a:buClr>
-              <a:buSzPts val="1600"/>
-              <a:buFont typeface="Arial"/>
-              <a:buChar char="•"/>
-            </a:pPr>
-            <a:r>
-              <a:rPr sz="1600" b="0">
-                <a:solidFill>
-                  <a:srgbClr val="44546A"/>
-                </a:solidFill>
-                <a:latin typeface="Arial"/>
-              </a:rPr>
-              <a:t>Secret alert — revoke the secret, tell the admin team, then clean up</a:t>
-            </a:r>
-          </a:p>
-          <a:p>
-            <a:pPr marL="342900" indent="-342900" algn="l">
-              <a:lnSpc>
-                <a:spcPct val="90000"/>
-              </a:lnSpc>
-              <a:spcBef>
-                <a:spcPts val="1000"/>
-              </a:spcBef>
-              <a:spcAft>
-                <a:spcPts val="0"/>
-              </a:spcAft>
-              <a:buClr>
-                <a:srgbClr val="44546A"/>
-              </a:buClr>
-              <a:buSzPts val="1600"/>
-              <a:buFont typeface="Arial"/>
-              <a:buChar char="•"/>
-            </a:pPr>
-            <a:r>
-              <a:rPr sz="1600" b="0">
-                <a:solidFill>
-                  <a:srgbClr val="44546A"/>
-                </a:solidFill>
-                <a:latin typeface="Arial"/>
-              </a:rPr>
-              <a:t>Code alert — read the explanation, fix it, or review a Copilot Autofix suggestion</a:t>
-            </a:r>
-          </a:p>
-          <a:p>
-            <a:pPr marL="342900" indent="-342900" algn="l">
-              <a:lnSpc>
-                <a:spcPct val="90000"/>
-              </a:lnSpc>
-              <a:spcBef>
-                <a:spcPts val="1000"/>
-              </a:spcBef>
-              <a:spcAft>
-                <a:spcPts val="0"/>
-              </a:spcAft>
-              <a:buClr>
-                <a:srgbClr val="44546A"/>
-              </a:buClr>
-              <a:buSzPts val="1600"/>
-              <a:buFont typeface="Arial"/>
-              <a:buChar char="•"/>
-            </a:pPr>
-            <a:r>
-              <a:rPr sz="1600" b="0">
-                <a:solidFill>
-                  <a:srgbClr val="44546A"/>
-                </a:solidFill>
-                <a:latin typeface="Arial"/>
-              </a:rPr>
-              <a:t>Dependency alert — merge the Dependabot pull request after the tests pass</a:t>
-            </a:r>
-          </a:p>
-          <a:p>
-            <a:pPr marL="342900" indent="-342900" algn="l">
-              <a:lnSpc>
-                <a:spcPct val="90000"/>
-              </a:lnSpc>
-              <a:spcBef>
-                <a:spcPts val="1000"/>
-              </a:spcBef>
-              <a:spcAft>
-                <a:spcPts val="0"/>
-              </a:spcAft>
-              <a:buClr>
-                <a:srgbClr val="44546A"/>
-              </a:buClr>
-              <a:buSzPts val="1600"/>
-              <a:buFont typeface="Arial"/>
-              <a:buChar char="•"/>
-            </a:pPr>
-            <a:r>
-              <a:rPr sz="1600" b="0">
-                <a:solidFill>
-                  <a:srgbClr val="44546A"/>
-                </a:solidFill>
-                <a:latin typeface="Arial"/>
-              </a:rPr>
-              <a:t>Dismiss only with a reason that a colleague could check</a:t>
-            </a:r>
-          </a:p>
-          <a:p>
-            <a:pPr marL="0" indent="0" algn="l">
-              <a:lnSpc>
-                <a:spcPct val="90000"/>
-              </a:lnSpc>
-              <a:spcBef>
-                <a:spcPts val="1000"/>
-              </a:spcBef>
-              <a:spcAft>
-                <a:spcPts val="0"/>
-              </a:spcAft>
-              <a:buNone/>
-            </a:pPr>
-            <a:r>
-              <a:rPr sz="1600" b="0">
-                <a:solidFill>
-                  <a:srgbClr val="44546A"/>
-                </a:solidFill>
-                <a:latin typeface="Arial"/>
-              </a:rPr>
-              <a:t/>
-            </a:r>
-          </a:p>
-          <a:p>
-            <a:pPr marL="0" indent="0" algn="l">
-              <a:lnSpc>
-                <a:spcPct val="90000"/>
-              </a:lnSpc>
-              <a:spcBef>
-                <a:spcPts val="1000"/>
-              </a:spcBef>
-              <a:spcAft>
-                <a:spcPts val="0"/>
-              </a:spcAft>
-              <a:buNone/>
-            </a:pPr>
-            <a:r>
-              <a:rPr sz="1400" b="1">
-                <a:solidFill>
-                  <a:srgbClr val="002060"/>
-                </a:solidFill>
-                <a:latin typeface="Arial"/>
-              </a:rPr>
-              <a:t>An alert is a prompt to act, not a verdict. A human decides.</a:t>
+              <a:t>Your folder now contains</a:t>
+            </a:r>
+          </a:p>
+          <a:p>
+            <a:pPr marL="342900" indent="-342900" algn="l">
+              <a:lnSpc>
+                <a:spcPct val="90000"/>
+              </a:lnSpc>
+              <a:spcBef>
+                <a:spcPts val="1000"/>
+              </a:spcBef>
+              <a:spcAft>
+                <a:spcPts val="0"/>
+              </a:spcAft>
+              <a:buClr>
+                <a:srgbClr val="44546A"/>
+              </a:buClr>
+              <a:buSzPts val="1600"/>
+              <a:buFont typeface="Arial"/>
+              <a:buChar char="•"/>
+            </a:pPr>
+            <a:r>
+              <a:rPr sz="1600" b="0">
+                <a:solidFill>
+                  <a:srgbClr val="44546A"/>
+                </a:solidFill>
+                <a:latin typeface="Arial"/>
+              </a:rPr>
+              <a:t>requirements.txt added; your pull request linked to your issue</a:t>
             </a:r>
           </a:p>
         </p:txBody>
@@ -23921,14 +23875,17 @@
           <a:bodyPr/>
           <a:lstStyle/>
           <a:p>
-            <a:r>
-              <a:rPr sz="2800" b="1">
-                <a:solidFill>
-                  <a:srgbClr val="002060"/>
-                </a:solidFill>
-                <a:latin typeface="Arial"/>
-              </a:rPr>
-              <a:t>Your Area: Checkpoint 7</a:t>
+            <a:pPr marL="0" indent="0" algn="l">
+              <a:buNone/>
+            </a:pPr>
+            <a:r>
+              <a:rPr sz="3600" b="1">
+                <a:solidFill>
+                  <a:srgbClr val="FFFFFF"/>
+                </a:solidFill>
+                <a:latin typeface="Arial"/>
+              </a:rPr>
+              <a:t>Codespaces and Copilot Hands-On</a:t>
             </a:r>
           </a:p>
         </p:txBody>
@@ -23949,211 +23906,16 @@
           <a:lstStyle/>
           <a:p>
             <a:pPr marL="0" indent="0" algn="l">
-              <a:lnSpc>
-                <a:spcPct val="90000"/>
-              </a:lnSpc>
-              <a:spcBef>
-                <a:spcPts val="0"/>
-              </a:spcBef>
-              <a:spcAft>
-                <a:spcPts val="0"/>
-              </a:spcAft>
-              <a:buNone/>
-            </a:pPr>
-            <a:r>
-              <a:rPr sz="1800" b="1">
-                <a:solidFill>
-                  <a:srgbClr val="002060"/>
-                </a:solidFill>
-                <a:latin typeface="Arial"/>
-              </a:rPr>
-              <a:t>Raise an issue and pin your tools (5 minutes)</a:t>
-            </a:r>
-          </a:p>
-          <a:p>
-            <a:pPr marL="342900" indent="-342900" algn="l">
-              <a:lnSpc>
-                <a:spcPct val="90000"/>
-              </a:lnSpc>
-              <a:spcBef>
-                <a:spcPts val="1000"/>
-              </a:spcBef>
-              <a:spcAft>
-                <a:spcPts val="0"/>
-              </a:spcAft>
-              <a:buClr>
-                <a:srgbClr val="44546A"/>
-              </a:buClr>
-              <a:buSzPts val="1600"/>
-              <a:buFont typeface="Arial"/>
-              <a:buChar char="•"/>
-            </a:pPr>
-            <a:r>
-              <a:rPr sz="1600" b="0">
-                <a:solidFill>
-                  <a:srgbClr val="44546A"/>
-                </a:solidFill>
-                <a:latin typeface="Arial"/>
-              </a:rPr>
-              <a:t>Open an issue titled Area: &lt;your-folder&gt; with a checklist of what you have added</a:t>
-            </a:r>
-          </a:p>
-          <a:p>
-            <a:pPr marL="342900" indent="-342900" algn="l">
-              <a:lnSpc>
-                <a:spcPct val="90000"/>
-              </a:lnSpc>
-              <a:spcBef>
-                <a:spcPts val="1000"/>
-              </a:spcBef>
-              <a:spcAft>
-                <a:spcPts val="0"/>
-              </a:spcAft>
-              <a:buClr>
-                <a:srgbClr val="44546A"/>
-              </a:buClr>
-              <a:buSzPts val="1600"/>
-              <a:buFont typeface="Arial"/>
-              <a:buChar char="•"/>
-            </a:pPr>
-            <a:r>
-              <a:rPr sz="1600" b="0">
-                <a:solidFill>
-                  <a:srgbClr val="44546A"/>
-                </a:solidFill>
-                <a:latin typeface="Arial"/>
-              </a:rPr>
-              <a:t>Add requirements.txt listing pandas and matplotlib with the versions you choose</a:t>
-            </a:r>
-          </a:p>
-          <a:p>
-            <a:pPr marL="342900" indent="-342900" algn="l">
-              <a:lnSpc>
-                <a:spcPct val="90000"/>
-              </a:lnSpc>
-              <a:spcBef>
-                <a:spcPts val="1000"/>
-              </a:spcBef>
-              <a:spcAft>
-                <a:spcPts val="0"/>
-              </a:spcAft>
-              <a:buClr>
-                <a:srgbClr val="44546A"/>
-              </a:buClr>
-              <a:buSzPts val="1600"/>
-              <a:buFont typeface="Arial"/>
-              <a:buChar char="•"/>
-            </a:pPr>
-            <a:r>
-              <a:rPr sz="1600" b="0">
-                <a:solidFill>
-                  <a:srgbClr val="44546A"/>
-                </a:solidFill>
-                <a:latin typeface="Arial"/>
-              </a:rPr>
-              <a:t>Link the issue from your pull request by writing Closes #&lt;issue number&gt;</a:t>
-            </a:r>
-          </a:p>
-          <a:p>
-            <a:pPr marL="342900" indent="-342900" algn="l">
-              <a:lnSpc>
-                <a:spcPct val="90000"/>
-              </a:lnSpc>
-              <a:spcBef>
-                <a:spcPts val="1000"/>
-              </a:spcBef>
-              <a:spcAft>
-                <a:spcPts val="0"/>
-              </a:spcAft>
-              <a:buClr>
-                <a:srgbClr val="44546A"/>
-              </a:buClr>
-              <a:buSzPts val="1600"/>
-              <a:buFont typeface="Arial"/>
-              <a:buChar char="•"/>
-            </a:pPr>
-            <a:r>
-              <a:rPr sz="1600" b="0">
-                <a:solidFill>
-                  <a:srgbClr val="44546A"/>
-                </a:solidFill>
-                <a:latin typeface="Arial"/>
-              </a:rPr>
-              <a:t>Open the Security tab and note which alert types are switched on</a:t>
-            </a:r>
-          </a:p>
-          <a:p>
-            <a:pPr marL="0" indent="0" algn="l">
-              <a:lnSpc>
-                <a:spcPct val="90000"/>
-              </a:lnSpc>
-              <a:spcBef>
-                <a:spcPts val="1000"/>
-              </a:spcBef>
-              <a:spcAft>
-                <a:spcPts val="0"/>
-              </a:spcAft>
-              <a:buNone/>
-            </a:pPr>
-            <a:r>
-              <a:rPr sz="1600" b="0">
-                <a:solidFill>
-                  <a:srgbClr val="44546A"/>
-                </a:solidFill>
-                <a:latin typeface="Arial"/>
-              </a:rPr>
-              <a:t/>
-            </a:r>
-          </a:p>
-          <a:p>
-            <a:pPr marL="0" indent="0" algn="l">
-              <a:lnSpc>
-                <a:spcPct val="90000"/>
-              </a:lnSpc>
-              <a:spcBef>
-                <a:spcPts val="1000"/>
-              </a:spcBef>
-              <a:spcAft>
-                <a:spcPts val="0"/>
-              </a:spcAft>
-              <a:buNone/>
-            </a:pPr>
-            <a:r>
-              <a:rPr sz="1800" b="1">
-                <a:solidFill>
-                  <a:srgbClr val="002060"/>
-                </a:solidFill>
-                <a:latin typeface="Arial"/>
-              </a:rPr>
-              <a:t>Your folder now contains</a:t>
-            </a:r>
-          </a:p>
-          <a:p>
-            <a:pPr marL="342900" indent="-342900" algn="l">
-              <a:lnSpc>
-                <a:spcPct val="90000"/>
-              </a:lnSpc>
-              <a:spcBef>
-                <a:spcPts val="1000"/>
-              </a:spcBef>
-              <a:spcAft>
-                <a:spcPts val="0"/>
-              </a:spcAft>
-              <a:buClr>
-                <a:srgbClr val="44546A"/>
-              </a:buClr>
-              <a:buSzPts val="1600"/>
-              <a:buFont typeface="Arial"/>
-              <a:buChar char="•"/>
-            </a:pPr>
-            <a:r>
-              <a:rPr sz="1600" b="0">
-                <a:solidFill>
-                  <a:srgbClr val="44546A"/>
-                </a:solidFill>
-                <a:latin typeface="Arial"/>
-              </a:rPr>
-              <a:t>requirements.txt added; your pull request linked to your issue</a:t>
+              <a:buNone/>
+            </a:pPr>
+            <a:r>
+              <a:rPr sz="1800" b="0">
+                <a:solidFill>
+                  <a:srgbClr val="01B0FF"/>
+                </a:solidFill>
+                <a:latin typeface="Arial"/>
+              </a:rPr>
+              <a:t>Session 8 | 45 minutes</a:t>
             </a:r>
           </a:p>
         </p:txBody>
@@ -24167,84 +23929,6 @@
 </file>
 
 <file path=ppt/slides/slide58.xml><?xml version="1.0" encoding="utf-8"?>
-<p:sld xmlns:a="http://schemas.openxmlformats.org/drawingml/2006/main" xmlns:p="http://schemas.openxmlformats.org/presentationml/2006/main" xmlns:r="http://schemas.openxmlformats.org/officeDocument/2006/relationships">
-  <p:cSld>
-    <p:spTree>
-      <p:nvGrpSpPr>
-        <p:cNvPr id="1" name=""/>
-        <p:cNvGrpSpPr/>
-        <p:nvPr/>
-      </p:nvGrpSpPr>
-      <p:grpSpPr/>
-      <p:sp>
-        <p:nvSpPr>
-          <p:cNvPr id="2" name="Title 1"/>
-          <p:cNvSpPr>
-            <a:spLocks noGrp="1"/>
-          </p:cNvSpPr>
-          <p:nvPr>
-            <p:ph type="title"/>
-          </p:nvPr>
-        </p:nvSpPr>
-        <p:spPr/>
-        <p:txBody>
-          <a:bodyPr/>
-          <a:lstStyle/>
-          <a:p>
-            <a:pPr marL="0" indent="0" algn="l">
-              <a:buNone/>
-            </a:pPr>
-            <a:r>
-              <a:rPr sz="3600" b="1">
-                <a:solidFill>
-                  <a:srgbClr val="FFFFFF"/>
-                </a:solidFill>
-                <a:latin typeface="Arial"/>
-              </a:rPr>
-              <a:t>Codespaces and Copilot Hands-On</a:t>
-            </a:r>
-          </a:p>
-        </p:txBody>
-      </p:sp>
-      <p:sp>
-        <p:nvSpPr>
-          <p:cNvPr id="3" name="Text Placeholder 2"/>
-          <p:cNvSpPr>
-            <a:spLocks noGrp="1"/>
-          </p:cNvSpPr>
-          <p:nvPr>
-            <p:ph type="body" idx="1"/>
-          </p:nvPr>
-        </p:nvSpPr>
-        <p:spPr/>
-        <p:txBody>
-          <a:bodyPr/>
-          <a:lstStyle/>
-          <a:p>
-            <a:pPr marL="0" indent="0" algn="l">
-              <a:buNone/>
-            </a:pPr>
-            <a:r>
-              <a:rPr sz="1800" b="0">
-                <a:solidFill>
-                  <a:srgbClr val="01B0FF"/>
-                </a:solidFill>
-                <a:latin typeface="Arial"/>
-              </a:rPr>
-              <a:t>Session 8 | 45 minutes</a:t>
-            </a:r>
-          </a:p>
-        </p:txBody>
-      </p:sp>
-    </p:spTree>
-  </p:cSld>
-  <p:clrMapOvr>
-    <a:masterClrMapping/>
-  </p:clrMapOvr>
-</p:sld>
-</file>
-
-<file path=ppt/slides/slide59.xml><?xml version="1.0" encoding="utf-8"?>
 <p:sld xmlns:a="http://schemas.openxmlformats.org/drawingml/2006/main" xmlns:p="http://schemas.openxmlformats.org/presentationml/2006/main" xmlns:r="http://schemas.openxmlformats.org/officeDocument/2006/relationships">
   <p:cSld>
     <p:spTree>
@@ -24571,6 +24255,304 @@
 </p:sld>
 </file>
 
+<file path=ppt/slides/slide59.xml><?xml version="1.0" encoding="utf-8"?>
+<p:sld xmlns:a="http://schemas.openxmlformats.org/drawingml/2006/main" xmlns:p="http://schemas.openxmlformats.org/presentationml/2006/main" xmlns:r="http://schemas.openxmlformats.org/officeDocument/2006/relationships">
+  <p:cSld>
+    <p:spTree>
+      <p:nvGrpSpPr>
+        <p:cNvPr id="1" name=""/>
+        <p:cNvGrpSpPr/>
+        <p:nvPr/>
+      </p:nvGrpSpPr>
+      <p:grpSpPr/>
+      <p:sp>
+        <p:nvSpPr>
+          <p:cNvPr id="2" name="Title 1"/>
+          <p:cNvSpPr>
+            <a:spLocks noGrp="1"/>
+          </p:cNvSpPr>
+          <p:nvPr>
+            <p:ph type="title"/>
+          </p:nvPr>
+        </p:nvSpPr>
+        <p:spPr/>
+        <p:txBody>
+          <a:bodyPr/>
+          <a:lstStyle/>
+          <a:p>
+            <a:r>
+              <a:rPr sz="2800" b="1">
+                <a:solidFill>
+                  <a:srgbClr val="002060"/>
+                </a:solidFill>
+                <a:latin typeface="Arial"/>
+              </a:rPr>
+              <a:t>Codespaces: Launching and Lifecycle</a:t>
+            </a:r>
+          </a:p>
+        </p:txBody>
+      </p:sp>
+      <p:sp>
+        <p:nvSpPr>
+          <p:cNvPr id="3" name="Text Placeholder 2"/>
+          <p:cNvSpPr>
+            <a:spLocks noGrp="1"/>
+          </p:cNvSpPr>
+          <p:nvPr>
+            <p:ph type="body" idx="1"/>
+          </p:nvPr>
+        </p:nvSpPr>
+        <p:spPr/>
+        <p:txBody>
+          <a:bodyPr/>
+          <a:lstStyle/>
+          <a:p>
+            <a:pPr marL="0" indent="0" algn="l">
+              <a:lnSpc>
+                <a:spcPct val="90000"/>
+              </a:lnSpc>
+              <a:spcBef>
+                <a:spcPts val="0"/>
+              </a:spcBef>
+              <a:spcAft>
+                <a:spcPts val="0"/>
+              </a:spcAft>
+              <a:buNone/>
+            </a:pPr>
+            <a:r>
+              <a:rPr sz="1800" b="1">
+                <a:solidFill>
+                  <a:srgbClr val="002060"/>
+                </a:solidFill>
+                <a:latin typeface="Arial"/>
+              </a:rPr>
+              <a:t>Launching</a:t>
+            </a:r>
+          </a:p>
+          <a:p>
+            <a:pPr marL="342900" indent="-342900" algn="l">
+              <a:lnSpc>
+                <a:spcPct val="90000"/>
+              </a:lnSpc>
+              <a:spcBef>
+                <a:spcPts val="1000"/>
+              </a:spcBef>
+              <a:spcAft>
+                <a:spcPts val="0"/>
+              </a:spcAft>
+              <a:buClr>
+                <a:srgbClr val="44546A"/>
+              </a:buClr>
+              <a:buSzPts val="1600"/>
+              <a:buFont typeface="Arial"/>
+              <a:buChar char="•"/>
+            </a:pPr>
+            <a:r>
+              <a:rPr sz="1600" b="0">
+                <a:solidFill>
+                  <a:srgbClr val="44546A"/>
+                </a:solidFill>
+                <a:latin typeface="Arial"/>
+              </a:rPr>
+              <a:t>Repository → Code → Codespaces → Create codespace on main</a:t>
+            </a:r>
+          </a:p>
+          <a:p>
+            <a:pPr marL="342900" indent="-342900" algn="l">
+              <a:lnSpc>
+                <a:spcPct val="90000"/>
+              </a:lnSpc>
+              <a:spcBef>
+                <a:spcPts val="1000"/>
+              </a:spcBef>
+              <a:spcAft>
+                <a:spcPts val="0"/>
+              </a:spcAft>
+              <a:buClr>
+                <a:srgbClr val="44546A"/>
+              </a:buClr>
+              <a:buSzPts val="1600"/>
+              <a:buFont typeface="Arial"/>
+              <a:buChar char="•"/>
+            </a:pPr>
+            <a:r>
+              <a:rPr sz="1600" b="0">
+                <a:solidFill>
+                  <a:srgbClr val="44546A"/>
+                </a:solidFill>
+                <a:latin typeface="Arial"/>
+              </a:rPr>
+              <a:t>Create a branch before you change anything</a:t>
+            </a:r>
+          </a:p>
+          <a:p>
+            <a:pPr marL="342900" indent="-342900" algn="l">
+              <a:lnSpc>
+                <a:spcPct val="90000"/>
+              </a:lnSpc>
+              <a:spcBef>
+                <a:spcPts val="1000"/>
+              </a:spcBef>
+              <a:spcAft>
+                <a:spcPts val="0"/>
+              </a:spcAft>
+              <a:buClr>
+                <a:srgbClr val="44546A"/>
+              </a:buClr>
+              <a:buSzPts val="1600"/>
+              <a:buFont typeface="Arial"/>
+              <a:buChar char="•"/>
+            </a:pPr>
+            <a:r>
+              <a:rPr sz="1600" b="0">
+                <a:solidFill>
+                  <a:srgbClr val="44546A"/>
+                </a:solidFill>
+                <a:latin typeface="Arial"/>
+              </a:rPr>
+              <a:t>A 2-core machine is plenty for today</a:t>
+            </a:r>
+          </a:p>
+          <a:p>
+            <a:pPr marL="0" indent="0" algn="l">
+              <a:lnSpc>
+                <a:spcPct val="90000"/>
+              </a:lnSpc>
+              <a:spcBef>
+                <a:spcPts val="1000"/>
+              </a:spcBef>
+              <a:spcAft>
+                <a:spcPts val="0"/>
+              </a:spcAft>
+              <a:buNone/>
+            </a:pPr>
+            <a:r>
+              <a:rPr sz="1600" b="0">
+                <a:solidFill>
+                  <a:srgbClr val="44546A"/>
+                </a:solidFill>
+                <a:latin typeface="Arial"/>
+              </a:rPr>
+              <a:t/>
+            </a:r>
+          </a:p>
+          <a:p>
+            <a:pPr marL="0" indent="0" algn="l">
+              <a:lnSpc>
+                <a:spcPct val="90000"/>
+              </a:lnSpc>
+              <a:spcBef>
+                <a:spcPts val="1000"/>
+              </a:spcBef>
+              <a:spcAft>
+                <a:spcPts val="0"/>
+              </a:spcAft>
+              <a:buNone/>
+            </a:pPr>
+            <a:r>
+              <a:rPr sz="1800" b="1">
+                <a:solidFill>
+                  <a:srgbClr val="002060"/>
+                </a:solidFill>
+                <a:latin typeface="Arial"/>
+              </a:rPr>
+              <a:t>Lifecycle</a:t>
+            </a:r>
+          </a:p>
+          <a:p>
+            <a:pPr marL="342900" indent="-342900" algn="l">
+              <a:lnSpc>
+                <a:spcPct val="90000"/>
+              </a:lnSpc>
+              <a:spcBef>
+                <a:spcPts val="1000"/>
+              </a:spcBef>
+              <a:spcAft>
+                <a:spcPts val="0"/>
+              </a:spcAft>
+              <a:buClr>
+                <a:srgbClr val="44546A"/>
+              </a:buClr>
+              <a:buSzPts val="1600"/>
+              <a:buFont typeface="Arial"/>
+              <a:buChar char="•"/>
+            </a:pPr>
+            <a:r>
+              <a:rPr sz="1600" b="0">
+                <a:solidFill>
+                  <a:srgbClr val="44546A"/>
+                </a:solidFill>
+                <a:latin typeface="Arial"/>
+              </a:rPr>
+              <a:t>Running → Stopped → Deleted</a:t>
+            </a:r>
+          </a:p>
+          <a:p>
+            <a:pPr marL="342900" indent="-342900" algn="l">
+              <a:lnSpc>
+                <a:spcPct val="90000"/>
+              </a:lnSpc>
+              <a:spcBef>
+                <a:spcPts val="1000"/>
+              </a:spcBef>
+              <a:spcAft>
+                <a:spcPts val="0"/>
+              </a:spcAft>
+              <a:buClr>
+                <a:srgbClr val="44546A"/>
+              </a:buClr>
+              <a:buSzPts val="1600"/>
+              <a:buFont typeface="Arial"/>
+              <a:buChar char="•"/>
+            </a:pPr>
+            <a:r>
+              <a:rPr sz="1600" b="0">
+                <a:solidFill>
+                  <a:srgbClr val="44546A"/>
+                </a:solidFill>
+                <a:latin typeface="Arial"/>
+              </a:rPr>
+              <a:t>Stop it when you finish — stopped Codespaces don't use compute time</a:t>
+            </a:r>
+          </a:p>
+          <a:p>
+            <a:pPr marL="342900" indent="-342900" algn="l">
+              <a:lnSpc>
+                <a:spcPct val="90000"/>
+              </a:lnSpc>
+              <a:spcBef>
+                <a:spcPts val="1000"/>
+              </a:spcBef>
+              <a:spcAft>
+                <a:spcPts val="0"/>
+              </a:spcAft>
+              <a:buClr>
+                <a:srgbClr val="44546A"/>
+              </a:buClr>
+              <a:buSzPts val="1600"/>
+              <a:buFont typeface="Arial"/>
+              <a:buChar char="•"/>
+            </a:pPr>
+            <a:r>
+              <a:rPr sz="1600" b="0">
+                <a:solidFill>
+                  <a:srgbClr val="44546A"/>
+                </a:solidFill>
+                <a:latin typeface="Arial"/>
+              </a:rPr>
+              <a:t>Commit and push first; uncommitted work is lost if a Codespace is deleted</a:t>
+            </a:r>
+          </a:p>
+        </p:txBody>
+      </p:sp>
+    </p:spTree>
+  </p:cSld>
+  <p:clrMapOvr>
+    <a:masterClrMapping/>
+  </p:clrMapOvr>
+</p:sld>
+</file>
+
 <file path=ppt/slides/slide6.xml><?xml version="1.0" encoding="utf-8"?>
 <p:sld xmlns:a="http://schemas.openxmlformats.org/drawingml/2006/main" xmlns:p="http://schemas.openxmlformats.org/presentationml/2006/main" xmlns:r="http://schemas.openxmlformats.org/officeDocument/2006/relationships">
   <p:cSld>
@@ -24754,7 +24736,7 @@
                 </a:solidFill>
                 <a:latin typeface="Arial"/>
               </a:rPr>
-              <a:t>Access to the ndr-hb-abuhb-academy Google Cloud project, through your training group</a:t>
+              <a:t>Optional: access to the ndr-hb-abuhb-academy Google Cloud project, for the SQL extension at the end of the day</a:t>
             </a:r>
           </a:p>
           <a:p>
@@ -24975,7 +24957,7 @@
                 </a:solidFill>
                 <a:latin typeface="Arial"/>
               </a:rPr>
-              <a:t>Codespaces: Launching and Lifecycle</a:t>
+              <a:t>Dev Containers: Same Environment for Everyone</a:t>
             </a:r>
           </a:p>
         </p:txBody>
@@ -25014,91 +24996,91 @@
                 </a:solidFill>
                 <a:latin typeface="Arial"/>
               </a:rPr>
-              <a:t>Launching</a:t>
-            </a:r>
-          </a:p>
-          <a:p>
-            <a:pPr marL="342900" indent="-342900" algn="l">
-              <a:lnSpc>
-                <a:spcPct val="90000"/>
-              </a:lnSpc>
-              <a:spcBef>
-                <a:spcPts val="1000"/>
-              </a:spcBef>
-              <a:spcAft>
-                <a:spcPts val="0"/>
-              </a:spcAft>
-              <a:buClr>
-                <a:srgbClr val="44546A"/>
-              </a:buClr>
-              <a:buSzPts val="1600"/>
-              <a:buFont typeface="Arial"/>
-              <a:buChar char="•"/>
-            </a:pPr>
-            <a:r>
-              <a:rPr sz="1600" b="0">
-                <a:solidFill>
-                  <a:srgbClr val="44546A"/>
-                </a:solidFill>
-                <a:latin typeface="Arial"/>
-              </a:rPr>
-              <a:t>Repository → Code → Codespaces → Create codespace on main</a:t>
-            </a:r>
-          </a:p>
-          <a:p>
-            <a:pPr marL="342900" indent="-342900" algn="l">
-              <a:lnSpc>
-                <a:spcPct val="90000"/>
-              </a:lnSpc>
-              <a:spcBef>
-                <a:spcPts val="1000"/>
-              </a:spcBef>
-              <a:spcAft>
-                <a:spcPts val="0"/>
-              </a:spcAft>
-              <a:buClr>
-                <a:srgbClr val="44546A"/>
-              </a:buClr>
-              <a:buSzPts val="1600"/>
-              <a:buFont typeface="Arial"/>
-              <a:buChar char="•"/>
-            </a:pPr>
-            <a:r>
-              <a:rPr sz="1600" b="0">
-                <a:solidFill>
-                  <a:srgbClr val="44546A"/>
-                </a:solidFill>
-                <a:latin typeface="Arial"/>
-              </a:rPr>
-              <a:t>Create a branch before you change anything</a:t>
-            </a:r>
-          </a:p>
-          <a:p>
-            <a:pPr marL="342900" indent="-342900" algn="l">
-              <a:lnSpc>
-                <a:spcPct val="90000"/>
-              </a:lnSpc>
-              <a:spcBef>
-                <a:spcPts val="1000"/>
-              </a:spcBef>
-              <a:spcAft>
-                <a:spcPts val="0"/>
-              </a:spcAft>
-              <a:buClr>
-                <a:srgbClr val="44546A"/>
-              </a:buClr>
-              <a:buSzPts val="1600"/>
-              <a:buFont typeface="Arial"/>
-              <a:buChar char="•"/>
-            </a:pPr>
-            <a:r>
-              <a:rPr sz="1600" b="0">
-                <a:solidFill>
-                  <a:srgbClr val="44546A"/>
-                </a:solidFill>
-                <a:latin typeface="Arial"/>
-              </a:rPr>
-              <a:t>A 2-core machine is plenty for today</a:t>
+              <a:t>One file defines the environment</a:t>
+            </a:r>
+          </a:p>
+          <a:p>
+            <a:pPr marL="342900" indent="-342900" algn="l">
+              <a:lnSpc>
+                <a:spcPct val="90000"/>
+              </a:lnSpc>
+              <a:spcBef>
+                <a:spcPts val="1000"/>
+              </a:spcBef>
+              <a:spcAft>
+                <a:spcPts val="0"/>
+              </a:spcAft>
+              <a:buClr>
+                <a:srgbClr val="44546A"/>
+              </a:buClr>
+              <a:buSzPts val="1600"/>
+              <a:buFont typeface="Arial"/>
+              <a:buChar char="•"/>
+            </a:pPr>
+            <a:r>
+              <a:rPr sz="1600" b="0">
+                <a:solidFill>
+                  <a:srgbClr val="44546A"/>
+                </a:solidFill>
+                <a:latin typeface="Arial"/>
+              </a:rPr>
+              <a:t>.devcontainer/devcontainer.json lives in the repository</a:t>
+            </a:r>
+          </a:p>
+          <a:p>
+            <a:pPr marL="342900" indent="-342900" algn="l">
+              <a:lnSpc>
+                <a:spcPct val="90000"/>
+              </a:lnSpc>
+              <a:spcBef>
+                <a:spcPts val="1000"/>
+              </a:spcBef>
+              <a:spcAft>
+                <a:spcPts val="0"/>
+              </a:spcAft>
+              <a:buClr>
+                <a:srgbClr val="44546A"/>
+              </a:buClr>
+              <a:buSzPts val="1600"/>
+              <a:buFont typeface="Arial"/>
+              <a:buChar char="•"/>
+            </a:pPr>
+            <a:r>
+              <a:rPr sz="1600" b="0">
+                <a:solidFill>
+                  <a:srgbClr val="44546A"/>
+                </a:solidFill>
+                <a:latin typeface="Arial"/>
+              </a:rPr>
+              <a:t>Sets the Python version, extensions, ports and setup commands</a:t>
+            </a:r>
+          </a:p>
+          <a:p>
+            <a:pPr marL="342900" indent="-342900" algn="l">
+              <a:lnSpc>
+                <a:spcPct val="90000"/>
+              </a:lnSpc>
+              <a:spcBef>
+                <a:spcPts val="1000"/>
+              </a:spcBef>
+              <a:spcAft>
+                <a:spcPts val="0"/>
+              </a:spcAft>
+              <a:buClr>
+                <a:srgbClr val="44546A"/>
+              </a:buClr>
+              <a:buSzPts val="1600"/>
+              <a:buFont typeface="Arial"/>
+              <a:buChar char="•"/>
+            </a:pPr>
+            <a:r>
+              <a:rPr sz="1600" b="0">
+                <a:solidFill>
+                  <a:srgbClr val="44546A"/>
+                </a:solidFill>
+                <a:latin typeface="Arial"/>
+              </a:rPr>
+              <a:t>Change the file in a pull request, and everyone gets the new setup</a:t>
             </a:r>
           </a:p>
           <a:p>
@@ -25144,91 +25126,91 @@
                 </a:solidFill>
                 <a:latin typeface="Arial"/>
               </a:rPr>
-              <a:t>Lifecycle</a:t>
-            </a:r>
-          </a:p>
-          <a:p>
-            <a:pPr marL="342900" indent="-342900" algn="l">
-              <a:lnSpc>
-                <a:spcPct val="90000"/>
-              </a:lnSpc>
-              <a:spcBef>
-                <a:spcPts val="1000"/>
-              </a:spcBef>
-              <a:spcAft>
-                <a:spcPts val="0"/>
-              </a:spcAft>
-              <a:buClr>
-                <a:srgbClr val="44546A"/>
-              </a:buClr>
-              <a:buSzPts val="1600"/>
-              <a:buFont typeface="Arial"/>
-              <a:buChar char="•"/>
-            </a:pPr>
-            <a:r>
-              <a:rPr sz="1600" b="0">
-                <a:solidFill>
-                  <a:srgbClr val="44546A"/>
-                </a:solidFill>
-                <a:latin typeface="Arial"/>
-              </a:rPr>
-              <a:t>Running → Stopped → Deleted</a:t>
-            </a:r>
-          </a:p>
-          <a:p>
-            <a:pPr marL="342900" indent="-342900" algn="l">
-              <a:lnSpc>
-                <a:spcPct val="90000"/>
-              </a:lnSpc>
-              <a:spcBef>
-                <a:spcPts val="1000"/>
-              </a:spcBef>
-              <a:spcAft>
-                <a:spcPts val="0"/>
-              </a:spcAft>
-              <a:buClr>
-                <a:srgbClr val="44546A"/>
-              </a:buClr>
-              <a:buSzPts val="1600"/>
-              <a:buFont typeface="Arial"/>
-              <a:buChar char="•"/>
-            </a:pPr>
-            <a:r>
-              <a:rPr sz="1600" b="0">
-                <a:solidFill>
-                  <a:srgbClr val="44546A"/>
-                </a:solidFill>
-                <a:latin typeface="Arial"/>
-              </a:rPr>
-              <a:t>Stop it when you finish — stopped Codespaces don't use compute time</a:t>
-            </a:r>
-          </a:p>
-          <a:p>
-            <a:pPr marL="342900" indent="-342900" algn="l">
-              <a:lnSpc>
-                <a:spcPct val="90000"/>
-              </a:lnSpc>
-              <a:spcBef>
-                <a:spcPts val="1000"/>
-              </a:spcBef>
-              <a:spcAft>
-                <a:spcPts val="0"/>
-              </a:spcAft>
-              <a:buClr>
-                <a:srgbClr val="44546A"/>
-              </a:buClr>
-              <a:buSzPts val="1600"/>
-              <a:buFont typeface="Arial"/>
-              <a:buChar char="•"/>
-            </a:pPr>
-            <a:r>
-              <a:rPr sz="1600" b="0">
-                <a:solidFill>
-                  <a:srgbClr val="44546A"/>
-                </a:solidFill>
-                <a:latin typeface="Arial"/>
-              </a:rPr>
-              <a:t>Commit and push first; uncommitted work is lost if a Codespace is deleted</a:t>
+              <a:t>Today's setup</a:t>
+            </a:r>
+          </a:p>
+          <a:p>
+            <a:pPr marL="342900" indent="-342900" algn="l">
+              <a:lnSpc>
+                <a:spcPct val="90000"/>
+              </a:lnSpc>
+              <a:spcBef>
+                <a:spcPts val="1000"/>
+              </a:spcBef>
+              <a:spcAft>
+                <a:spcPts val="0"/>
+              </a:spcAft>
+              <a:buClr>
+                <a:srgbClr val="44546A"/>
+              </a:buClr>
+              <a:buSzPts val="1600"/>
+              <a:buFont typeface="Arial"/>
+              <a:buChar char="•"/>
+            </a:pPr>
+            <a:r>
+              <a:rPr sz="1600" b="0">
+                <a:solidFill>
+                  <a:srgbClr val="44546A"/>
+                </a:solidFill>
+                <a:latin typeface="Arial"/>
+              </a:rPr>
+              <a:t>Python 3.11 with pandas, matplotlib and Streamlit</a:t>
+            </a:r>
+          </a:p>
+          <a:p>
+            <a:pPr marL="342900" indent="-342900" algn="l">
+              <a:lnSpc>
+                <a:spcPct val="90000"/>
+              </a:lnSpc>
+              <a:spcBef>
+                <a:spcPts val="1000"/>
+              </a:spcBef>
+              <a:spcAft>
+                <a:spcPts val="0"/>
+              </a:spcAft>
+              <a:buClr>
+                <a:srgbClr val="44546A"/>
+              </a:buClr>
+              <a:buSzPts val="1600"/>
+              <a:buFont typeface="Arial"/>
+              <a:buChar char="•"/>
+            </a:pPr>
+            <a:r>
+              <a:rPr sz="1600" b="0">
+                <a:solidFill>
+                  <a:srgbClr val="44546A"/>
+                </a:solidFill>
+                <a:latin typeface="Arial"/>
+              </a:rPr>
+              <a:t>Copilot and Pull Request extensions pre-installed</a:t>
+            </a:r>
+          </a:p>
+          <a:p>
+            <a:pPr marL="342900" indent="-342900" algn="l">
+              <a:lnSpc>
+                <a:spcPct val="90000"/>
+              </a:lnSpc>
+              <a:spcBef>
+                <a:spcPts val="1000"/>
+              </a:spcBef>
+              <a:spcAft>
+                <a:spcPts val="0"/>
+              </a:spcAft>
+              <a:buClr>
+                <a:srgbClr val="44546A"/>
+              </a:buClr>
+              <a:buSzPts val="1600"/>
+              <a:buFont typeface="Arial"/>
+              <a:buChar char="•"/>
+            </a:pPr>
+            <a:r>
+              <a:rPr sz="1600" b="0">
+                <a:solidFill>
+                  <a:srgbClr val="44546A"/>
+                </a:solidFill>
+                <a:latin typeface="Arial"/>
+              </a:rPr>
+              <a:t>Port 8501 forwarded for the Streamlit app</a:t>
             </a:r>
           </a:p>
         </p:txBody>
@@ -25273,7 +25255,7 @@
                 </a:solidFill>
                 <a:latin typeface="Arial"/>
               </a:rPr>
-              <a:t>Dev Containers: Same Environment for Everyone</a:t>
+              <a:t>What Belongs in a Codespace?</a:t>
             </a:r>
           </a:p>
         </p:txBody>
@@ -25312,91 +25294,63 @@
                 </a:solidFill>
                 <a:latin typeface="Arial"/>
               </a:rPr>
-              <a:t>One file defines the environment</a:t>
-            </a:r>
-          </a:p>
-          <a:p>
-            <a:pPr marL="342900" indent="-342900" algn="l">
-              <a:lnSpc>
-                <a:spcPct val="90000"/>
-              </a:lnSpc>
-              <a:spcBef>
-                <a:spcPts val="1000"/>
-              </a:spcBef>
-              <a:spcAft>
-                <a:spcPts val="0"/>
-              </a:spcAft>
-              <a:buClr>
-                <a:srgbClr val="44546A"/>
-              </a:buClr>
-              <a:buSzPts val="1600"/>
-              <a:buFont typeface="Arial"/>
-              <a:buChar char="•"/>
-            </a:pPr>
-            <a:r>
-              <a:rPr sz="1600" b="0">
-                <a:solidFill>
-                  <a:srgbClr val="44546A"/>
-                </a:solidFill>
-                <a:latin typeface="Arial"/>
-              </a:rPr>
-              <a:t>.devcontainer/devcontainer.json lives in the repository</a:t>
-            </a:r>
-          </a:p>
-          <a:p>
-            <a:pPr marL="342900" indent="-342900" algn="l">
-              <a:lnSpc>
-                <a:spcPct val="90000"/>
-              </a:lnSpc>
-              <a:spcBef>
-                <a:spcPts val="1000"/>
-              </a:spcBef>
-              <a:spcAft>
-                <a:spcPts val="0"/>
-              </a:spcAft>
-              <a:buClr>
-                <a:srgbClr val="44546A"/>
-              </a:buClr>
-              <a:buSzPts val="1600"/>
-              <a:buFont typeface="Arial"/>
-              <a:buChar char="•"/>
-            </a:pPr>
-            <a:r>
-              <a:rPr sz="1600" b="0">
-                <a:solidFill>
-                  <a:srgbClr val="44546A"/>
-                </a:solidFill>
-                <a:latin typeface="Arial"/>
-              </a:rPr>
-              <a:t>Sets the Python version, extensions, ports and setup commands</a:t>
-            </a:r>
-          </a:p>
-          <a:p>
-            <a:pPr marL="342900" indent="-342900" algn="l">
-              <a:lnSpc>
-                <a:spcPct val="90000"/>
-              </a:lnSpc>
-              <a:spcBef>
-                <a:spcPts val="1000"/>
-              </a:spcBef>
-              <a:spcAft>
-                <a:spcPts val="0"/>
-              </a:spcAft>
-              <a:buClr>
-                <a:srgbClr val="44546A"/>
-              </a:buClr>
-              <a:buSzPts val="1600"/>
-              <a:buFont typeface="Arial"/>
-              <a:buChar char="•"/>
-            </a:pPr>
-            <a:r>
-              <a:rPr sz="1600" b="0">
-                <a:solidFill>
-                  <a:srgbClr val="44546A"/>
-                </a:solidFill>
-                <a:latin typeface="Arial"/>
-              </a:rPr>
-              <a:t>Change the file in a pull request, and everyone gets the new setup</a:t>
+              <a:t>Safe to use</a:t>
+            </a:r>
+          </a:p>
+          <a:p>
+            <a:pPr marL="342900" indent="-342900" algn="l">
+              <a:lnSpc>
+                <a:spcPct val="90000"/>
+              </a:lnSpc>
+              <a:spcBef>
+                <a:spcPts val="1000"/>
+              </a:spcBef>
+              <a:spcAft>
+                <a:spcPts val="0"/>
+              </a:spcAft>
+              <a:buClr>
+                <a:srgbClr val="44546A"/>
+              </a:buClr>
+              <a:buSzPts val="1600"/>
+              <a:buFont typeface="Arial"/>
+              <a:buChar char="•"/>
+            </a:pPr>
+            <a:r>
+              <a:rPr sz="1600" b="0">
+                <a:solidFill>
+                  <a:srgbClr val="44546A"/>
+                </a:solidFill>
+                <a:latin typeface="Arial"/>
+              </a:rPr>
+              <a:t>Code, documentation and notebooks with outputs cleared</a:t>
+            </a:r>
+          </a:p>
+          <a:p>
+            <a:pPr marL="342900" indent="-342900" algn="l">
+              <a:lnSpc>
+                <a:spcPct val="90000"/>
+              </a:lnSpc>
+              <a:spcBef>
+                <a:spcPts val="1000"/>
+              </a:spcBef>
+              <a:spcAft>
+                <a:spcPts val="0"/>
+              </a:spcAft>
+              <a:buClr>
+                <a:srgbClr val="44546A"/>
+              </a:buClr>
+              <a:buSzPts val="1600"/>
+              <a:buFont typeface="Arial"/>
+              <a:buChar char="•"/>
+            </a:pPr>
+            <a:r>
+              <a:rPr sz="1600" b="0">
+                <a:solidFill>
+                  <a:srgbClr val="44546A"/>
+                </a:solidFill>
+                <a:latin typeface="Arial"/>
+              </a:rPr>
+              <a:t>Synthetic or fully anonymised sample data</a:t>
             </a:r>
           </a:p>
           <a:p>
@@ -25442,91 +25396,109 @@
                 </a:solidFill>
                 <a:latin typeface="Arial"/>
               </a:rPr>
-              <a:t>Today's setup</a:t>
-            </a:r>
-          </a:p>
-          <a:p>
-            <a:pPr marL="342900" indent="-342900" algn="l">
-              <a:lnSpc>
-                <a:spcPct val="90000"/>
-              </a:lnSpc>
-              <a:spcBef>
-                <a:spcPts val="1000"/>
-              </a:spcBef>
-              <a:spcAft>
-                <a:spcPts val="0"/>
-              </a:spcAft>
-              <a:buClr>
-                <a:srgbClr val="44546A"/>
-              </a:buClr>
-              <a:buSzPts val="1600"/>
-              <a:buFont typeface="Arial"/>
-              <a:buChar char="•"/>
-            </a:pPr>
-            <a:r>
-              <a:rPr sz="1600" b="0">
-                <a:solidFill>
-                  <a:srgbClr val="44546A"/>
-                </a:solidFill>
-                <a:latin typeface="Arial"/>
-              </a:rPr>
-              <a:t>Python 3.11 with pandas, matplotlib and Streamlit</a:t>
-            </a:r>
-          </a:p>
-          <a:p>
-            <a:pPr marL="342900" indent="-342900" algn="l">
-              <a:lnSpc>
-                <a:spcPct val="90000"/>
-              </a:lnSpc>
-              <a:spcBef>
-                <a:spcPts val="1000"/>
-              </a:spcBef>
-              <a:spcAft>
-                <a:spcPts val="0"/>
-              </a:spcAft>
-              <a:buClr>
-                <a:srgbClr val="44546A"/>
-              </a:buClr>
-              <a:buSzPts val="1600"/>
-              <a:buFont typeface="Arial"/>
-              <a:buChar char="•"/>
-            </a:pPr>
-            <a:r>
-              <a:rPr sz="1600" b="0">
-                <a:solidFill>
-                  <a:srgbClr val="44546A"/>
-                </a:solidFill>
-                <a:latin typeface="Arial"/>
-              </a:rPr>
-              <a:t>Copilot and Pull Request extensions pre-installed</a:t>
-            </a:r>
-          </a:p>
-          <a:p>
-            <a:pPr marL="342900" indent="-342900" algn="l">
-              <a:lnSpc>
-                <a:spcPct val="90000"/>
-              </a:lnSpc>
-              <a:spcBef>
-                <a:spcPts val="1000"/>
-              </a:spcBef>
-              <a:spcAft>
-                <a:spcPts val="0"/>
-              </a:spcAft>
-              <a:buClr>
-                <a:srgbClr val="44546A"/>
-              </a:buClr>
-              <a:buSzPts val="1600"/>
-              <a:buFont typeface="Arial"/>
-              <a:buChar char="•"/>
-            </a:pPr>
-            <a:r>
-              <a:rPr sz="1600" b="0">
-                <a:solidFill>
-                  <a:srgbClr val="44546A"/>
-                </a:solidFill>
-                <a:latin typeface="Arial"/>
-              </a:rPr>
-              <a:t>Port 8501 forwarded for the Streamlit app</a:t>
+              <a:t>Never use</a:t>
+            </a:r>
+          </a:p>
+          <a:p>
+            <a:pPr marL="342900" indent="-342900" algn="l">
+              <a:lnSpc>
+                <a:spcPct val="90000"/>
+              </a:lnSpc>
+              <a:spcBef>
+                <a:spcPts val="1000"/>
+              </a:spcBef>
+              <a:spcAft>
+                <a:spcPts val="0"/>
+              </a:spcAft>
+              <a:buClr>
+                <a:srgbClr val="44546A"/>
+              </a:buClr>
+              <a:buSzPts val="1600"/>
+              <a:buFont typeface="Arial"/>
+              <a:buChar char="•"/>
+            </a:pPr>
+            <a:r>
+              <a:rPr sz="1600" b="0">
+                <a:solidFill>
+                  <a:srgbClr val="44546A"/>
+                </a:solidFill>
+                <a:latin typeface="Arial"/>
+              </a:rPr>
+              <a:t>Patient-identifiable data, extracts or NHS numbers</a:t>
+            </a:r>
+          </a:p>
+          <a:p>
+            <a:pPr marL="342900" indent="-342900" algn="l">
+              <a:lnSpc>
+                <a:spcPct val="90000"/>
+              </a:lnSpc>
+              <a:spcBef>
+                <a:spcPts val="1000"/>
+              </a:spcBef>
+              <a:spcAft>
+                <a:spcPts val="0"/>
+              </a:spcAft>
+              <a:buClr>
+                <a:srgbClr val="44546A"/>
+              </a:buClr>
+              <a:buSzPts val="1600"/>
+              <a:buFont typeface="Arial"/>
+              <a:buChar char="•"/>
+            </a:pPr>
+            <a:r>
+              <a:rPr sz="1600" b="0">
+                <a:solidFill>
+                  <a:srgbClr val="44546A"/>
+                </a:solidFill>
+                <a:latin typeface="Arial"/>
+              </a:rPr>
+              <a:t>Passwords, tokens or keys in files — use Codespaces secrets</a:t>
+            </a:r>
+          </a:p>
+          <a:p>
+            <a:pPr marL="0" indent="0" algn="l">
+              <a:lnSpc>
+                <a:spcPct val="90000"/>
+              </a:lnSpc>
+              <a:spcBef>
+                <a:spcPts val="1000"/>
+              </a:spcBef>
+              <a:spcAft>
+                <a:spcPts val="0"/>
+              </a:spcAft>
+              <a:buNone/>
+            </a:pPr>
+            <a:r>
+              <a:rPr sz="1600" b="0">
+                <a:solidFill>
+                  <a:srgbClr val="44546A"/>
+                </a:solidFill>
+                <a:latin typeface="Arial"/>
+              </a:rPr>
+              <a:t/>
+            </a:r>
+          </a:p>
+          <a:p>
+            <a:pPr marL="0" indent="0" algn="l">
+              <a:lnSpc>
+                <a:spcPct val="90000"/>
+              </a:lnSpc>
+              <a:spcBef>
+                <a:spcPts val="1000"/>
+              </a:spcBef>
+              <a:spcAft>
+                <a:spcPts val="0"/>
+              </a:spcAft>
+              <a:buNone/>
+            </a:pPr>
+            <a:r>
+              <a:rPr sz="1400" b="1">
+                <a:solidFill>
+                  <a:srgbClr val="002060"/>
+                </a:solidFill>
+                <a:latin typeface="Arial"/>
+              </a:rPr>
+              <a:t>A Codespace runs in GitHub's cloud, outside the Secure Data Environment. Real data stays in the SDE.</a:t>
             </a:r>
           </a:p>
         </p:txBody>
@@ -25571,7 +25543,7 @@
                 </a:solidFill>
                 <a:latin typeface="Arial"/>
               </a:rPr>
-              <a:t>What Belongs in a Codespace?</a:t>
+              <a:t>GitHub Copilot: Suggest, Chat and Slash Commands</a:t>
             </a:r>
           </a:p>
         </p:txBody>
@@ -25610,63 +25582,63 @@
                 </a:solidFill>
                 <a:latin typeface="Arial"/>
               </a:rPr>
-              <a:t>Safe to use</a:t>
-            </a:r>
-          </a:p>
-          <a:p>
-            <a:pPr marL="342900" indent="-342900" algn="l">
-              <a:lnSpc>
-                <a:spcPct val="90000"/>
-              </a:lnSpc>
-              <a:spcBef>
-                <a:spcPts val="1000"/>
-              </a:spcBef>
-              <a:spcAft>
-                <a:spcPts val="0"/>
-              </a:spcAft>
-              <a:buClr>
-                <a:srgbClr val="44546A"/>
-              </a:buClr>
-              <a:buSzPts val="1600"/>
-              <a:buFont typeface="Arial"/>
-              <a:buChar char="•"/>
-            </a:pPr>
-            <a:r>
-              <a:rPr sz="1600" b="0">
-                <a:solidFill>
-                  <a:srgbClr val="44546A"/>
-                </a:solidFill>
-                <a:latin typeface="Arial"/>
-              </a:rPr>
-              <a:t>Code, documentation and notebooks with outputs cleared</a:t>
-            </a:r>
-          </a:p>
-          <a:p>
-            <a:pPr marL="342900" indent="-342900" algn="l">
-              <a:lnSpc>
-                <a:spcPct val="90000"/>
-              </a:lnSpc>
-              <a:spcBef>
-                <a:spcPts val="1000"/>
-              </a:spcBef>
-              <a:spcAft>
-                <a:spcPts val="0"/>
-              </a:spcAft>
-              <a:buClr>
-                <a:srgbClr val="44546A"/>
-              </a:buClr>
-              <a:buSzPts val="1600"/>
-              <a:buFont typeface="Arial"/>
-              <a:buChar char="•"/>
-            </a:pPr>
-            <a:r>
-              <a:rPr sz="1600" b="0">
-                <a:solidFill>
-                  <a:srgbClr val="44546A"/>
-                </a:solidFill>
-                <a:latin typeface="Arial"/>
-              </a:rPr>
-              <a:t>Synthetic or fully anonymised sample data</a:t>
+              <a:t>Inline suggestions</a:t>
+            </a:r>
+          </a:p>
+          <a:p>
+            <a:pPr marL="342900" indent="-342900" algn="l">
+              <a:lnSpc>
+                <a:spcPct val="90000"/>
+              </a:lnSpc>
+              <a:spcBef>
+                <a:spcPts val="1000"/>
+              </a:spcBef>
+              <a:spcAft>
+                <a:spcPts val="0"/>
+              </a:spcAft>
+              <a:buClr>
+                <a:srgbClr val="44546A"/>
+              </a:buClr>
+              <a:buSzPts val="1600"/>
+              <a:buFont typeface="Arial"/>
+              <a:buChar char="•"/>
+            </a:pPr>
+            <a:r>
+              <a:rPr sz="1600" b="0">
+                <a:solidFill>
+                  <a:srgbClr val="44546A"/>
+                </a:solidFill>
+                <a:latin typeface="Arial"/>
+              </a:rPr>
+              <a:t>Write a comment or function name — Copilot suggests the code</a:t>
+            </a:r>
+          </a:p>
+          <a:p>
+            <a:pPr marL="342900" indent="-342900" algn="l">
+              <a:lnSpc>
+                <a:spcPct val="90000"/>
+              </a:lnSpc>
+              <a:spcBef>
+                <a:spcPts val="1000"/>
+              </a:spcBef>
+              <a:spcAft>
+                <a:spcPts val="0"/>
+              </a:spcAft>
+              <a:buClr>
+                <a:srgbClr val="44546A"/>
+              </a:buClr>
+              <a:buSzPts val="1600"/>
+              <a:buFont typeface="Arial"/>
+              <a:buChar char="•"/>
+            </a:pPr>
+            <a:r>
+              <a:rPr sz="1600" b="0">
+                <a:solidFill>
+                  <a:srgbClr val="44546A"/>
+                </a:solidFill>
+                <a:latin typeface="Arial"/>
+              </a:rPr>
+              <a:t>Press Tab to accept, Esc to dismiss</a:t>
             </a:r>
           </a:p>
           <a:p>
@@ -25712,109 +25684,91 @@
                 </a:solidFill>
                 <a:latin typeface="Arial"/>
               </a:rPr>
-              <a:t>Never use</a:t>
-            </a:r>
-          </a:p>
-          <a:p>
-            <a:pPr marL="342900" indent="-342900" algn="l">
-              <a:lnSpc>
-                <a:spcPct val="90000"/>
-              </a:lnSpc>
-              <a:spcBef>
-                <a:spcPts val="1000"/>
-              </a:spcBef>
-              <a:spcAft>
-                <a:spcPts val="0"/>
-              </a:spcAft>
-              <a:buClr>
-                <a:srgbClr val="44546A"/>
-              </a:buClr>
-              <a:buSzPts val="1600"/>
-              <a:buFont typeface="Arial"/>
-              <a:buChar char="•"/>
-            </a:pPr>
-            <a:r>
-              <a:rPr sz="1600" b="0">
-                <a:solidFill>
-                  <a:srgbClr val="44546A"/>
-                </a:solidFill>
-                <a:latin typeface="Arial"/>
-              </a:rPr>
-              <a:t>Patient-identifiable data, extracts or NHS numbers</a:t>
-            </a:r>
-          </a:p>
-          <a:p>
-            <a:pPr marL="342900" indent="-342900" algn="l">
-              <a:lnSpc>
-                <a:spcPct val="90000"/>
-              </a:lnSpc>
-              <a:spcBef>
-                <a:spcPts val="1000"/>
-              </a:spcBef>
-              <a:spcAft>
-                <a:spcPts val="0"/>
-              </a:spcAft>
-              <a:buClr>
-                <a:srgbClr val="44546A"/>
-              </a:buClr>
-              <a:buSzPts val="1600"/>
-              <a:buFont typeface="Arial"/>
-              <a:buChar char="•"/>
-            </a:pPr>
-            <a:r>
-              <a:rPr sz="1600" b="0">
-                <a:solidFill>
-                  <a:srgbClr val="44546A"/>
-                </a:solidFill>
-                <a:latin typeface="Arial"/>
-              </a:rPr>
-              <a:t>Passwords, tokens or keys in files — use Codespaces secrets</a:t>
-            </a:r>
-          </a:p>
-          <a:p>
-            <a:pPr marL="0" indent="0" algn="l">
-              <a:lnSpc>
-                <a:spcPct val="90000"/>
-              </a:lnSpc>
-              <a:spcBef>
-                <a:spcPts val="1000"/>
-              </a:spcBef>
-              <a:spcAft>
-                <a:spcPts val="0"/>
-              </a:spcAft>
-              <a:buNone/>
-            </a:pPr>
-            <a:r>
-              <a:rPr sz="1600" b="0">
-                <a:solidFill>
-                  <a:srgbClr val="44546A"/>
-                </a:solidFill>
-                <a:latin typeface="Arial"/>
-              </a:rPr>
-              <a:t/>
-            </a:r>
-          </a:p>
-          <a:p>
-            <a:pPr marL="0" indent="0" algn="l">
-              <a:lnSpc>
-                <a:spcPct val="90000"/>
-              </a:lnSpc>
-              <a:spcBef>
-                <a:spcPts val="1000"/>
-              </a:spcBef>
-              <a:spcAft>
-                <a:spcPts val="0"/>
-              </a:spcAft>
-              <a:buNone/>
-            </a:pPr>
-            <a:r>
-              <a:rPr sz="1400" b="1">
-                <a:solidFill>
-                  <a:srgbClr val="002060"/>
-                </a:solidFill>
-                <a:latin typeface="Arial"/>
-              </a:rPr>
-              <a:t>A Codespace runs in GitHub's cloud, outside the Secure Data Environment. Real data stays in the SDE.</a:t>
+              <a:t>Copilot Chat</a:t>
+            </a:r>
+          </a:p>
+          <a:p>
+            <a:pPr marL="342900" indent="-342900" algn="l">
+              <a:lnSpc>
+                <a:spcPct val="90000"/>
+              </a:lnSpc>
+              <a:spcBef>
+                <a:spcPts val="1000"/>
+              </a:spcBef>
+              <a:spcAft>
+                <a:spcPts val="0"/>
+              </a:spcAft>
+              <a:buClr>
+                <a:srgbClr val="44546A"/>
+              </a:buClr>
+              <a:buSzPts val="1600"/>
+              <a:buFont typeface="Arial"/>
+              <a:buChar char="•"/>
+            </a:pPr>
+            <a:r>
+              <a:rPr sz="1600" b="0">
+                <a:solidFill>
+                  <a:srgbClr val="44546A"/>
+                </a:solidFill>
+                <a:latin typeface="Arial"/>
+              </a:rPr>
+              <a:t>Ask questions about your code, data or errors</a:t>
+            </a:r>
+          </a:p>
+          <a:p>
+            <a:pPr marL="342900" indent="-342900" algn="l">
+              <a:lnSpc>
+                <a:spcPct val="90000"/>
+              </a:lnSpc>
+              <a:spcBef>
+                <a:spcPts val="1000"/>
+              </a:spcBef>
+              <a:spcAft>
+                <a:spcPts val="0"/>
+              </a:spcAft>
+              <a:buClr>
+                <a:srgbClr val="44546A"/>
+              </a:buClr>
+              <a:buSzPts val="1600"/>
+              <a:buFont typeface="Arial"/>
+              <a:buChar char="•"/>
+            </a:pPr>
+            <a:r>
+              <a:rPr sz="1600" b="0">
+                <a:solidFill>
+                  <a:srgbClr val="44546A"/>
+                </a:solidFill>
+                <a:latin typeface="Arial"/>
+              </a:rPr>
+              <a:t>/explain, /fix, /tests and /doc for common jobs</a:t>
+            </a:r>
+          </a:p>
+          <a:p>
+            <a:pPr marL="342900" indent="-342900" algn="l">
+              <a:lnSpc>
+                <a:spcPct val="90000"/>
+              </a:lnSpc>
+              <a:spcBef>
+                <a:spcPts val="1000"/>
+              </a:spcBef>
+              <a:spcAft>
+                <a:spcPts val="0"/>
+              </a:spcAft>
+              <a:buClr>
+                <a:srgbClr val="44546A"/>
+              </a:buClr>
+              <a:buSzPts val="1600"/>
+              <a:buFont typeface="Arial"/>
+              <a:buChar char="•"/>
+            </a:pPr>
+            <a:r>
+              <a:rPr sz="1600" b="0">
+                <a:solidFill>
+                  <a:srgbClr val="44546A"/>
+                </a:solidFill>
+                <a:latin typeface="Arial"/>
+              </a:rPr>
+              <a:t>Shared repository instructions keep answers consistent (.github/copilot-instructions.md)</a:t>
             </a:r>
           </a:p>
         </p:txBody>
@@ -25859,7 +25813,7 @@
                 </a:solidFill>
                 <a:latin typeface="Arial"/>
               </a:rPr>
-              <a:t>GitHub Copilot: Suggest, Chat and Slash Commands</a:t>
+              <a:t>Prompting and Reviewing Copilot</a:t>
             </a:r>
           </a:p>
         </p:txBody>
@@ -25898,63 +25852,91 @@
                 </a:solidFill>
                 <a:latin typeface="Arial"/>
               </a:rPr>
-              <a:t>Inline suggestions</a:t>
-            </a:r>
-          </a:p>
-          <a:p>
-            <a:pPr marL="342900" indent="-342900" algn="l">
-              <a:lnSpc>
-                <a:spcPct val="90000"/>
-              </a:lnSpc>
-              <a:spcBef>
-                <a:spcPts val="1000"/>
-              </a:spcBef>
-              <a:spcAft>
-                <a:spcPts val="0"/>
-              </a:spcAft>
-              <a:buClr>
-                <a:srgbClr val="44546A"/>
-              </a:buClr>
-              <a:buSzPts val="1600"/>
-              <a:buFont typeface="Arial"/>
-              <a:buChar char="•"/>
-            </a:pPr>
-            <a:r>
-              <a:rPr sz="1600" b="0">
-                <a:solidFill>
-                  <a:srgbClr val="44546A"/>
-                </a:solidFill>
-                <a:latin typeface="Arial"/>
-              </a:rPr>
-              <a:t>Write a comment or function name — Copilot suggests the code</a:t>
-            </a:r>
-          </a:p>
-          <a:p>
-            <a:pPr marL="342900" indent="-342900" algn="l">
-              <a:lnSpc>
-                <a:spcPct val="90000"/>
-              </a:lnSpc>
-              <a:spcBef>
-                <a:spcPts val="1000"/>
-              </a:spcBef>
-              <a:spcAft>
-                <a:spcPts val="0"/>
-              </a:spcAft>
-              <a:buClr>
-                <a:srgbClr val="44546A"/>
-              </a:buClr>
-              <a:buSzPts val="1600"/>
-              <a:buFont typeface="Arial"/>
-              <a:buChar char="•"/>
-            </a:pPr>
-            <a:r>
-              <a:rPr sz="1600" b="0">
-                <a:solidFill>
-                  <a:srgbClr val="44546A"/>
-                </a:solidFill>
-                <a:latin typeface="Arial"/>
-              </a:rPr>
-              <a:t>Press Tab to accept, Esc to dismiss</a:t>
+              <a:t>Get better answers</a:t>
+            </a:r>
+          </a:p>
+          <a:p>
+            <a:pPr marL="342900" indent="-342900" algn="l">
+              <a:lnSpc>
+                <a:spcPct val="90000"/>
+              </a:lnSpc>
+              <a:spcBef>
+                <a:spcPts val="1000"/>
+              </a:spcBef>
+              <a:spcAft>
+                <a:spcPts val="0"/>
+              </a:spcAft>
+              <a:buClr>
+                <a:srgbClr val="44546A"/>
+              </a:buClr>
+              <a:buSzPts val="1600"/>
+              <a:buFont typeface="Arial"/>
+              <a:buChar char="•"/>
+            </a:pPr>
+            <a:r>
+              <a:rPr sz="1600" b="0">
+                <a:solidFill>
+                  <a:srgbClr val="44546A"/>
+                </a:solidFill>
+                <a:latin typeface="Arial"/>
+              </a:rPr>
+              <a:t>Give context — the columns, the metric definition, the output you want</a:t>
+            </a:r>
+          </a:p>
+          <a:p>
+            <a:pPr marL="342900" indent="-342900" algn="l">
+              <a:lnSpc>
+                <a:spcPct val="90000"/>
+              </a:lnSpc>
+              <a:spcBef>
+                <a:spcPts val="1000"/>
+              </a:spcBef>
+              <a:spcAft>
+                <a:spcPts val="0"/>
+              </a:spcAft>
+              <a:buClr>
+                <a:srgbClr val="44546A"/>
+              </a:buClr>
+              <a:buSzPts val="1600"/>
+              <a:buFont typeface="Arial"/>
+              <a:buChar char="•"/>
+            </a:pPr>
+            <a:r>
+              <a:rPr sz="1600" b="0">
+                <a:solidFill>
+                  <a:srgbClr val="44546A"/>
+                </a:solidFill>
+                <a:latin typeface="Arial"/>
+              </a:rPr>
+              <a:t>Work in small steps and iterate</a:t>
+            </a:r>
+          </a:p>
+          <a:p>
+            <a:pPr marL="342900" indent="-342900" algn="l">
+              <a:lnSpc>
+                <a:spcPct val="90000"/>
+              </a:lnSpc>
+              <a:spcBef>
+                <a:spcPts val="1000"/>
+              </a:spcBef>
+              <a:spcAft>
+                <a:spcPts val="0"/>
+              </a:spcAft>
+              <a:buClr>
+                <a:srgbClr val="44546A"/>
+              </a:buClr>
+              <a:buSzPts val="1600"/>
+              <a:buFont typeface="Arial"/>
+              <a:buChar char="•"/>
+            </a:pPr>
+            <a:r>
+              <a:rPr sz="1600" b="0">
+                <a:solidFill>
+                  <a:srgbClr val="44546A"/>
+                </a:solidFill>
+                <a:latin typeface="Arial"/>
+              </a:rPr>
+              <a:t>Ask Copilot to explain code you don't understand</a:t>
             </a:r>
           </a:p>
           <a:p>
@@ -26000,91 +25982,91 @@
                 </a:solidFill>
                 <a:latin typeface="Arial"/>
               </a:rPr>
-              <a:t>Copilot Chat</a:t>
-            </a:r>
-          </a:p>
-          <a:p>
-            <a:pPr marL="342900" indent="-342900" algn="l">
-              <a:lnSpc>
-                <a:spcPct val="90000"/>
-              </a:lnSpc>
-              <a:spcBef>
-                <a:spcPts val="1000"/>
-              </a:spcBef>
-              <a:spcAft>
-                <a:spcPts val="0"/>
-              </a:spcAft>
-              <a:buClr>
-                <a:srgbClr val="44546A"/>
-              </a:buClr>
-              <a:buSzPts val="1600"/>
-              <a:buFont typeface="Arial"/>
-              <a:buChar char="•"/>
-            </a:pPr>
-            <a:r>
-              <a:rPr sz="1600" b="0">
-                <a:solidFill>
-                  <a:srgbClr val="44546A"/>
-                </a:solidFill>
-                <a:latin typeface="Arial"/>
-              </a:rPr>
-              <a:t>Ask questions about your code, data or errors</a:t>
-            </a:r>
-          </a:p>
-          <a:p>
-            <a:pPr marL="342900" indent="-342900" algn="l">
-              <a:lnSpc>
-                <a:spcPct val="90000"/>
-              </a:lnSpc>
-              <a:spcBef>
-                <a:spcPts val="1000"/>
-              </a:spcBef>
-              <a:spcAft>
-                <a:spcPts val="0"/>
-              </a:spcAft>
-              <a:buClr>
-                <a:srgbClr val="44546A"/>
-              </a:buClr>
-              <a:buSzPts val="1600"/>
-              <a:buFont typeface="Arial"/>
-              <a:buChar char="•"/>
-            </a:pPr>
-            <a:r>
-              <a:rPr sz="1600" b="0">
-                <a:solidFill>
-                  <a:srgbClr val="44546A"/>
-                </a:solidFill>
-                <a:latin typeface="Arial"/>
-              </a:rPr>
-              <a:t>/explain, /fix, /tests and /doc for common jobs</a:t>
-            </a:r>
-          </a:p>
-          <a:p>
-            <a:pPr marL="342900" indent="-342900" algn="l">
-              <a:lnSpc>
-                <a:spcPct val="90000"/>
-              </a:lnSpc>
-              <a:spcBef>
-                <a:spcPts val="1000"/>
-              </a:spcBef>
-              <a:spcAft>
-                <a:spcPts val="0"/>
-              </a:spcAft>
-              <a:buClr>
-                <a:srgbClr val="44546A"/>
-              </a:buClr>
-              <a:buSzPts val="1600"/>
-              <a:buFont typeface="Arial"/>
-              <a:buChar char="•"/>
-            </a:pPr>
-            <a:r>
-              <a:rPr sz="1600" b="0">
-                <a:solidFill>
-                  <a:srgbClr val="44546A"/>
-                </a:solidFill>
-                <a:latin typeface="Arial"/>
-              </a:rPr>
-              <a:t>Shared repository instructions keep answers consistent (.github/copilot-instructions.md)</a:t>
+              <a:t>You are the reviewer</a:t>
+            </a:r>
+          </a:p>
+          <a:p>
+            <a:pPr marL="342900" indent="-342900" algn="l">
+              <a:lnSpc>
+                <a:spcPct val="90000"/>
+              </a:lnSpc>
+              <a:spcBef>
+                <a:spcPts val="1000"/>
+              </a:spcBef>
+              <a:spcAft>
+                <a:spcPts val="0"/>
+              </a:spcAft>
+              <a:buClr>
+                <a:srgbClr val="44546A"/>
+              </a:buClr>
+              <a:buSzPts val="1600"/>
+              <a:buFont typeface="Arial"/>
+              <a:buChar char="•"/>
+            </a:pPr>
+            <a:r>
+              <a:rPr sz="1600" b="0">
+                <a:solidFill>
+                  <a:srgbClr val="44546A"/>
+                </a:solidFill>
+                <a:latin typeface="Arial"/>
+              </a:rPr>
+              <a:t>Never accept code you can't explain — Copilot can be confidently wrong</a:t>
+            </a:r>
+          </a:p>
+          <a:p>
+            <a:pPr marL="342900" indent="-342900" algn="l">
+              <a:lnSpc>
+                <a:spcPct val="90000"/>
+              </a:lnSpc>
+              <a:spcBef>
+                <a:spcPts val="1000"/>
+              </a:spcBef>
+              <a:spcAft>
+                <a:spcPts val="0"/>
+              </a:spcAft>
+              <a:buClr>
+                <a:srgbClr val="44546A"/>
+              </a:buClr>
+              <a:buSzPts val="1600"/>
+              <a:buFont typeface="Arial"/>
+              <a:buChar char="•"/>
+            </a:pPr>
+            <a:r>
+              <a:rPr sz="1600" b="0">
+                <a:solidFill>
+                  <a:srgbClr val="44546A"/>
+                </a:solidFill>
+                <a:latin typeface="Arial"/>
+              </a:rPr>
+              <a:t>Check definitions, totals and invented functions, then test</a:t>
+            </a:r>
+          </a:p>
+          <a:p>
+            <a:pPr marL="342900" indent="-342900" algn="l">
+              <a:lnSpc>
+                <a:spcPct val="90000"/>
+              </a:lnSpc>
+              <a:spcBef>
+                <a:spcPts val="1000"/>
+              </a:spcBef>
+              <a:spcAft>
+                <a:spcPts val="0"/>
+              </a:spcAft>
+              <a:buClr>
+                <a:srgbClr val="44546A"/>
+              </a:buClr>
+              <a:buSzPts val="1600"/>
+              <a:buFont typeface="Arial"/>
+              <a:buChar char="•"/>
+            </a:pPr>
+            <a:r>
+              <a:rPr sz="1600" b="0">
+                <a:solidFill>
+                  <a:srgbClr val="44546A"/>
+                </a:solidFill>
+                <a:latin typeface="Arial"/>
+              </a:rPr>
+              <a:t>No patient data or secrets in prompts</a:t>
             </a:r>
           </a:p>
         </p:txBody>
@@ -26129,7 +26111,7 @@
                 </a:solidFill>
                 <a:latin typeface="Arial"/>
               </a:rPr>
-              <a:t>Prompting and Reviewing Copilot</a:t>
+              <a:t>Exercise: Choose Your Track</a:t>
             </a:r>
           </a:p>
         </p:txBody>
@@ -26168,91 +26150,63 @@
                 </a:solidFill>
                 <a:latin typeface="Arial"/>
               </a:rPr>
-              <a:t>Get better answers</a:t>
-            </a:r>
-          </a:p>
-          <a:p>
-            <a:pPr marL="342900" indent="-342900" algn="l">
-              <a:lnSpc>
-                <a:spcPct val="90000"/>
-              </a:lnSpc>
-              <a:spcBef>
-                <a:spcPts val="1000"/>
-              </a:spcBef>
-              <a:spcAft>
-                <a:spcPts val="0"/>
-              </a:spcAft>
-              <a:buClr>
-                <a:srgbClr val="44546A"/>
-              </a:buClr>
-              <a:buSzPts val="1600"/>
-              <a:buFont typeface="Arial"/>
-              <a:buChar char="•"/>
-            </a:pPr>
-            <a:r>
-              <a:rPr sz="1600" b="0">
-                <a:solidFill>
-                  <a:srgbClr val="44546A"/>
-                </a:solidFill>
-                <a:latin typeface="Arial"/>
-              </a:rPr>
-              <a:t>Give context — the columns, the metric definition, the output you want</a:t>
-            </a:r>
-          </a:p>
-          <a:p>
-            <a:pPr marL="342900" indent="-342900" algn="l">
-              <a:lnSpc>
-                <a:spcPct val="90000"/>
-              </a:lnSpc>
-              <a:spcBef>
-                <a:spcPts val="1000"/>
-              </a:spcBef>
-              <a:spcAft>
-                <a:spcPts val="0"/>
-              </a:spcAft>
-              <a:buClr>
-                <a:srgbClr val="44546A"/>
-              </a:buClr>
-              <a:buSzPts val="1600"/>
-              <a:buFont typeface="Arial"/>
-              <a:buChar char="•"/>
-            </a:pPr>
-            <a:r>
-              <a:rPr sz="1600" b="0">
-                <a:solidFill>
-                  <a:srgbClr val="44546A"/>
-                </a:solidFill>
-                <a:latin typeface="Arial"/>
-              </a:rPr>
-              <a:t>Work in small steps and iterate</a:t>
-            </a:r>
-          </a:p>
-          <a:p>
-            <a:pPr marL="342900" indent="-342900" algn="l">
-              <a:lnSpc>
-                <a:spcPct val="90000"/>
-              </a:lnSpc>
-              <a:spcBef>
-                <a:spcPts val="1000"/>
-              </a:spcBef>
-              <a:spcAft>
-                <a:spcPts val="0"/>
-              </a:spcAft>
-              <a:buClr>
-                <a:srgbClr val="44546A"/>
-              </a:buClr>
-              <a:buSzPts val="1600"/>
-              <a:buFont typeface="Arial"/>
-              <a:buChar char="•"/>
-            </a:pPr>
-            <a:r>
-              <a:rPr sz="1600" b="0">
-                <a:solidFill>
-                  <a:srgbClr val="44546A"/>
-                </a:solidFill>
-                <a:latin typeface="Arial"/>
-              </a:rPr>
-              <a:t>Ask Copilot to explain code you don't understand</a:t>
+              <a:t>The scenario</a:t>
+            </a:r>
+          </a:p>
+          <a:p>
+            <a:pPr marL="342900" indent="-342900" algn="l">
+              <a:lnSpc>
+                <a:spcPct val="90000"/>
+              </a:lnSpc>
+              <a:spcBef>
+                <a:spcPts val="1000"/>
+              </a:spcBef>
+              <a:spcAft>
+                <a:spcPts val="0"/>
+              </a:spcAft>
+              <a:buClr>
+                <a:srgbClr val="44546A"/>
+              </a:buClr>
+              <a:buSzPts val="1600"/>
+              <a:buFont typeface="Arial"/>
+              <a:buChar char="•"/>
+            </a:pPr>
+            <a:r>
+              <a:rPr sz="1600" b="0">
+                <a:solidFill>
+                  <a:srgbClr val="44546A"/>
+                </a:solidFill>
+                <a:latin typeface="Arial"/>
+              </a:rPr>
+              <a:t>Which clinics and patient groups have the highest DNA (did not attend) rates, and is it changing through the year?</a:t>
+            </a:r>
+          </a:p>
+          <a:p>
+            <a:pPr marL="342900" indent="-342900" algn="l">
+              <a:lnSpc>
+                <a:spcPct val="90000"/>
+              </a:lnSpc>
+              <a:spcBef>
+                <a:spcPts val="1000"/>
+              </a:spcBef>
+              <a:spcAft>
+                <a:spcPts val="0"/>
+              </a:spcAft>
+              <a:buClr>
+                <a:srgbClr val="44546A"/>
+              </a:buClr>
+              <a:buSzPts val="1600"/>
+              <a:buFont typeface="Arial"/>
+              <a:buChar char="•"/>
+            </a:pPr>
+            <a:r>
+              <a:rPr sz="1600" b="0">
+                <a:solidFill>
+                  <a:srgbClr val="44546A"/>
+                </a:solidFill>
+                <a:latin typeface="Arial"/>
+              </a:rPr>
+              <a:t>Synthetic outpatient dataset — 3,000 appointments</a:t>
             </a:r>
           </a:p>
           <a:p>
@@ -26298,91 +26252,109 @@
                 </a:solidFill>
                 <a:latin typeface="Arial"/>
               </a:rPr>
-              <a:t>You are the reviewer</a:t>
-            </a:r>
-          </a:p>
-          <a:p>
-            <a:pPr marL="342900" indent="-342900" algn="l">
-              <a:lnSpc>
-                <a:spcPct val="90000"/>
-              </a:lnSpc>
-              <a:spcBef>
-                <a:spcPts val="1000"/>
-              </a:spcBef>
-              <a:spcAft>
-                <a:spcPts val="0"/>
-              </a:spcAft>
-              <a:buClr>
-                <a:srgbClr val="44546A"/>
-              </a:buClr>
-              <a:buSzPts val="1600"/>
-              <a:buFont typeface="Arial"/>
-              <a:buChar char="•"/>
-            </a:pPr>
-            <a:r>
-              <a:rPr sz="1600" b="0">
-                <a:solidFill>
-                  <a:srgbClr val="44546A"/>
-                </a:solidFill>
-                <a:latin typeface="Arial"/>
-              </a:rPr>
-              <a:t>Never accept code you can't explain — Copilot can be confidently wrong</a:t>
-            </a:r>
-          </a:p>
-          <a:p>
-            <a:pPr marL="342900" indent="-342900" algn="l">
-              <a:lnSpc>
-                <a:spcPct val="90000"/>
-              </a:lnSpc>
-              <a:spcBef>
-                <a:spcPts val="1000"/>
-              </a:spcBef>
-              <a:spcAft>
-                <a:spcPts val="0"/>
-              </a:spcAft>
-              <a:buClr>
-                <a:srgbClr val="44546A"/>
-              </a:buClr>
-              <a:buSzPts val="1600"/>
-              <a:buFont typeface="Arial"/>
-              <a:buChar char="•"/>
-            </a:pPr>
-            <a:r>
-              <a:rPr sz="1600" b="0">
-                <a:solidFill>
-                  <a:srgbClr val="44546A"/>
-                </a:solidFill>
-                <a:latin typeface="Arial"/>
-              </a:rPr>
-              <a:t>Check definitions, totals and invented functions, then test</a:t>
-            </a:r>
-          </a:p>
-          <a:p>
-            <a:pPr marL="342900" indent="-342900" algn="l">
-              <a:lnSpc>
-                <a:spcPct val="90000"/>
-              </a:lnSpc>
-              <a:spcBef>
-                <a:spcPts val="1000"/>
-              </a:spcBef>
-              <a:spcAft>
-                <a:spcPts val="0"/>
-              </a:spcAft>
-              <a:buClr>
-                <a:srgbClr val="44546A"/>
-              </a:buClr>
-              <a:buSzPts val="1600"/>
-              <a:buFont typeface="Arial"/>
-              <a:buChar char="•"/>
-            </a:pPr>
-            <a:r>
-              <a:rPr sz="1600" b="0">
-                <a:solidFill>
-                  <a:srgbClr val="44546A"/>
-                </a:solidFill>
-                <a:latin typeface="Arial"/>
-              </a:rPr>
-              <a:t>No patient data or secrets in prompts</a:t>
+              <a:t>Pick one</a:t>
+            </a:r>
+          </a:p>
+          <a:p>
+            <a:pPr marL="342900" indent="-342900" algn="l">
+              <a:lnSpc>
+                <a:spcPct val="90000"/>
+              </a:lnSpc>
+              <a:spcBef>
+                <a:spcPts val="1000"/>
+              </a:spcBef>
+              <a:spcAft>
+                <a:spcPts val="0"/>
+              </a:spcAft>
+              <a:buClr>
+                <a:srgbClr val="44546A"/>
+              </a:buClr>
+              <a:buSzPts val="1600"/>
+              <a:buFont typeface="Arial"/>
+              <a:buChar char="•"/>
+            </a:pPr>
+            <a:r>
+              <a:rPr sz="1600" b="0">
+                <a:solidFill>
+                  <a:srgbClr val="44546A"/>
+                </a:solidFill>
+                <a:latin typeface="Arial"/>
+              </a:rPr>
+              <a:t>Track A — Analysis. Python script that checks the data, calculates DNA rates and saves a chart</a:t>
+            </a:r>
+          </a:p>
+          <a:p>
+            <a:pPr marL="342900" indent="-342900" algn="l">
+              <a:lnSpc>
+                <a:spcPct val="90000"/>
+              </a:lnSpc>
+              <a:spcBef>
+                <a:spcPts val="1000"/>
+              </a:spcBef>
+              <a:spcAft>
+                <a:spcPts val="0"/>
+              </a:spcAft>
+              <a:buClr>
+                <a:srgbClr val="44546A"/>
+              </a:buClr>
+              <a:buSzPts val="1600"/>
+              <a:buFont typeface="Arial"/>
+              <a:buChar char="•"/>
+            </a:pPr>
+            <a:r>
+              <a:rPr sz="1600" b="0">
+                <a:solidFill>
+                  <a:srgbClr val="44546A"/>
+                </a:solidFill>
+                <a:latin typeface="Arial"/>
+              </a:rPr>
+              <a:t>Track B — UI. A Streamlit app with filters, headline numbers and charts</a:t>
+            </a:r>
+          </a:p>
+          <a:p>
+            <a:pPr marL="0" indent="0" algn="l">
+              <a:lnSpc>
+                <a:spcPct val="90000"/>
+              </a:lnSpc>
+              <a:spcBef>
+                <a:spcPts val="1000"/>
+              </a:spcBef>
+              <a:spcAft>
+                <a:spcPts val="0"/>
+              </a:spcAft>
+              <a:buNone/>
+            </a:pPr>
+            <a:r>
+              <a:rPr sz="1600" b="0">
+                <a:solidFill>
+                  <a:srgbClr val="44546A"/>
+                </a:solidFill>
+                <a:latin typeface="Arial"/>
+              </a:rPr>
+              <a:t/>
+            </a:r>
+          </a:p>
+          <a:p>
+            <a:pPr marL="0" indent="0" algn="l">
+              <a:lnSpc>
+                <a:spcPct val="90000"/>
+              </a:lnSpc>
+              <a:spcBef>
+                <a:spcPts val="1000"/>
+              </a:spcBef>
+              <a:spcAft>
+                <a:spcPts val="0"/>
+              </a:spcAft>
+              <a:buNone/>
+            </a:pPr>
+            <a:r>
+              <a:rPr sz="1400" b="0">
+                <a:solidFill>
+                  <a:srgbClr val="44546A"/>
+                </a:solidFill>
+                <a:latin typeface="Arial"/>
+              </a:rPr>
+              <a:t>DNA rate = DNA ÷ (Attended + DNA). Cancelled appointments are excluded.</a:t>
             </a:r>
           </a:p>
         </p:txBody>
@@ -26427,7 +26399,7 @@
                 </a:solidFill>
                 <a:latin typeface="Arial"/>
               </a:rPr>
-              <a:t>Exercise: Choose Your Track</a:t>
+              <a:t>Exercise: Build with Copilot (25 minutes)</a:t>
             </a:r>
           </a:p>
         </p:txBody>
@@ -26466,63 +26438,175 @@
                 </a:solidFill>
                 <a:latin typeface="Arial"/>
               </a:rPr>
-              <a:t>The scenario</a:t>
-            </a:r>
-          </a:p>
-          <a:p>
-            <a:pPr marL="342900" indent="-342900" algn="l">
-              <a:lnSpc>
-                <a:spcPct val="90000"/>
-              </a:lnSpc>
-              <a:spcBef>
-                <a:spcPts val="1000"/>
-              </a:spcBef>
-              <a:spcAft>
-                <a:spcPts val="0"/>
-              </a:spcAft>
-              <a:buClr>
-                <a:srgbClr val="44546A"/>
-              </a:buClr>
-              <a:buSzPts val="1600"/>
-              <a:buFont typeface="Arial"/>
-              <a:buChar char="•"/>
-            </a:pPr>
-            <a:r>
-              <a:rPr sz="1600" b="0">
-                <a:solidFill>
-                  <a:srgbClr val="44546A"/>
-                </a:solidFill>
-                <a:latin typeface="Arial"/>
-              </a:rPr>
-              <a:t>Which clinics and patient groups have the highest DNA (did not attend) rates, and is it changing through the year?</a:t>
-            </a:r>
-          </a:p>
-          <a:p>
-            <a:pPr marL="342900" indent="-342900" algn="l">
-              <a:lnSpc>
-                <a:spcPct val="90000"/>
-              </a:lnSpc>
-              <a:spcBef>
-                <a:spcPts val="1000"/>
-              </a:spcBef>
-              <a:spcAft>
-                <a:spcPts val="0"/>
-              </a:spcAft>
-              <a:buClr>
-                <a:srgbClr val="44546A"/>
-              </a:buClr>
-              <a:buSzPts val="1600"/>
-              <a:buFont typeface="Arial"/>
-              <a:buChar char="•"/>
-            </a:pPr>
-            <a:r>
-              <a:rPr sz="1600" b="0">
-                <a:solidFill>
-                  <a:srgbClr val="44546A"/>
-                </a:solidFill>
-                <a:latin typeface="Arial"/>
-              </a:rPr>
-              <a:t>Synthetic outpatient dataset — 3,000 appointments</a:t>
+              <a:t>Steps</a:t>
+            </a:r>
+          </a:p>
+          <a:p>
+            <a:pPr marL="342900" indent="-342900" algn="l">
+              <a:lnSpc>
+                <a:spcPct val="90000"/>
+              </a:lnSpc>
+              <a:spcBef>
+                <a:spcPts val="1000"/>
+              </a:spcBef>
+              <a:spcAft>
+                <a:spcPts val="0"/>
+              </a:spcAft>
+              <a:buClr>
+                <a:srgbClr val="44546A"/>
+              </a:buClr>
+              <a:buSzPts val="1600"/>
+              <a:buFont typeface="Arial"/>
+              <a:buChar char="•"/>
+            </a:pPr>
+            <a:r>
+              <a:rPr sz="1600" b="0">
+                <a:solidFill>
+                  <a:srgbClr val="44546A"/>
+                </a:solidFill>
+                <a:latin typeface="Arial"/>
+              </a:rPr>
+              <a:t>Open a Codespace and create your own branch</a:t>
+            </a:r>
+          </a:p>
+          <a:p>
+            <a:pPr marL="342900" indent="-342900" algn="l">
+              <a:lnSpc>
+                <a:spcPct val="90000"/>
+              </a:lnSpc>
+              <a:spcBef>
+                <a:spcPts val="1000"/>
+              </a:spcBef>
+              <a:spcAft>
+                <a:spcPts val="0"/>
+              </a:spcAft>
+              <a:buClr>
+                <a:srgbClr val="44546A"/>
+              </a:buClr>
+              <a:buSzPts val="1600"/>
+              <a:buFont typeface="Arial"/>
+              <a:buChar char="•"/>
+            </a:pPr>
+            <a:r>
+              <a:rPr sz="1600" b="0">
+                <a:solidFill>
+                  <a:srgbClr val="44546A"/>
+                </a:solidFill>
+                <a:latin typeface="Arial"/>
+              </a:rPr>
+              <a:t>Ask Copilot to explain the data columns</a:t>
+            </a:r>
+          </a:p>
+          <a:p>
+            <a:pPr marL="342900" indent="-342900" algn="l">
+              <a:lnSpc>
+                <a:spcPct val="90000"/>
+              </a:lnSpc>
+              <a:spcBef>
+                <a:spcPts val="1000"/>
+              </a:spcBef>
+              <a:spcAft>
+                <a:spcPts val="0"/>
+              </a:spcAft>
+              <a:buClr>
+                <a:srgbClr val="44546A"/>
+              </a:buClr>
+              <a:buSzPts val="1600"/>
+              <a:buFont typeface="Arial"/>
+              <a:buChar char="•"/>
+            </a:pPr>
+            <a:r>
+              <a:rPr sz="1600" b="0">
+                <a:solidFill>
+                  <a:srgbClr val="44546A"/>
+                </a:solidFill>
+                <a:latin typeface="Arial"/>
+              </a:rPr>
+              <a:t>Build your track in small steps, reading every suggestion</a:t>
+            </a:r>
+          </a:p>
+          <a:p>
+            <a:pPr marL="342900" indent="-342900" algn="l">
+              <a:lnSpc>
+                <a:spcPct val="90000"/>
+              </a:lnSpc>
+              <a:spcBef>
+                <a:spcPts val="1000"/>
+              </a:spcBef>
+              <a:spcAft>
+                <a:spcPts val="0"/>
+              </a:spcAft>
+              <a:buClr>
+                <a:srgbClr val="44546A"/>
+              </a:buClr>
+              <a:buSzPts val="1600"/>
+              <a:buFont typeface="Arial"/>
+              <a:buChar char="•"/>
+            </a:pPr>
+            <a:r>
+              <a:rPr sz="1600" b="0">
+                <a:solidFill>
+                  <a:srgbClr val="44546A"/>
+                </a:solidFill>
+                <a:latin typeface="Arial"/>
+              </a:rPr>
+              <a:t>Run it — python for Track A, streamlit run for Track B</a:t>
+            </a:r>
+          </a:p>
+          <a:p>
+            <a:pPr marL="342900" indent="-342900" algn="l">
+              <a:lnSpc>
+                <a:spcPct val="90000"/>
+              </a:lnSpc>
+              <a:spcBef>
+                <a:spcPts val="1000"/>
+              </a:spcBef>
+              <a:spcAft>
+                <a:spcPts val="0"/>
+              </a:spcAft>
+              <a:buClr>
+                <a:srgbClr val="44546A"/>
+              </a:buClr>
+              <a:buSzPts val="1600"/>
+              <a:buFont typeface="Arial"/>
+              <a:buChar char="•"/>
+            </a:pPr>
+            <a:r>
+              <a:rPr sz="1600" b="0">
+                <a:solidFill>
+                  <a:srgbClr val="44546A"/>
+                </a:solidFill>
+                <a:latin typeface="Arial"/>
+              </a:rPr>
+              <a:t>Commit, push and open a pull request for a neighbour to review</a:t>
+            </a:r>
+          </a:p>
+          <a:p>
+            <a:pPr marL="342900" indent="-342900" algn="l">
+              <a:lnSpc>
+                <a:spcPct val="90000"/>
+              </a:lnSpc>
+              <a:spcBef>
+                <a:spcPts val="1000"/>
+              </a:spcBef>
+              <a:spcAft>
+                <a:spcPts val="0"/>
+              </a:spcAft>
+              <a:buClr>
+                <a:srgbClr val="44546A"/>
+              </a:buClr>
+              <a:buSzPts val="1600"/>
+              <a:buFont typeface="Arial"/>
+              <a:buChar char="•"/>
+            </a:pPr>
+            <a:r>
+              <a:rPr sz="1600" b="0">
+                <a:solidFill>
+                  <a:srgbClr val="44546A"/>
+                </a:solidFill>
+                <a:latin typeface="Arial"/>
+              </a:rPr>
+              <a:t>Stop your Codespace</a:t>
             </a:r>
           </a:p>
           <a:p>
@@ -26562,115 +26646,13 @@
               <a:buNone/>
             </a:pPr>
             <a:r>
-              <a:rPr sz="1800" b="1">
-                <a:solidFill>
-                  <a:srgbClr val="002060"/>
-                </a:solidFill>
-                <a:latin typeface="Arial"/>
-              </a:rPr>
-              <a:t>Pick one</a:t>
-            </a:r>
-          </a:p>
-          <a:p>
-            <a:pPr marL="342900" indent="-342900" algn="l">
-              <a:lnSpc>
-                <a:spcPct val="90000"/>
-              </a:lnSpc>
-              <a:spcBef>
-                <a:spcPts val="1000"/>
-              </a:spcBef>
-              <a:spcAft>
-                <a:spcPts val="0"/>
-              </a:spcAft>
-              <a:buClr>
-                <a:srgbClr val="44546A"/>
-              </a:buClr>
-              <a:buSzPts val="1600"/>
-              <a:buFont typeface="Arial"/>
-              <a:buChar char="•"/>
-            </a:pPr>
-            <a:r>
-              <a:rPr sz="1600" b="0">
-                <a:solidFill>
-                  <a:srgbClr val="44546A"/>
-                </a:solidFill>
-                <a:latin typeface="Arial"/>
-              </a:rPr>
-              <a:t>Track A — Analysis. Python script that checks the data, calculates DNA rates and saves a chart</a:t>
-            </a:r>
-          </a:p>
-          <a:p>
-            <a:pPr marL="342900" indent="-342900" algn="l">
-              <a:lnSpc>
-                <a:spcPct val="90000"/>
-              </a:lnSpc>
-              <a:spcBef>
-                <a:spcPts val="1000"/>
-              </a:spcBef>
-              <a:spcAft>
-                <a:spcPts val="0"/>
-              </a:spcAft>
-              <a:buClr>
-                <a:srgbClr val="44546A"/>
-              </a:buClr>
-              <a:buSzPts val="1600"/>
-              <a:buFont typeface="Arial"/>
-              <a:buChar char="•"/>
-            </a:pPr>
-            <a:r>
-              <a:rPr sz="1600" b="0">
-                <a:solidFill>
-                  <a:srgbClr val="44546A"/>
-                </a:solidFill>
-                <a:latin typeface="Arial"/>
-              </a:rPr>
-              <a:t>Track B — UI. A Streamlit app with filters, headline numbers and charts</a:t>
-            </a:r>
-          </a:p>
-          <a:p>
-            <a:pPr marL="0" indent="0" algn="l">
-              <a:lnSpc>
-                <a:spcPct val="90000"/>
-              </a:lnSpc>
-              <a:spcBef>
-                <a:spcPts val="1000"/>
-              </a:spcBef>
-              <a:spcAft>
-                <a:spcPts val="0"/>
-              </a:spcAft>
-              <a:buNone/>
-            </a:pPr>
-            <a:r>
-              <a:rPr sz="1600" b="0">
-                <a:solidFill>
-                  <a:srgbClr val="44546A"/>
-                </a:solidFill>
-                <a:latin typeface="Arial"/>
-              </a:rPr>
-              <a:t/>
-            </a:r>
-          </a:p>
-          <a:p>
-            <a:pPr marL="0" indent="0" algn="l">
-              <a:lnSpc>
-                <a:spcPct val="90000"/>
-              </a:lnSpc>
-              <a:spcBef>
-                <a:spcPts val="1000"/>
-              </a:spcBef>
-              <a:spcAft>
-                <a:spcPts val="0"/>
-              </a:spcAft>
-              <a:buNone/>
-            </a:pPr>
-            <a:r>
               <a:rPr sz="1400" b="0">
                 <a:solidFill>
                   <a:srgbClr val="44546A"/>
                 </a:solidFill>
                 <a:latin typeface="Arial"/>
               </a:rPr>
-              <a:t>DNA rate = DNA ÷ (Attended + DNA). Cancelled appointments are excluded.</a:t>
+              <a:t>Full guide: Training/exercises/codespaces-copilot/README.md</a:t>
             </a:r>
           </a:p>
         </p:txBody>
@@ -26715,7 +26697,7 @@
                 </a:solidFill>
                 <a:latin typeface="Arial"/>
               </a:rPr>
-              <a:t>Exercise: Build with Copilot (25 minutes)</a:t>
+              <a:t>Exercise: Review and Share Back</a:t>
             </a:r>
           </a:p>
         </p:txBody>
@@ -26754,175 +26736,119 @@
                 </a:solidFill>
                 <a:latin typeface="Arial"/>
               </a:rPr>
-              <a:t>Steps</a:t>
-            </a:r>
-          </a:p>
-          <a:p>
-            <a:pPr marL="342900" indent="-342900" algn="l">
-              <a:lnSpc>
-                <a:spcPct val="90000"/>
-              </a:lnSpc>
-              <a:spcBef>
-                <a:spcPts val="1000"/>
-              </a:spcBef>
-              <a:spcAft>
-                <a:spcPts val="0"/>
-              </a:spcAft>
-              <a:buClr>
-                <a:srgbClr val="44546A"/>
-              </a:buClr>
-              <a:buSzPts val="1600"/>
-              <a:buFont typeface="Arial"/>
-              <a:buChar char="•"/>
-            </a:pPr>
-            <a:r>
-              <a:rPr sz="1600" b="0">
-                <a:solidFill>
-                  <a:srgbClr val="44546A"/>
-                </a:solidFill>
-                <a:latin typeface="Arial"/>
-              </a:rPr>
-              <a:t>Open a Codespace and create your own branch</a:t>
-            </a:r>
-          </a:p>
-          <a:p>
-            <a:pPr marL="342900" indent="-342900" algn="l">
-              <a:lnSpc>
-                <a:spcPct val="90000"/>
-              </a:lnSpc>
-              <a:spcBef>
-                <a:spcPts val="1000"/>
-              </a:spcBef>
-              <a:spcAft>
-                <a:spcPts val="0"/>
-              </a:spcAft>
-              <a:buClr>
-                <a:srgbClr val="44546A"/>
-              </a:buClr>
-              <a:buSzPts val="1600"/>
-              <a:buFont typeface="Arial"/>
-              <a:buChar char="•"/>
-            </a:pPr>
-            <a:r>
-              <a:rPr sz="1600" b="0">
-                <a:solidFill>
-                  <a:srgbClr val="44546A"/>
-                </a:solidFill>
-                <a:latin typeface="Arial"/>
-              </a:rPr>
-              <a:t>Ask Copilot to explain the data columns</a:t>
-            </a:r>
-          </a:p>
-          <a:p>
-            <a:pPr marL="342900" indent="-342900" algn="l">
-              <a:lnSpc>
-                <a:spcPct val="90000"/>
-              </a:lnSpc>
-              <a:spcBef>
-                <a:spcPts val="1000"/>
-              </a:spcBef>
-              <a:spcAft>
-                <a:spcPts val="0"/>
-              </a:spcAft>
-              <a:buClr>
-                <a:srgbClr val="44546A"/>
-              </a:buClr>
-              <a:buSzPts val="1600"/>
-              <a:buFont typeface="Arial"/>
-              <a:buChar char="•"/>
-            </a:pPr>
-            <a:r>
-              <a:rPr sz="1600" b="0">
-                <a:solidFill>
-                  <a:srgbClr val="44546A"/>
-                </a:solidFill>
-                <a:latin typeface="Arial"/>
-              </a:rPr>
-              <a:t>Build your track in small steps, reading every suggestion</a:t>
-            </a:r>
-          </a:p>
-          <a:p>
-            <a:pPr marL="342900" indent="-342900" algn="l">
-              <a:lnSpc>
-                <a:spcPct val="90000"/>
-              </a:lnSpc>
-              <a:spcBef>
-                <a:spcPts val="1000"/>
-              </a:spcBef>
-              <a:spcAft>
-                <a:spcPts val="0"/>
-              </a:spcAft>
-              <a:buClr>
-                <a:srgbClr val="44546A"/>
-              </a:buClr>
-              <a:buSzPts val="1600"/>
-              <a:buFont typeface="Arial"/>
-              <a:buChar char="•"/>
-            </a:pPr>
-            <a:r>
-              <a:rPr sz="1600" b="0">
-                <a:solidFill>
-                  <a:srgbClr val="44546A"/>
-                </a:solidFill>
-                <a:latin typeface="Arial"/>
-              </a:rPr>
-              <a:t>Run it — python for Track A, streamlit run for Track B</a:t>
-            </a:r>
-          </a:p>
-          <a:p>
-            <a:pPr marL="342900" indent="-342900" algn="l">
-              <a:lnSpc>
-                <a:spcPct val="90000"/>
-              </a:lnSpc>
-              <a:spcBef>
-                <a:spcPts val="1000"/>
-              </a:spcBef>
-              <a:spcAft>
-                <a:spcPts val="0"/>
-              </a:spcAft>
-              <a:buClr>
-                <a:srgbClr val="44546A"/>
-              </a:buClr>
-              <a:buSzPts val="1600"/>
-              <a:buFont typeface="Arial"/>
-              <a:buChar char="•"/>
-            </a:pPr>
-            <a:r>
-              <a:rPr sz="1600" b="0">
-                <a:solidFill>
-                  <a:srgbClr val="44546A"/>
-                </a:solidFill>
-                <a:latin typeface="Arial"/>
-              </a:rPr>
-              <a:t>Commit, push and open a pull request for a neighbour to review</a:t>
-            </a:r>
-          </a:p>
-          <a:p>
-            <a:pPr marL="342900" indent="-342900" algn="l">
-              <a:lnSpc>
-                <a:spcPct val="90000"/>
-              </a:lnSpc>
-              <a:spcBef>
-                <a:spcPts val="1000"/>
-              </a:spcBef>
-              <a:spcAft>
-                <a:spcPts val="0"/>
-              </a:spcAft>
-              <a:buClr>
-                <a:srgbClr val="44546A"/>
-              </a:buClr>
-              <a:buSzPts val="1600"/>
-              <a:buFont typeface="Arial"/>
-              <a:buChar char="•"/>
-            </a:pPr>
-            <a:r>
-              <a:rPr sz="1600" b="0">
-                <a:solidFill>
-                  <a:srgbClr val="44546A"/>
-                </a:solidFill>
-                <a:latin typeface="Arial"/>
-              </a:rPr>
-              <a:t>Stop your Codespace</a:t>
+              <a:t>Check Copilot's work</a:t>
+            </a:r>
+          </a:p>
+          <a:p>
+            <a:pPr marL="342900" indent="-342900" algn="l">
+              <a:lnSpc>
+                <a:spcPct val="90000"/>
+              </a:lnSpc>
+              <a:spcBef>
+                <a:spcPts val="1000"/>
+              </a:spcBef>
+              <a:spcAft>
+                <a:spcPts val="0"/>
+              </a:spcAft>
+              <a:buClr>
+                <a:srgbClr val="44546A"/>
+              </a:buClr>
+              <a:buSzPts val="1600"/>
+              <a:buFont typeface="Arial"/>
+              <a:buChar char="•"/>
+            </a:pPr>
+            <a:r>
+              <a:rPr sz="1600" b="0">
+                <a:solidFill>
+                  <a:srgbClr val="44546A"/>
+                </a:solidFill>
+                <a:latin typeface="Arial"/>
+              </a:rPr>
+              <a:t>Does the DNA rate exclude cancelled appointments?</a:t>
+            </a:r>
+          </a:p>
+          <a:p>
+            <a:pPr marL="342900" indent="-342900" algn="l">
+              <a:lnSpc>
+                <a:spcPct val="90000"/>
+              </a:lnSpc>
+              <a:spcBef>
+                <a:spcPts val="1000"/>
+              </a:spcBef>
+              <a:spcAft>
+                <a:spcPts val="0"/>
+              </a:spcAft>
+              <a:buClr>
+                <a:srgbClr val="44546A"/>
+              </a:buClr>
+              <a:buSzPts val="1600"/>
+              <a:buFont typeface="Arial"/>
+              <a:buChar char="•"/>
+            </a:pPr>
+            <a:r>
+              <a:rPr sz="1600" b="0">
+                <a:solidFill>
+                  <a:srgbClr val="44546A"/>
+                </a:solidFill>
+                <a:latin typeface="Arial"/>
+              </a:rPr>
+              <a:t>Do the totals add up to 3,000 appointments?</a:t>
+            </a:r>
+          </a:p>
+          <a:p>
+            <a:pPr marL="342900" indent="-342900" algn="l">
+              <a:lnSpc>
+                <a:spcPct val="90000"/>
+              </a:lnSpc>
+              <a:spcBef>
+                <a:spcPts val="1000"/>
+              </a:spcBef>
+              <a:spcAft>
+                <a:spcPts val="0"/>
+              </a:spcAft>
+              <a:buClr>
+                <a:srgbClr val="44546A"/>
+              </a:buClr>
+              <a:buSzPts val="1600"/>
+              <a:buFont typeface="Arial"/>
+              <a:buChar char="•"/>
+            </a:pPr>
+            <a:r>
+              <a:rPr sz="1600" b="0">
+                <a:solidFill>
+                  <a:srgbClr val="44546A"/>
+                </a:solidFill>
+                <a:latin typeface="Arial"/>
+              </a:rPr>
+              <a:t>Any invented columns or functions? Does it run?</a:t>
+            </a:r>
+          </a:p>
+          <a:p>
+            <a:pPr marL="342900" indent="-342900" algn="l">
+              <a:lnSpc>
+                <a:spcPct val="90000"/>
+              </a:lnSpc>
+              <a:spcBef>
+                <a:spcPts val="1000"/>
+              </a:spcBef>
+              <a:spcAft>
+                <a:spcPts val="0"/>
+              </a:spcAft>
+              <a:buClr>
+                <a:srgbClr val="44546A"/>
+              </a:buClr>
+              <a:buSzPts val="1600"/>
+              <a:buFont typeface="Arial"/>
+              <a:buChar char="•"/>
+            </a:pPr>
+            <a:r>
+              <a:rPr sz="1600" b="0">
+                <a:solidFill>
+                  <a:srgbClr val="44546A"/>
+                </a:solidFill>
+                <a:latin typeface="Arial"/>
+              </a:rPr>
+              <a:t>Could you explain every line to a colleague?</a:t>
             </a:r>
           </a:p>
           <a:p>
@@ -26962,13 +26888,97 @@
               <a:buNone/>
             </a:pPr>
             <a:r>
-              <a:rPr sz="1400" b="0">
-                <a:solidFill>
-                  <a:srgbClr val="44546A"/>
-                </a:solidFill>
-                <a:latin typeface="Arial"/>
-              </a:rPr>
-              <a:t>Full guide: Training/exercises/codespaces-copilot/README.md</a:t>
+              <a:rPr sz="1800" b="1">
+                <a:solidFill>
+                  <a:srgbClr val="002060"/>
+                </a:solidFill>
+                <a:latin typeface="Arial"/>
+              </a:rPr>
+              <a:t>Share back</a:t>
+            </a:r>
+          </a:p>
+          <a:p>
+            <a:pPr marL="342900" indent="-342900" algn="l">
+              <a:lnSpc>
+                <a:spcPct val="90000"/>
+              </a:lnSpc>
+              <a:spcBef>
+                <a:spcPts val="1000"/>
+              </a:spcBef>
+              <a:spcAft>
+                <a:spcPts val="0"/>
+              </a:spcAft>
+              <a:buClr>
+                <a:srgbClr val="44546A"/>
+              </a:buClr>
+              <a:buSzPts val="1600"/>
+              <a:buFont typeface="Arial"/>
+              <a:buChar char="•"/>
+            </a:pPr>
+            <a:r>
+              <a:rPr sz="1600" b="0">
+                <a:solidFill>
+                  <a:srgbClr val="44546A"/>
+                </a:solidFill>
+                <a:latin typeface="Arial"/>
+              </a:rPr>
+              <a:t>Track chosen, and one thing Copilot did well</a:t>
+            </a:r>
+          </a:p>
+          <a:p>
+            <a:pPr marL="342900" indent="-342900" algn="l">
+              <a:lnSpc>
+                <a:spcPct val="90000"/>
+              </a:lnSpc>
+              <a:spcBef>
+                <a:spcPts val="1000"/>
+              </a:spcBef>
+              <a:spcAft>
+                <a:spcPts val="0"/>
+              </a:spcAft>
+              <a:buClr>
+                <a:srgbClr val="44546A"/>
+              </a:buClr>
+              <a:buSzPts val="1600"/>
+              <a:buFont typeface="Arial"/>
+              <a:buChar char="•"/>
+            </a:pPr>
+            <a:r>
+              <a:rPr sz="1600" b="0">
+                <a:solidFill>
+                  <a:srgbClr val="44546A"/>
+                </a:solidFill>
+                <a:latin typeface="Arial"/>
+              </a:rPr>
+              <a:t>One thing Copilot got wrong or you had to fix</a:t>
+            </a:r>
+          </a:p>
+          <a:p>
+            <a:pPr marL="342900" indent="-342900" algn="l">
+              <a:lnSpc>
+                <a:spcPct val="90000"/>
+              </a:lnSpc>
+              <a:spcBef>
+                <a:spcPts val="1000"/>
+              </a:spcBef>
+              <a:spcAft>
+                <a:spcPts val="0"/>
+              </a:spcAft>
+              <a:buClr>
+                <a:srgbClr val="44546A"/>
+              </a:buClr>
+              <a:buSzPts val="1600"/>
+              <a:buFont typeface="Arial"/>
+              <a:buChar char="•"/>
+            </a:pPr>
+            <a:r>
+              <a:rPr sz="1600" b="0">
+                <a:solidFill>
+                  <a:srgbClr val="44546A"/>
+                </a:solidFill>
+                <a:latin typeface="Arial"/>
+              </a:rPr>
+              <a:t>Would you use this at work?</a:t>
             </a:r>
           </a:p>
         </p:txBody>
@@ -26982,332 +26992,6 @@
 </file>
 
 <file path=ppt/slides/slide67.xml><?xml version="1.0" encoding="utf-8"?>
-<p:sld xmlns:a="http://schemas.openxmlformats.org/drawingml/2006/main" xmlns:p="http://schemas.openxmlformats.org/presentationml/2006/main" xmlns:r="http://schemas.openxmlformats.org/officeDocument/2006/relationships">
-  <p:cSld>
-    <p:spTree>
-      <p:nvGrpSpPr>
-        <p:cNvPr id="1" name=""/>
-        <p:cNvGrpSpPr/>
-        <p:nvPr/>
-      </p:nvGrpSpPr>
-      <p:grpSpPr/>
-      <p:sp>
-        <p:nvSpPr>
-          <p:cNvPr id="2" name="Title 1"/>
-          <p:cNvSpPr>
-            <a:spLocks noGrp="1"/>
-          </p:cNvSpPr>
-          <p:nvPr>
-            <p:ph type="title"/>
-          </p:nvPr>
-        </p:nvSpPr>
-        <p:spPr/>
-        <p:txBody>
-          <a:bodyPr/>
-          <a:lstStyle/>
-          <a:p>
-            <a:r>
-              <a:rPr sz="2800" b="1">
-                <a:solidFill>
-                  <a:srgbClr val="002060"/>
-                </a:solidFill>
-                <a:latin typeface="Arial"/>
-              </a:rPr>
-              <a:t>Exercise: Review and Share Back</a:t>
-            </a:r>
-          </a:p>
-        </p:txBody>
-      </p:sp>
-      <p:sp>
-        <p:nvSpPr>
-          <p:cNvPr id="3" name="Text Placeholder 2"/>
-          <p:cNvSpPr>
-            <a:spLocks noGrp="1"/>
-          </p:cNvSpPr>
-          <p:nvPr>
-            <p:ph type="body" idx="1"/>
-          </p:nvPr>
-        </p:nvSpPr>
-        <p:spPr/>
-        <p:txBody>
-          <a:bodyPr/>
-          <a:lstStyle/>
-          <a:p>
-            <a:pPr marL="0" indent="0" algn="l">
-              <a:lnSpc>
-                <a:spcPct val="90000"/>
-              </a:lnSpc>
-              <a:spcBef>
-                <a:spcPts val="0"/>
-              </a:spcBef>
-              <a:spcAft>
-                <a:spcPts val="0"/>
-              </a:spcAft>
-              <a:buNone/>
-            </a:pPr>
-            <a:r>
-              <a:rPr sz="1800" b="1">
-                <a:solidFill>
-                  <a:srgbClr val="002060"/>
-                </a:solidFill>
-                <a:latin typeface="Arial"/>
-              </a:rPr>
-              <a:t>Check Copilot's work</a:t>
-            </a:r>
-          </a:p>
-          <a:p>
-            <a:pPr marL="342900" indent="-342900" algn="l">
-              <a:lnSpc>
-                <a:spcPct val="90000"/>
-              </a:lnSpc>
-              <a:spcBef>
-                <a:spcPts val="1000"/>
-              </a:spcBef>
-              <a:spcAft>
-                <a:spcPts val="0"/>
-              </a:spcAft>
-              <a:buClr>
-                <a:srgbClr val="44546A"/>
-              </a:buClr>
-              <a:buSzPts val="1600"/>
-              <a:buFont typeface="Arial"/>
-              <a:buChar char="•"/>
-            </a:pPr>
-            <a:r>
-              <a:rPr sz="1600" b="0">
-                <a:solidFill>
-                  <a:srgbClr val="44546A"/>
-                </a:solidFill>
-                <a:latin typeface="Arial"/>
-              </a:rPr>
-              <a:t>Does the DNA rate exclude cancelled appointments?</a:t>
-            </a:r>
-          </a:p>
-          <a:p>
-            <a:pPr marL="342900" indent="-342900" algn="l">
-              <a:lnSpc>
-                <a:spcPct val="90000"/>
-              </a:lnSpc>
-              <a:spcBef>
-                <a:spcPts val="1000"/>
-              </a:spcBef>
-              <a:spcAft>
-                <a:spcPts val="0"/>
-              </a:spcAft>
-              <a:buClr>
-                <a:srgbClr val="44546A"/>
-              </a:buClr>
-              <a:buSzPts val="1600"/>
-              <a:buFont typeface="Arial"/>
-              <a:buChar char="•"/>
-            </a:pPr>
-            <a:r>
-              <a:rPr sz="1600" b="0">
-                <a:solidFill>
-                  <a:srgbClr val="44546A"/>
-                </a:solidFill>
-                <a:latin typeface="Arial"/>
-              </a:rPr>
-              <a:t>Do the totals add up to 3,000 appointments?</a:t>
-            </a:r>
-          </a:p>
-          <a:p>
-            <a:pPr marL="342900" indent="-342900" algn="l">
-              <a:lnSpc>
-                <a:spcPct val="90000"/>
-              </a:lnSpc>
-              <a:spcBef>
-                <a:spcPts val="1000"/>
-              </a:spcBef>
-              <a:spcAft>
-                <a:spcPts val="0"/>
-              </a:spcAft>
-              <a:buClr>
-                <a:srgbClr val="44546A"/>
-              </a:buClr>
-              <a:buSzPts val="1600"/>
-              <a:buFont typeface="Arial"/>
-              <a:buChar char="•"/>
-            </a:pPr>
-            <a:r>
-              <a:rPr sz="1600" b="0">
-                <a:solidFill>
-                  <a:srgbClr val="44546A"/>
-                </a:solidFill>
-                <a:latin typeface="Arial"/>
-              </a:rPr>
-              <a:t>Any invented columns or functions? Does it run?</a:t>
-            </a:r>
-          </a:p>
-          <a:p>
-            <a:pPr marL="342900" indent="-342900" algn="l">
-              <a:lnSpc>
-                <a:spcPct val="90000"/>
-              </a:lnSpc>
-              <a:spcBef>
-                <a:spcPts val="1000"/>
-              </a:spcBef>
-              <a:spcAft>
-                <a:spcPts val="0"/>
-              </a:spcAft>
-              <a:buClr>
-                <a:srgbClr val="44546A"/>
-              </a:buClr>
-              <a:buSzPts val="1600"/>
-              <a:buFont typeface="Arial"/>
-              <a:buChar char="•"/>
-            </a:pPr>
-            <a:r>
-              <a:rPr sz="1600" b="0">
-                <a:solidFill>
-                  <a:srgbClr val="44546A"/>
-                </a:solidFill>
-                <a:latin typeface="Arial"/>
-              </a:rPr>
-              <a:t>Could you explain every line to a colleague?</a:t>
-            </a:r>
-          </a:p>
-          <a:p>
-            <a:pPr marL="0" indent="0" algn="l">
-              <a:lnSpc>
-                <a:spcPct val="90000"/>
-              </a:lnSpc>
-              <a:spcBef>
-                <a:spcPts val="1000"/>
-              </a:spcBef>
-              <a:spcAft>
-                <a:spcPts val="0"/>
-              </a:spcAft>
-              <a:buNone/>
-            </a:pPr>
-            <a:r>
-              <a:rPr sz="1600" b="0">
-                <a:solidFill>
-                  <a:srgbClr val="44546A"/>
-                </a:solidFill>
-                <a:latin typeface="Arial"/>
-              </a:rPr>
-              <a:t/>
-            </a:r>
-          </a:p>
-          <a:p>
-            <a:pPr marL="0" indent="0" algn="l">
-              <a:lnSpc>
-                <a:spcPct val="90000"/>
-              </a:lnSpc>
-              <a:spcBef>
-                <a:spcPts val="1000"/>
-              </a:spcBef>
-              <a:spcAft>
-                <a:spcPts val="0"/>
-              </a:spcAft>
-              <a:buNone/>
-            </a:pPr>
-            <a:r>
-              <a:rPr sz="1800" b="1">
-                <a:solidFill>
-                  <a:srgbClr val="002060"/>
-                </a:solidFill>
-                <a:latin typeface="Arial"/>
-              </a:rPr>
-              <a:t>Share back</a:t>
-            </a:r>
-          </a:p>
-          <a:p>
-            <a:pPr marL="342900" indent="-342900" algn="l">
-              <a:lnSpc>
-                <a:spcPct val="90000"/>
-              </a:lnSpc>
-              <a:spcBef>
-                <a:spcPts val="1000"/>
-              </a:spcBef>
-              <a:spcAft>
-                <a:spcPts val="0"/>
-              </a:spcAft>
-              <a:buClr>
-                <a:srgbClr val="44546A"/>
-              </a:buClr>
-              <a:buSzPts val="1600"/>
-              <a:buFont typeface="Arial"/>
-              <a:buChar char="•"/>
-            </a:pPr>
-            <a:r>
-              <a:rPr sz="1600" b="0">
-                <a:solidFill>
-                  <a:srgbClr val="44546A"/>
-                </a:solidFill>
-                <a:latin typeface="Arial"/>
-              </a:rPr>
-              <a:t>Track chosen, and one thing Copilot did well</a:t>
-            </a:r>
-          </a:p>
-          <a:p>
-            <a:pPr marL="342900" indent="-342900" algn="l">
-              <a:lnSpc>
-                <a:spcPct val="90000"/>
-              </a:lnSpc>
-              <a:spcBef>
-                <a:spcPts val="1000"/>
-              </a:spcBef>
-              <a:spcAft>
-                <a:spcPts val="0"/>
-              </a:spcAft>
-              <a:buClr>
-                <a:srgbClr val="44546A"/>
-              </a:buClr>
-              <a:buSzPts val="1600"/>
-              <a:buFont typeface="Arial"/>
-              <a:buChar char="•"/>
-            </a:pPr>
-            <a:r>
-              <a:rPr sz="1600" b="0">
-                <a:solidFill>
-                  <a:srgbClr val="44546A"/>
-                </a:solidFill>
-                <a:latin typeface="Arial"/>
-              </a:rPr>
-              <a:t>One thing Copilot got wrong or you had to fix</a:t>
-            </a:r>
-          </a:p>
-          <a:p>
-            <a:pPr marL="342900" indent="-342900" algn="l">
-              <a:lnSpc>
-                <a:spcPct val="90000"/>
-              </a:lnSpc>
-              <a:spcBef>
-                <a:spcPts val="1000"/>
-              </a:spcBef>
-              <a:spcAft>
-                <a:spcPts val="0"/>
-              </a:spcAft>
-              <a:buClr>
-                <a:srgbClr val="44546A"/>
-              </a:buClr>
-              <a:buSzPts val="1600"/>
-              <a:buFont typeface="Arial"/>
-              <a:buChar char="•"/>
-            </a:pPr>
-            <a:r>
-              <a:rPr sz="1600" b="0">
-                <a:solidFill>
-                  <a:srgbClr val="44546A"/>
-                </a:solidFill>
-                <a:latin typeface="Arial"/>
-              </a:rPr>
-              <a:t>Would you use this at work?</a:t>
-            </a:r>
-          </a:p>
-        </p:txBody>
-      </p:sp>
-    </p:spTree>
-  </p:cSld>
-  <p:clrMapOvr>
-    <a:masterClrMapping/>
-  </p:clrMapOvr>
-</p:sld>
-</file>
-
-<file path=ppt/slides/slide68.xml><?xml version="1.0" encoding="utf-8"?>
 <p:sld xmlns:a="http://schemas.openxmlformats.org/drawingml/2006/main" xmlns:p="http://schemas.openxmlformats.org/presentationml/2006/main" xmlns:r="http://schemas.openxmlformats.org/officeDocument/2006/relationships">
   <p:cSld>
     <p:spTree>
@@ -27652,6 +27336,276 @@
 </p:sld>
 </file>
 
+<file path=ppt/slides/slide68.xml><?xml version="1.0" encoding="utf-8"?>
+<p:sld xmlns:a="http://schemas.openxmlformats.org/drawingml/2006/main" xmlns:p="http://schemas.openxmlformats.org/presentationml/2006/main" xmlns:r="http://schemas.openxmlformats.org/officeDocument/2006/relationships">
+  <p:cSld>
+    <p:spTree>
+      <p:nvGrpSpPr>
+        <p:cNvPr id="1" name=""/>
+        <p:cNvGrpSpPr/>
+        <p:nvPr/>
+      </p:nvGrpSpPr>
+      <p:grpSpPr/>
+      <p:sp>
+        <p:nvSpPr>
+          <p:cNvPr id="2" name="Title 1"/>
+          <p:cNvSpPr>
+            <a:spLocks noGrp="1"/>
+          </p:cNvSpPr>
+          <p:nvPr>
+            <p:ph type="title"/>
+          </p:nvPr>
+        </p:nvSpPr>
+        <p:spPr/>
+        <p:txBody>
+          <a:bodyPr/>
+          <a:lstStyle/>
+          <a:p>
+            <a:r>
+              <a:rPr sz="2800" b="1">
+                <a:solidFill>
+                  <a:srgbClr val="002060"/>
+                </a:solidFill>
+                <a:latin typeface="Arial"/>
+              </a:rPr>
+              <a:t>Your Area: Checkpoint 8</a:t>
+            </a:r>
+          </a:p>
+        </p:txBody>
+      </p:sp>
+      <p:sp>
+        <p:nvSpPr>
+          <p:cNvPr id="3" name="Text Placeholder 2"/>
+          <p:cNvSpPr>
+            <a:spLocks noGrp="1"/>
+          </p:cNvSpPr>
+          <p:nvPr>
+            <p:ph type="body" idx="1"/>
+          </p:nvPr>
+        </p:nvSpPr>
+        <p:spPr/>
+        <p:txBody>
+          <a:bodyPr/>
+          <a:lstStyle/>
+          <a:p>
+            <a:pPr marL="0" indent="0" algn="l">
+              <a:lnSpc>
+                <a:spcPct val="90000"/>
+              </a:lnSpc>
+              <a:spcBef>
+                <a:spcPts val="0"/>
+              </a:spcBef>
+              <a:spcAft>
+                <a:spcPts val="0"/>
+              </a:spcAft>
+              <a:buNone/>
+            </a:pPr>
+            <a:r>
+              <a:rPr sz="1800" b="1">
+                <a:solidFill>
+                  <a:srgbClr val="002060"/>
+                </a:solidFill>
+                <a:latin typeface="Arial"/>
+              </a:rPr>
+              <a:t>Do the exercise in your own folder (25 minutes)</a:t>
+            </a:r>
+          </a:p>
+          <a:p>
+            <a:pPr marL="342900" indent="-342900" algn="l">
+              <a:lnSpc>
+                <a:spcPct val="90000"/>
+              </a:lnSpc>
+              <a:spcBef>
+                <a:spcPts val="1000"/>
+              </a:spcBef>
+              <a:spcAft>
+                <a:spcPts val="0"/>
+              </a:spcAft>
+              <a:buClr>
+                <a:srgbClr val="44546A"/>
+              </a:buClr>
+              <a:buSzPts val="1600"/>
+              <a:buFont typeface="Arial"/>
+              <a:buChar char="•"/>
+            </a:pPr>
+            <a:r>
+              <a:rPr sz="1600" b="0">
+                <a:solidFill>
+                  <a:srgbClr val="44546A"/>
+                </a:solidFill>
+                <a:latin typeface="Arial"/>
+              </a:rPr>
+              <a:t>Open a Codespace on your branch training/&lt;your-folder&gt;</a:t>
+            </a:r>
+          </a:p>
+          <a:p>
+            <a:pPr marL="342900" indent="-342900" algn="l">
+              <a:lnSpc>
+                <a:spcPct val="90000"/>
+              </a:lnSpc>
+              <a:spcBef>
+                <a:spcPts val="1000"/>
+              </a:spcBef>
+              <a:spcAft>
+                <a:spcPts val="0"/>
+              </a:spcAft>
+              <a:buClr>
+                <a:srgbClr val="44546A"/>
+              </a:buClr>
+              <a:buSzPts val="1600"/>
+              <a:buFont typeface="Arial"/>
+              <a:buChar char="•"/>
+            </a:pPr>
+            <a:r>
+              <a:rPr sz="1600" b="0">
+                <a:solidFill>
+                  <a:srgbClr val="44546A"/>
+                </a:solidFill>
+                <a:latin typeface="Arial"/>
+              </a:rPr>
+              <a:t>Create participants/&lt;your-folder&gt;/dna-analysis and work there</a:t>
+            </a:r>
+          </a:p>
+          <a:p>
+            <a:pPr marL="342900" indent="-342900" algn="l">
+              <a:lnSpc>
+                <a:spcPct val="90000"/>
+              </a:lnSpc>
+              <a:spcBef>
+                <a:spcPts val="1000"/>
+              </a:spcBef>
+              <a:spcAft>
+                <a:spcPts val="0"/>
+              </a:spcAft>
+              <a:buClr>
+                <a:srgbClr val="44546A"/>
+              </a:buClr>
+              <a:buSzPts val="1600"/>
+              <a:buFont typeface="Arial"/>
+              <a:buChar char="•"/>
+            </a:pPr>
+            <a:r>
+              <a:rPr sz="1600" b="0">
+                <a:solidFill>
+                  <a:srgbClr val="44546A"/>
+                </a:solidFill>
+                <a:latin typeface="Arial"/>
+              </a:rPr>
+              <a:t>Commit at least twice with clear messages</a:t>
+            </a:r>
+          </a:p>
+          <a:p>
+            <a:pPr marL="342900" indent="-342900" algn="l">
+              <a:lnSpc>
+                <a:spcPct val="90000"/>
+              </a:lnSpc>
+              <a:spcBef>
+                <a:spcPts val="1000"/>
+              </a:spcBef>
+              <a:spcAft>
+                <a:spcPts val="0"/>
+              </a:spcAft>
+              <a:buClr>
+                <a:srgbClr val="44546A"/>
+              </a:buClr>
+              <a:buSzPts val="1600"/>
+              <a:buFont typeface="Arial"/>
+              <a:buChar char="•"/>
+            </a:pPr>
+            <a:r>
+              <a:rPr sz="1600" b="0">
+                <a:solidFill>
+                  <a:srgbClr val="44546A"/>
+                </a:solidFill>
+                <a:latin typeface="Arial"/>
+              </a:rPr>
+              <a:t>Push when you have worked through the review checklist</a:t>
+            </a:r>
+          </a:p>
+          <a:p>
+            <a:pPr marL="0" indent="0" algn="l">
+              <a:lnSpc>
+                <a:spcPct val="90000"/>
+              </a:lnSpc>
+              <a:spcBef>
+                <a:spcPts val="1000"/>
+              </a:spcBef>
+              <a:spcAft>
+                <a:spcPts val="0"/>
+              </a:spcAft>
+              <a:buNone/>
+            </a:pPr>
+            <a:r>
+              <a:rPr sz="1600" b="0">
+                <a:solidFill>
+                  <a:srgbClr val="44546A"/>
+                </a:solidFill>
+                <a:latin typeface="Arial"/>
+              </a:rPr>
+              <a:t/>
+            </a:r>
+          </a:p>
+          <a:p>
+            <a:pPr marL="0" indent="0" algn="l">
+              <a:lnSpc>
+                <a:spcPct val="90000"/>
+              </a:lnSpc>
+              <a:spcBef>
+                <a:spcPts val="1000"/>
+              </a:spcBef>
+              <a:spcAft>
+                <a:spcPts val="0"/>
+              </a:spcAft>
+              <a:buNone/>
+            </a:pPr>
+            <a:r>
+              <a:rPr sz="1800" b="1">
+                <a:solidFill>
+                  <a:srgbClr val="002060"/>
+                </a:solidFill>
+                <a:latin typeface="Arial"/>
+              </a:rPr>
+              <a:t>Your folder now contains</a:t>
+            </a:r>
+          </a:p>
+          <a:p>
+            <a:pPr marL="342900" indent="-342900" algn="l">
+              <a:lnSpc>
+                <a:spcPct val="90000"/>
+              </a:lnSpc>
+              <a:spcBef>
+                <a:spcPts val="1000"/>
+              </a:spcBef>
+              <a:spcAft>
+                <a:spcPts val="0"/>
+              </a:spcAft>
+              <a:buClr>
+                <a:srgbClr val="44546A"/>
+              </a:buClr>
+              <a:buSzPts val="1600"/>
+              <a:buFont typeface="Arial"/>
+              <a:buChar char="•"/>
+            </a:pPr>
+            <a:r>
+              <a:rPr sz="1600" b="0">
+                <a:solidFill>
+                  <a:srgbClr val="44546A"/>
+                </a:solidFill>
+                <a:latin typeface="Arial"/>
+              </a:rPr>
+              <a:t>dna-analysis with your code, a short README and a note of the Copilot prompts you used</a:t>
+            </a:r>
+          </a:p>
+        </p:txBody>
+      </p:sp>
+    </p:spTree>
+  </p:cSld>
+  <p:clrMapOvr>
+    <a:masterClrMapping/>
+  </p:clrMapOvr>
+</p:sld>
+</file>
+
 <file path=ppt/slides/slide69.xml><?xml version="1.0" encoding="utf-8"?>
 <p:sld xmlns:a="http://schemas.openxmlformats.org/drawingml/2006/main" xmlns:p="http://schemas.openxmlformats.org/presentationml/2006/main" xmlns:r="http://schemas.openxmlformats.org/officeDocument/2006/relationships">
   <p:cSld>
@@ -27677,14 +27631,17 @@
           <a:bodyPr/>
           <a:lstStyle/>
           <a:p>
-            <a:r>
-              <a:rPr sz="2800" b="1">
-                <a:solidFill>
-                  <a:srgbClr val="002060"/>
-                </a:solidFill>
-                <a:latin typeface="Arial"/>
-              </a:rPr>
-              <a:t>Your Area: Checkpoint 8</a:t>
+            <a:pPr marL="0" indent="0" algn="l">
+              <a:buNone/>
+            </a:pPr>
+            <a:r>
+              <a:rPr sz="3600" b="1">
+                <a:solidFill>
+                  <a:srgbClr val="FFFFFF"/>
+                </a:solidFill>
+                <a:latin typeface="Arial"/>
+              </a:rPr>
+              <a:t>Group Exercises and Consolidation</a:t>
             </a:r>
           </a:p>
         </p:txBody>
@@ -27705,211 +27662,16 @@
           <a:lstStyle/>
           <a:p>
             <a:pPr marL="0" indent="0" algn="l">
-              <a:lnSpc>
-                <a:spcPct val="90000"/>
-              </a:lnSpc>
-              <a:spcBef>
-                <a:spcPts val="0"/>
-              </a:spcBef>
-              <a:spcAft>
-                <a:spcPts val="0"/>
-              </a:spcAft>
-              <a:buNone/>
-            </a:pPr>
-            <a:r>
-              <a:rPr sz="1800" b="1">
-                <a:solidFill>
-                  <a:srgbClr val="002060"/>
-                </a:solidFill>
-                <a:latin typeface="Arial"/>
-              </a:rPr>
-              <a:t>Do the exercise in your own folder (25 minutes)</a:t>
-            </a:r>
-          </a:p>
-          <a:p>
-            <a:pPr marL="342900" indent="-342900" algn="l">
-              <a:lnSpc>
-                <a:spcPct val="90000"/>
-              </a:lnSpc>
-              <a:spcBef>
-                <a:spcPts val="1000"/>
-              </a:spcBef>
-              <a:spcAft>
-                <a:spcPts val="0"/>
-              </a:spcAft>
-              <a:buClr>
-                <a:srgbClr val="44546A"/>
-              </a:buClr>
-              <a:buSzPts val="1600"/>
-              <a:buFont typeface="Arial"/>
-              <a:buChar char="•"/>
-            </a:pPr>
-            <a:r>
-              <a:rPr sz="1600" b="0">
-                <a:solidFill>
-                  <a:srgbClr val="44546A"/>
-                </a:solidFill>
-                <a:latin typeface="Arial"/>
-              </a:rPr>
-              <a:t>Open a Codespace on your branch training/&lt;your-folder&gt;</a:t>
-            </a:r>
-          </a:p>
-          <a:p>
-            <a:pPr marL="342900" indent="-342900" algn="l">
-              <a:lnSpc>
-                <a:spcPct val="90000"/>
-              </a:lnSpc>
-              <a:spcBef>
-                <a:spcPts val="1000"/>
-              </a:spcBef>
-              <a:spcAft>
-                <a:spcPts val="0"/>
-              </a:spcAft>
-              <a:buClr>
-                <a:srgbClr val="44546A"/>
-              </a:buClr>
-              <a:buSzPts val="1600"/>
-              <a:buFont typeface="Arial"/>
-              <a:buChar char="•"/>
-            </a:pPr>
-            <a:r>
-              <a:rPr sz="1600" b="0">
-                <a:solidFill>
-                  <a:srgbClr val="44546A"/>
-                </a:solidFill>
-                <a:latin typeface="Arial"/>
-              </a:rPr>
-              <a:t>Create participants/&lt;your-folder&gt;/dna-analysis and work there</a:t>
-            </a:r>
-          </a:p>
-          <a:p>
-            <a:pPr marL="342900" indent="-342900" algn="l">
-              <a:lnSpc>
-                <a:spcPct val="90000"/>
-              </a:lnSpc>
-              <a:spcBef>
-                <a:spcPts val="1000"/>
-              </a:spcBef>
-              <a:spcAft>
-                <a:spcPts val="0"/>
-              </a:spcAft>
-              <a:buClr>
-                <a:srgbClr val="44546A"/>
-              </a:buClr>
-              <a:buSzPts val="1600"/>
-              <a:buFont typeface="Arial"/>
-              <a:buChar char="•"/>
-            </a:pPr>
-            <a:r>
-              <a:rPr sz="1600" b="0">
-                <a:solidFill>
-                  <a:srgbClr val="44546A"/>
-                </a:solidFill>
-                <a:latin typeface="Arial"/>
-              </a:rPr>
-              <a:t>Commit at least twice with clear messages</a:t>
-            </a:r>
-          </a:p>
-          <a:p>
-            <a:pPr marL="342900" indent="-342900" algn="l">
-              <a:lnSpc>
-                <a:spcPct val="90000"/>
-              </a:lnSpc>
-              <a:spcBef>
-                <a:spcPts val="1000"/>
-              </a:spcBef>
-              <a:spcAft>
-                <a:spcPts val="0"/>
-              </a:spcAft>
-              <a:buClr>
-                <a:srgbClr val="44546A"/>
-              </a:buClr>
-              <a:buSzPts val="1600"/>
-              <a:buFont typeface="Arial"/>
-              <a:buChar char="•"/>
-            </a:pPr>
-            <a:r>
-              <a:rPr sz="1600" b="0">
-                <a:solidFill>
-                  <a:srgbClr val="44546A"/>
-                </a:solidFill>
-                <a:latin typeface="Arial"/>
-              </a:rPr>
-              <a:t>Push when you have worked through the review checklist</a:t>
-            </a:r>
-          </a:p>
-          <a:p>
-            <a:pPr marL="0" indent="0" algn="l">
-              <a:lnSpc>
-                <a:spcPct val="90000"/>
-              </a:lnSpc>
-              <a:spcBef>
-                <a:spcPts val="1000"/>
-              </a:spcBef>
-              <a:spcAft>
-                <a:spcPts val="0"/>
-              </a:spcAft>
-              <a:buNone/>
-            </a:pPr>
-            <a:r>
-              <a:rPr sz="1600" b="0">
-                <a:solidFill>
-                  <a:srgbClr val="44546A"/>
-                </a:solidFill>
-                <a:latin typeface="Arial"/>
-              </a:rPr>
-              <a:t/>
-            </a:r>
-          </a:p>
-          <a:p>
-            <a:pPr marL="0" indent="0" algn="l">
-              <a:lnSpc>
-                <a:spcPct val="90000"/>
-              </a:lnSpc>
-              <a:spcBef>
-                <a:spcPts val="1000"/>
-              </a:spcBef>
-              <a:spcAft>
-                <a:spcPts val="0"/>
-              </a:spcAft>
-              <a:buNone/>
-            </a:pPr>
-            <a:r>
-              <a:rPr sz="1800" b="1">
-                <a:solidFill>
-                  <a:srgbClr val="002060"/>
-                </a:solidFill>
-                <a:latin typeface="Arial"/>
-              </a:rPr>
-              <a:t>Your folder now contains</a:t>
-            </a:r>
-          </a:p>
-          <a:p>
-            <a:pPr marL="342900" indent="-342900" algn="l">
-              <a:lnSpc>
-                <a:spcPct val="90000"/>
-              </a:lnSpc>
-              <a:spcBef>
-                <a:spcPts val="1000"/>
-              </a:spcBef>
-              <a:spcAft>
-                <a:spcPts val="0"/>
-              </a:spcAft>
-              <a:buClr>
-                <a:srgbClr val="44546A"/>
-              </a:buClr>
-              <a:buSzPts val="1600"/>
-              <a:buFont typeface="Arial"/>
-              <a:buChar char="•"/>
-            </a:pPr>
-            <a:r>
-              <a:rPr sz="1600" b="0">
-                <a:solidFill>
-                  <a:srgbClr val="44546A"/>
-                </a:solidFill>
-                <a:latin typeface="Arial"/>
-              </a:rPr>
-              <a:t>dna-analysis with your code, a short README and a note of the Copilot prompts you used</a:t>
+              <a:buNone/>
+            </a:pPr>
+            <a:r>
+              <a:rPr sz="1800" b="0">
+                <a:solidFill>
+                  <a:srgbClr val="01B0FF"/>
+                </a:solidFill>
+                <a:latin typeface="Arial"/>
+              </a:rPr>
+              <a:t>Session 9 | 25 minutes</a:t>
             </a:r>
           </a:p>
         </p:txBody>
@@ -28217,17 +27979,14 @@
           <a:bodyPr/>
           <a:lstStyle/>
           <a:p>
-            <a:pPr marL="0" indent="0" algn="l">
-              <a:buNone/>
-            </a:pPr>
-            <a:r>
-              <a:rPr sz="3600" b="1">
-                <a:solidFill>
-                  <a:srgbClr val="FFFFFF"/>
-                </a:solidFill>
-                <a:latin typeface="Arial"/>
-              </a:rPr>
-              <a:t>Group Exercises and Consolidation</a:t>
+            <a:r>
+              <a:rPr sz="2800" b="1">
+                <a:solidFill>
+                  <a:srgbClr val="002060"/>
+                </a:solidFill>
+                <a:latin typeface="Arial"/>
+              </a:rPr>
+              <a:t>What We've Covered Today</a:t>
             </a:r>
           </a:p>
         </p:txBody>
@@ -28248,16 +28007,211 @@
           <a:lstStyle/>
           <a:p>
             <a:pPr marL="0" indent="0" algn="l">
-              <a:buNone/>
-            </a:pPr>
-            <a:r>
-              <a:rPr sz="1800" b="0">
-                <a:solidFill>
-                  <a:srgbClr val="01B0FF"/>
-                </a:solidFill>
-                <a:latin typeface="Arial"/>
-              </a:rPr>
-              <a:t>Session 9 | 25 minutes</a:t>
+              <a:lnSpc>
+                <a:spcPct val="90000"/>
+              </a:lnSpc>
+              <a:spcBef>
+                <a:spcPts val="0"/>
+              </a:spcBef>
+              <a:spcAft>
+                <a:spcPts val="0"/>
+              </a:spcAft>
+              <a:buNone/>
+            </a:pPr>
+            <a:r>
+              <a:rPr sz="1800" b="1">
+                <a:solidFill>
+                  <a:srgbClr val="002060"/>
+                </a:solidFill>
+                <a:latin typeface="Arial"/>
+              </a:rPr>
+              <a:t>Foundations</a:t>
+            </a:r>
+          </a:p>
+          <a:p>
+            <a:pPr marL="342900" indent="-342900" algn="l">
+              <a:lnSpc>
+                <a:spcPct val="90000"/>
+              </a:lnSpc>
+              <a:spcBef>
+                <a:spcPts val="1000"/>
+              </a:spcBef>
+              <a:spcAft>
+                <a:spcPts val="0"/>
+              </a:spcAft>
+              <a:buClr>
+                <a:srgbClr val="44546A"/>
+              </a:buClr>
+              <a:buSzPts val="1600"/>
+              <a:buFont typeface="Arial"/>
+              <a:buChar char="•"/>
+            </a:pPr>
+            <a:r>
+              <a:rPr sz="1600" b="0">
+                <a:solidFill>
+                  <a:srgbClr val="44546A"/>
+                </a:solidFill>
+                <a:latin typeface="Arial"/>
+              </a:rPr>
+              <a:t>Why GitHub, and how GIT works</a:t>
+            </a:r>
+          </a:p>
+          <a:p>
+            <a:pPr marL="342900" indent="-342900" algn="l">
+              <a:lnSpc>
+                <a:spcPct val="90000"/>
+              </a:lnSpc>
+              <a:spcBef>
+                <a:spcPts val="1000"/>
+              </a:spcBef>
+              <a:spcAft>
+                <a:spcPts val="0"/>
+              </a:spcAft>
+              <a:buClr>
+                <a:srgbClr val="44546A"/>
+              </a:buClr>
+              <a:buSzPts val="1600"/>
+              <a:buFont typeface="Arial"/>
+              <a:buChar char="•"/>
+            </a:pPr>
+            <a:r>
+              <a:rPr sz="1600" b="0">
+                <a:solidFill>
+                  <a:srgbClr val="44546A"/>
+                </a:solidFill>
+                <a:latin typeface="Arial"/>
+              </a:rPr>
+              <a:t>Branching, pull requests and conflict resolution</a:t>
+            </a:r>
+          </a:p>
+          <a:p>
+            <a:pPr marL="342900" indent="-342900" algn="l">
+              <a:lnSpc>
+                <a:spcPct val="90000"/>
+              </a:lnSpc>
+              <a:spcBef>
+                <a:spcPts val="1000"/>
+              </a:spcBef>
+              <a:spcAft>
+                <a:spcPts val="0"/>
+              </a:spcAft>
+              <a:buClr>
+                <a:srgbClr val="44546A"/>
+              </a:buClr>
+              <a:buSzPts val="1600"/>
+              <a:buFont typeface="Arial"/>
+              <a:buChar char="•"/>
+            </a:pPr>
+            <a:r>
+              <a:rPr sz="1600" b="0">
+                <a:solidFill>
+                  <a:srgbClr val="44546A"/>
+                </a:solidFill>
+                <a:latin typeface="Arial"/>
+              </a:rPr>
+              <a:t>The web interface, GitHub Desktop and VS Code</a:t>
+            </a:r>
+          </a:p>
+          <a:p>
+            <a:pPr marL="0" indent="0" algn="l">
+              <a:lnSpc>
+                <a:spcPct val="90000"/>
+              </a:lnSpc>
+              <a:spcBef>
+                <a:spcPts val="1000"/>
+              </a:spcBef>
+              <a:spcAft>
+                <a:spcPts val="0"/>
+              </a:spcAft>
+              <a:buNone/>
+            </a:pPr>
+            <a:r>
+              <a:rPr sz="1600" b="0">
+                <a:solidFill>
+                  <a:srgbClr val="44546A"/>
+                </a:solidFill>
+                <a:latin typeface="Arial"/>
+              </a:rPr>
+              <a:t/>
+            </a:r>
+          </a:p>
+          <a:p>
+            <a:pPr marL="0" indent="0" algn="l">
+              <a:lnSpc>
+                <a:spcPct val="90000"/>
+              </a:lnSpc>
+              <a:spcBef>
+                <a:spcPts val="1000"/>
+              </a:spcBef>
+              <a:spcAft>
+                <a:spcPts val="0"/>
+              </a:spcAft>
+              <a:buNone/>
+            </a:pPr>
+            <a:r>
+              <a:rPr sz="1800" b="1">
+                <a:solidFill>
+                  <a:srgbClr val="002060"/>
+                </a:solidFill>
+                <a:latin typeface="Arial"/>
+              </a:rPr>
+              <a:t>Collaboration and tools</a:t>
+            </a:r>
+          </a:p>
+          <a:p>
+            <a:pPr marL="342900" indent="-342900" algn="l">
+              <a:lnSpc>
+                <a:spcPct val="90000"/>
+              </a:lnSpc>
+              <a:spcBef>
+                <a:spcPts val="1000"/>
+              </a:spcBef>
+              <a:spcAft>
+                <a:spcPts val="0"/>
+              </a:spcAft>
+              <a:buClr>
+                <a:srgbClr val="44546A"/>
+              </a:buClr>
+              <a:buSzPts val="1600"/>
+              <a:buFont typeface="Arial"/>
+              <a:buChar char="•"/>
+            </a:pPr>
+            <a:r>
+              <a:rPr sz="1600" b="0">
+                <a:solidFill>
+                  <a:srgbClr val="44546A"/>
+                </a:solidFill>
+                <a:latin typeface="Arial"/>
+              </a:rPr>
+              <a:t>Issues, Projects and Actions</a:t>
+            </a:r>
+          </a:p>
+          <a:p>
+            <a:pPr marL="342900" indent="-342900" algn="l">
+              <a:lnSpc>
+                <a:spcPct val="90000"/>
+              </a:lnSpc>
+              <a:spcBef>
+                <a:spcPts val="1000"/>
+              </a:spcBef>
+              <a:spcAft>
+                <a:spcPts val="0"/>
+              </a:spcAft>
+              <a:buClr>
+                <a:srgbClr val="44546A"/>
+              </a:buClr>
+              <a:buSzPts val="1600"/>
+              <a:buFont typeface="Arial"/>
+              <a:buChar char="•"/>
+            </a:pPr>
+            <a:r>
+              <a:rPr sz="1600" b="0">
+                <a:solidFill>
+                  <a:srgbClr val="44546A"/>
+                </a:solidFill>
+                <a:latin typeface="Arial"/>
+              </a:rPr>
+              <a:t>Codespaces and Copilot</a:t>
             </a:r>
           </a:p>
         </p:txBody>
@@ -28302,7 +28256,7 @@
                 </a:solidFill>
                 <a:latin typeface="Arial"/>
               </a:rPr>
-              <a:t>What We've Covered Today</a:t>
+              <a:t>Group Exercise: Issue to Merge</a:t>
             </a:r>
           </a:p>
         </p:txBody>
@@ -28341,91 +28295,147 @@
                 </a:solidFill>
                 <a:latin typeface="Arial"/>
               </a:rPr>
-              <a:t>Foundations</a:t>
-            </a:r>
-          </a:p>
-          <a:p>
-            <a:pPr marL="342900" indent="-342900" algn="l">
-              <a:lnSpc>
-                <a:spcPct val="90000"/>
-              </a:lnSpc>
-              <a:spcBef>
-                <a:spcPts val="1000"/>
-              </a:spcBef>
-              <a:spcAft>
-                <a:spcPts val="0"/>
-              </a:spcAft>
-              <a:buClr>
-                <a:srgbClr val="44546A"/>
-              </a:buClr>
-              <a:buSzPts val="1600"/>
-              <a:buFont typeface="Arial"/>
-              <a:buChar char="•"/>
-            </a:pPr>
-            <a:r>
-              <a:rPr sz="1600" b="0">
-                <a:solidFill>
-                  <a:srgbClr val="44546A"/>
-                </a:solidFill>
-                <a:latin typeface="Arial"/>
-              </a:rPr>
-              <a:t>Why GitHub, and how GIT works</a:t>
-            </a:r>
-          </a:p>
-          <a:p>
-            <a:pPr marL="342900" indent="-342900" algn="l">
-              <a:lnSpc>
-                <a:spcPct val="90000"/>
-              </a:lnSpc>
-              <a:spcBef>
-                <a:spcPts val="1000"/>
-              </a:spcBef>
-              <a:spcAft>
-                <a:spcPts val="0"/>
-              </a:spcAft>
-              <a:buClr>
-                <a:srgbClr val="44546A"/>
-              </a:buClr>
-              <a:buSzPts val="1600"/>
-              <a:buFont typeface="Arial"/>
-              <a:buChar char="•"/>
-            </a:pPr>
-            <a:r>
-              <a:rPr sz="1600" b="0">
-                <a:solidFill>
-                  <a:srgbClr val="44546A"/>
-                </a:solidFill>
-                <a:latin typeface="Arial"/>
-              </a:rPr>
-              <a:t>Branching, pull requests and conflict resolution</a:t>
-            </a:r>
-          </a:p>
-          <a:p>
-            <a:pPr marL="342900" indent="-342900" algn="l">
-              <a:lnSpc>
-                <a:spcPct val="90000"/>
-              </a:lnSpc>
-              <a:spcBef>
-                <a:spcPts val="1000"/>
-              </a:spcBef>
-              <a:spcAft>
-                <a:spcPts val="0"/>
-              </a:spcAft>
-              <a:buClr>
-                <a:srgbClr val="44546A"/>
-              </a:buClr>
-              <a:buSzPts val="1600"/>
-              <a:buFont typeface="Arial"/>
-              <a:buChar char="•"/>
-            </a:pPr>
-            <a:r>
-              <a:rPr sz="1600" b="0">
-                <a:solidFill>
-                  <a:srgbClr val="44546A"/>
-                </a:solidFill>
-                <a:latin typeface="Arial"/>
-              </a:rPr>
-              <a:t>The web interface, GitHub Desktop and VS Code</a:t>
+              <a:t>In groups of three or four</a:t>
+            </a:r>
+          </a:p>
+          <a:p>
+            <a:pPr marL="342900" indent="-342900" algn="l">
+              <a:lnSpc>
+                <a:spcPct val="90000"/>
+              </a:lnSpc>
+              <a:spcBef>
+                <a:spcPts val="1000"/>
+              </a:spcBef>
+              <a:spcAft>
+                <a:spcPts val="0"/>
+              </a:spcAft>
+              <a:buClr>
+                <a:srgbClr val="44546A"/>
+              </a:buClr>
+              <a:buSzPts val="1600"/>
+              <a:buFont typeface="Arial"/>
+              <a:buChar char="•"/>
+            </a:pPr>
+            <a:r>
+              <a:rPr sz="1600" b="0">
+                <a:solidFill>
+                  <a:srgbClr val="44546A"/>
+                </a:solidFill>
+                <a:latin typeface="Arial"/>
+              </a:rPr>
+              <a:t>Choose ONE small scenario — a README checklist, a typo fix or a SQL snippet in the docs</a:t>
+            </a:r>
+          </a:p>
+          <a:p>
+            <a:pPr marL="342900" indent="-342900" algn="l">
+              <a:lnSpc>
+                <a:spcPct val="90000"/>
+              </a:lnSpc>
+              <a:spcBef>
+                <a:spcPts val="1000"/>
+              </a:spcBef>
+              <a:spcAft>
+                <a:spcPts val="0"/>
+              </a:spcAft>
+              <a:buClr>
+                <a:srgbClr val="44546A"/>
+              </a:buClr>
+              <a:buSzPts val="1600"/>
+              <a:buFont typeface="Arial"/>
+              <a:buChar char="•"/>
+            </a:pPr>
+            <a:r>
+              <a:rPr sz="1600" b="0">
+                <a:solidFill>
+                  <a:srgbClr val="44546A"/>
+                </a:solidFill>
+                <a:latin typeface="Arial"/>
+              </a:rPr>
+              <a:t>Create an issue using the template</a:t>
+            </a:r>
+          </a:p>
+          <a:p>
+            <a:pPr marL="342900" indent="-342900" algn="l">
+              <a:lnSpc>
+                <a:spcPct val="90000"/>
+              </a:lnSpc>
+              <a:spcBef>
+                <a:spcPts val="1000"/>
+              </a:spcBef>
+              <a:spcAft>
+                <a:spcPts val="0"/>
+              </a:spcAft>
+              <a:buClr>
+                <a:srgbClr val="44546A"/>
+              </a:buClr>
+              <a:buSzPts val="1600"/>
+              <a:buFont typeface="Arial"/>
+              <a:buChar char="•"/>
+            </a:pPr>
+            <a:r>
+              <a:rPr sz="1600" b="0">
+                <a:solidFill>
+                  <a:srgbClr val="44546A"/>
+                </a:solidFill>
+                <a:latin typeface="Arial"/>
+              </a:rPr>
+              <a:t>Create a feature branch and make a small change that references the issue</a:t>
+            </a:r>
+          </a:p>
+          <a:p>
+            <a:pPr marL="342900" indent="-342900" algn="l">
+              <a:lnSpc>
+                <a:spcPct val="90000"/>
+              </a:lnSpc>
+              <a:spcBef>
+                <a:spcPts val="1000"/>
+              </a:spcBef>
+              <a:spcAft>
+                <a:spcPts val="0"/>
+              </a:spcAft>
+              <a:buClr>
+                <a:srgbClr val="44546A"/>
+              </a:buClr>
+              <a:buSzPts val="1600"/>
+              <a:buFont typeface="Arial"/>
+              <a:buChar char="•"/>
+            </a:pPr>
+            <a:r>
+              <a:rPr sz="1600" b="0">
+                <a:solidFill>
+                  <a:srgbClr val="44546A"/>
+                </a:solidFill>
+                <a:latin typeface="Arial"/>
+              </a:rPr>
+              <a:t>Open a pull request — a teammate reviews with one comment and approves</a:t>
+            </a:r>
+          </a:p>
+          <a:p>
+            <a:pPr marL="342900" indent="-342900" algn="l">
+              <a:lnSpc>
+                <a:spcPct val="90000"/>
+              </a:lnSpc>
+              <a:spcBef>
+                <a:spcPts val="1000"/>
+              </a:spcBef>
+              <a:spcAft>
+                <a:spcPts val="0"/>
+              </a:spcAft>
+              <a:buClr>
+                <a:srgbClr val="44546A"/>
+              </a:buClr>
+              <a:buSzPts val="1600"/>
+              <a:buFont typeface="Arial"/>
+              <a:buChar char="•"/>
+            </a:pPr>
+            <a:r>
+              <a:rPr sz="1600" b="0">
+                <a:solidFill>
+                  <a:srgbClr val="44546A"/>
+                </a:solidFill>
+                <a:latin typeface="Arial"/>
+              </a:rPr>
+              <a:t>Merge and check the issue closes</a:t>
             </a:r>
           </a:p>
           <a:p>
@@ -28465,69 +28475,13 @@
               <a:buNone/>
             </a:pPr>
             <a:r>
-              <a:rPr sz="1800" b="1">
-                <a:solidFill>
-                  <a:srgbClr val="002060"/>
-                </a:solidFill>
-                <a:latin typeface="Arial"/>
-              </a:rPr>
-              <a:t>Collaboration and tools</a:t>
-            </a:r>
-          </a:p>
-          <a:p>
-            <a:pPr marL="342900" indent="-342900" algn="l">
-              <a:lnSpc>
-                <a:spcPct val="90000"/>
-              </a:lnSpc>
-              <a:spcBef>
-                <a:spcPts val="1000"/>
-              </a:spcBef>
-              <a:spcAft>
-                <a:spcPts val="0"/>
-              </a:spcAft>
-              <a:buClr>
-                <a:srgbClr val="44546A"/>
-              </a:buClr>
-              <a:buSzPts val="1600"/>
-              <a:buFont typeface="Arial"/>
-              <a:buChar char="•"/>
-            </a:pPr>
-            <a:r>
-              <a:rPr sz="1600" b="0">
-                <a:solidFill>
-                  <a:srgbClr val="44546A"/>
-                </a:solidFill>
-                <a:latin typeface="Arial"/>
-              </a:rPr>
-              <a:t>Issues, Projects and Actions</a:t>
-            </a:r>
-          </a:p>
-          <a:p>
-            <a:pPr marL="342900" indent="-342900" algn="l">
-              <a:lnSpc>
-                <a:spcPct val="90000"/>
-              </a:lnSpc>
-              <a:spcBef>
-                <a:spcPts val="1000"/>
-              </a:spcBef>
-              <a:spcAft>
-                <a:spcPts val="0"/>
-              </a:spcAft>
-              <a:buClr>
-                <a:srgbClr val="44546A"/>
-              </a:buClr>
-              <a:buSzPts val="1600"/>
-              <a:buFont typeface="Arial"/>
-              <a:buChar char="•"/>
-            </a:pPr>
-            <a:r>
-              <a:rPr sz="1600" b="0">
-                <a:solidFill>
-                  <a:srgbClr val="44546A"/>
-                </a:solidFill>
-                <a:latin typeface="Arial"/>
-              </a:rPr>
-              <a:t>Codespaces and Copilot</a:t>
+              <a:rPr sz="1400" b="0">
+                <a:solidFill>
+                  <a:srgbClr val="44546A"/>
+                </a:solidFill>
+                <a:latin typeface="Arial"/>
+              </a:rPr>
+              <a:t>Use the provided training repository. No new repositories are needed.</a:t>
             </a:r>
           </a:p>
         </p:txBody>
@@ -28572,7 +28526,7 @@
                 </a:solidFill>
                 <a:latin typeface="Arial"/>
               </a:rPr>
-              <a:t>Group Exercise: Issue to Merge</a:t>
+              <a:t>Share Back</a:t>
             </a:r>
           </a:p>
         </p:txBody>
@@ -28611,193 +28565,119 @@
                 </a:solidFill>
                 <a:latin typeface="Arial"/>
               </a:rPr>
-              <a:t>In groups of three or four</a:t>
-            </a:r>
-          </a:p>
-          <a:p>
-            <a:pPr marL="342900" indent="-342900" algn="l">
-              <a:lnSpc>
-                <a:spcPct val="90000"/>
-              </a:lnSpc>
-              <a:spcBef>
-                <a:spcPts val="1000"/>
-              </a:spcBef>
-              <a:spcAft>
-                <a:spcPts val="0"/>
-              </a:spcAft>
-              <a:buClr>
-                <a:srgbClr val="44546A"/>
-              </a:buClr>
-              <a:buSzPts val="1600"/>
-              <a:buFont typeface="Arial"/>
-              <a:buChar char="•"/>
-            </a:pPr>
-            <a:r>
-              <a:rPr sz="1600" b="0">
-                <a:solidFill>
-                  <a:srgbClr val="44546A"/>
-                </a:solidFill>
-                <a:latin typeface="Arial"/>
-              </a:rPr>
-              <a:t>Choose ONE small scenario — a README checklist, a typo fix or a SQL snippet in the docs</a:t>
-            </a:r>
-          </a:p>
-          <a:p>
-            <a:pPr marL="342900" indent="-342900" algn="l">
-              <a:lnSpc>
-                <a:spcPct val="90000"/>
-              </a:lnSpc>
-              <a:spcBef>
-                <a:spcPts val="1000"/>
-              </a:spcBef>
-              <a:spcAft>
-                <a:spcPts val="0"/>
-              </a:spcAft>
-              <a:buClr>
-                <a:srgbClr val="44546A"/>
-              </a:buClr>
-              <a:buSzPts val="1600"/>
-              <a:buFont typeface="Arial"/>
-              <a:buChar char="•"/>
-            </a:pPr>
-            <a:r>
-              <a:rPr sz="1600" b="0">
-                <a:solidFill>
-                  <a:srgbClr val="44546A"/>
-                </a:solidFill>
-                <a:latin typeface="Arial"/>
-              </a:rPr>
-              <a:t>Create an issue using the template</a:t>
-            </a:r>
-          </a:p>
-          <a:p>
-            <a:pPr marL="342900" indent="-342900" algn="l">
-              <a:lnSpc>
-                <a:spcPct val="90000"/>
-              </a:lnSpc>
-              <a:spcBef>
-                <a:spcPts val="1000"/>
-              </a:spcBef>
-              <a:spcAft>
-                <a:spcPts val="0"/>
-              </a:spcAft>
-              <a:buClr>
-                <a:srgbClr val="44546A"/>
-              </a:buClr>
-              <a:buSzPts val="1600"/>
-              <a:buFont typeface="Arial"/>
-              <a:buChar char="•"/>
-            </a:pPr>
-            <a:r>
-              <a:rPr sz="1600" b="0">
-                <a:solidFill>
-                  <a:srgbClr val="44546A"/>
-                </a:solidFill>
-                <a:latin typeface="Arial"/>
-              </a:rPr>
-              <a:t>Create a feature branch and make a small change that references the issue</a:t>
-            </a:r>
-          </a:p>
-          <a:p>
-            <a:pPr marL="342900" indent="-342900" algn="l">
-              <a:lnSpc>
-                <a:spcPct val="90000"/>
-              </a:lnSpc>
-              <a:spcBef>
-                <a:spcPts val="1000"/>
-              </a:spcBef>
-              <a:spcAft>
-                <a:spcPts val="0"/>
-              </a:spcAft>
-              <a:buClr>
-                <a:srgbClr val="44546A"/>
-              </a:buClr>
-              <a:buSzPts val="1600"/>
-              <a:buFont typeface="Arial"/>
-              <a:buChar char="•"/>
-            </a:pPr>
-            <a:r>
-              <a:rPr sz="1600" b="0">
-                <a:solidFill>
-                  <a:srgbClr val="44546A"/>
-                </a:solidFill>
-                <a:latin typeface="Arial"/>
-              </a:rPr>
-              <a:t>Open a pull request — a teammate reviews with one comment and approves</a:t>
-            </a:r>
-          </a:p>
-          <a:p>
-            <a:pPr marL="342900" indent="-342900" algn="l">
-              <a:lnSpc>
-                <a:spcPct val="90000"/>
-              </a:lnSpc>
-              <a:spcBef>
-                <a:spcPts val="1000"/>
-              </a:spcBef>
-              <a:spcAft>
-                <a:spcPts val="0"/>
-              </a:spcAft>
-              <a:buClr>
-                <a:srgbClr val="44546A"/>
-              </a:buClr>
-              <a:buSzPts val="1600"/>
-              <a:buFont typeface="Arial"/>
-              <a:buChar char="•"/>
-            </a:pPr>
-            <a:r>
-              <a:rPr sz="1600" b="0">
-                <a:solidFill>
-                  <a:srgbClr val="44546A"/>
-                </a:solidFill>
-                <a:latin typeface="Arial"/>
-              </a:rPr>
-              <a:t>Merge and check the issue closes</a:t>
-            </a:r>
-          </a:p>
-          <a:p>
-            <a:pPr marL="0" indent="0" algn="l">
-              <a:lnSpc>
-                <a:spcPct val="90000"/>
-              </a:lnSpc>
-              <a:spcBef>
-                <a:spcPts val="1000"/>
-              </a:spcBef>
-              <a:spcAft>
-                <a:spcPts val="0"/>
-              </a:spcAft>
-              <a:buNone/>
-            </a:pPr>
-            <a:r>
-              <a:rPr sz="1600" b="0">
-                <a:solidFill>
-                  <a:srgbClr val="44546A"/>
-                </a:solidFill>
-                <a:latin typeface="Arial"/>
-              </a:rPr>
-              <a:t/>
-            </a:r>
-          </a:p>
-          <a:p>
-            <a:pPr marL="0" indent="0" algn="l">
-              <a:lnSpc>
-                <a:spcPct val="90000"/>
-              </a:lnSpc>
-              <a:spcBef>
-                <a:spcPts val="1000"/>
-              </a:spcBef>
-              <a:spcAft>
-                <a:spcPts val="0"/>
-              </a:spcAft>
-              <a:buNone/>
-            </a:pPr>
-            <a:r>
-              <a:rPr sz="1400" b="0">
-                <a:solidFill>
-                  <a:srgbClr val="44546A"/>
-                </a:solidFill>
-                <a:latin typeface="Arial"/>
-              </a:rPr>
-              <a:t>Use the provided training repository. No new repositories are needed.</a:t>
+              <a:t>Each team tells us</a:t>
+            </a:r>
+          </a:p>
+          <a:p>
+            <a:pPr marL="342900" indent="-342900" algn="l">
+              <a:lnSpc>
+                <a:spcPct val="90000"/>
+              </a:lnSpc>
+              <a:spcBef>
+                <a:spcPts val="1000"/>
+              </a:spcBef>
+              <a:spcAft>
+                <a:spcPts val="0"/>
+              </a:spcAft>
+              <a:buClr>
+                <a:srgbClr val="44546A"/>
+              </a:buClr>
+              <a:buSzPts val="1600"/>
+              <a:buFont typeface="Arial"/>
+              <a:buChar char="•"/>
+            </a:pPr>
+            <a:r>
+              <a:rPr sz="1600" b="0">
+                <a:solidFill>
+                  <a:srgbClr val="44546A"/>
+                </a:solidFill>
+                <a:latin typeface="Arial"/>
+              </a:rPr>
+              <a:t>Which scenario you chose</a:t>
+            </a:r>
+          </a:p>
+          <a:p>
+            <a:pPr marL="342900" indent="-342900" algn="l">
+              <a:lnSpc>
+                <a:spcPct val="90000"/>
+              </a:lnSpc>
+              <a:spcBef>
+                <a:spcPts val="1000"/>
+              </a:spcBef>
+              <a:spcAft>
+                <a:spcPts val="0"/>
+              </a:spcAft>
+              <a:buClr>
+                <a:srgbClr val="44546A"/>
+              </a:buClr>
+              <a:buSzPts val="1600"/>
+              <a:buFont typeface="Arial"/>
+              <a:buChar char="•"/>
+            </a:pPr>
+            <a:r>
+              <a:rPr sz="1600" b="0">
+                <a:solidFill>
+                  <a:srgbClr val="44546A"/>
+                </a:solidFill>
+                <a:latin typeface="Arial"/>
+              </a:rPr>
+              <a:t>How long it took from issue to merge</a:t>
+            </a:r>
+          </a:p>
+          <a:p>
+            <a:pPr marL="342900" indent="-342900" algn="l">
+              <a:lnSpc>
+                <a:spcPct val="90000"/>
+              </a:lnSpc>
+              <a:spcBef>
+                <a:spcPts val="1000"/>
+              </a:spcBef>
+              <a:spcAft>
+                <a:spcPts val="0"/>
+              </a:spcAft>
+              <a:buClr>
+                <a:srgbClr val="44546A"/>
+              </a:buClr>
+              <a:buSzPts val="1600"/>
+              <a:buFont typeface="Arial"/>
+              <a:buChar char="•"/>
+            </a:pPr>
+            <a:r>
+              <a:rPr sz="1600" b="0">
+                <a:solidFill>
+                  <a:srgbClr val="44546A"/>
+                </a:solidFill>
+                <a:latin typeface="Arial"/>
+              </a:rPr>
+              <a:t>One friction point</a:t>
+            </a:r>
+          </a:p>
+          <a:p>
+            <a:pPr marL="342900" indent="-342900" algn="l">
+              <a:lnSpc>
+                <a:spcPct val="90000"/>
+              </a:lnSpc>
+              <a:spcBef>
+                <a:spcPts val="1000"/>
+              </a:spcBef>
+              <a:spcAft>
+                <a:spcPts val="0"/>
+              </a:spcAft>
+              <a:buClr>
+                <a:srgbClr val="44546A"/>
+              </a:buClr>
+              <a:buSzPts val="1600"/>
+              <a:buFont typeface="Arial"/>
+              <a:buChar char="•"/>
+            </a:pPr>
+            <a:r>
+              <a:rPr sz="1600" b="0">
+                <a:solidFill>
+                  <a:srgbClr val="44546A"/>
+                </a:solidFill>
+                <a:latin typeface="Arial"/>
+              </a:rPr>
+              <a:t>One suggested improvement</a:t>
             </a:r>
           </a:p>
         </p:txBody>
@@ -28842,7 +28722,7 @@
                 </a:solidFill>
                 <a:latin typeface="Arial"/>
               </a:rPr>
-              <a:t>Share Back</a:t>
+              <a:t>Next Steps</a:t>
             </a:r>
           </a:p>
         </p:txBody>
@@ -28881,119 +28761,193 @@
                 </a:solidFill>
                 <a:latin typeface="Arial"/>
               </a:rPr>
-              <a:t>Each team tells us</a:t>
-            </a:r>
-          </a:p>
-          <a:p>
-            <a:pPr marL="342900" indent="-342900" algn="l">
-              <a:lnSpc>
-                <a:spcPct val="90000"/>
-              </a:lnSpc>
-              <a:spcBef>
-                <a:spcPts val="1000"/>
-              </a:spcBef>
-              <a:spcAft>
-                <a:spcPts val="0"/>
-              </a:spcAft>
-              <a:buClr>
-                <a:srgbClr val="44546A"/>
-              </a:buClr>
-              <a:buSzPts val="1600"/>
-              <a:buFont typeface="Arial"/>
-              <a:buChar char="•"/>
-            </a:pPr>
-            <a:r>
-              <a:rPr sz="1600" b="0">
-                <a:solidFill>
-                  <a:srgbClr val="44546A"/>
-                </a:solidFill>
-                <a:latin typeface="Arial"/>
-              </a:rPr>
-              <a:t>Which scenario you chose</a:t>
-            </a:r>
-          </a:p>
-          <a:p>
-            <a:pPr marL="342900" indent="-342900" algn="l">
-              <a:lnSpc>
-                <a:spcPct val="90000"/>
-              </a:lnSpc>
-              <a:spcBef>
-                <a:spcPts val="1000"/>
-              </a:spcBef>
-              <a:spcAft>
-                <a:spcPts val="0"/>
-              </a:spcAft>
-              <a:buClr>
-                <a:srgbClr val="44546A"/>
-              </a:buClr>
-              <a:buSzPts val="1600"/>
-              <a:buFont typeface="Arial"/>
-              <a:buChar char="•"/>
-            </a:pPr>
-            <a:r>
-              <a:rPr sz="1600" b="0">
-                <a:solidFill>
-                  <a:srgbClr val="44546A"/>
-                </a:solidFill>
-                <a:latin typeface="Arial"/>
-              </a:rPr>
-              <a:t>How long it took from issue to merge</a:t>
-            </a:r>
-          </a:p>
-          <a:p>
-            <a:pPr marL="342900" indent="-342900" algn="l">
-              <a:lnSpc>
-                <a:spcPct val="90000"/>
-              </a:lnSpc>
-              <a:spcBef>
-                <a:spcPts val="1000"/>
-              </a:spcBef>
-              <a:spcAft>
-                <a:spcPts val="0"/>
-              </a:spcAft>
-              <a:buClr>
-                <a:srgbClr val="44546A"/>
-              </a:buClr>
-              <a:buSzPts val="1600"/>
-              <a:buFont typeface="Arial"/>
-              <a:buChar char="•"/>
-            </a:pPr>
-            <a:r>
-              <a:rPr sz="1600" b="0">
-                <a:solidFill>
-                  <a:srgbClr val="44546A"/>
-                </a:solidFill>
-                <a:latin typeface="Arial"/>
-              </a:rPr>
-              <a:t>One friction point</a:t>
-            </a:r>
-          </a:p>
-          <a:p>
-            <a:pPr marL="342900" indent="-342900" algn="l">
-              <a:lnSpc>
-                <a:spcPct val="90000"/>
-              </a:lnSpc>
-              <a:spcBef>
-                <a:spcPts val="1000"/>
-              </a:spcBef>
-              <a:spcAft>
-                <a:spcPts val="0"/>
-              </a:spcAft>
-              <a:buClr>
-                <a:srgbClr val="44546A"/>
-              </a:buClr>
-              <a:buSzPts val="1600"/>
-              <a:buFont typeface="Arial"/>
-              <a:buChar char="•"/>
-            </a:pPr>
-            <a:r>
-              <a:rPr sz="1600" b="0">
-                <a:solidFill>
-                  <a:srgbClr val="44546A"/>
-                </a:solidFill>
-                <a:latin typeface="Arial"/>
-              </a:rPr>
-              <a:t>One suggested improvement</a:t>
+              <a:t>In the next week</a:t>
+            </a:r>
+          </a:p>
+          <a:p>
+            <a:pPr marL="342900" indent="-342900" algn="l">
+              <a:lnSpc>
+                <a:spcPct val="90000"/>
+              </a:lnSpc>
+              <a:spcBef>
+                <a:spcPts val="1000"/>
+              </a:spcBef>
+              <a:spcAft>
+                <a:spcPts val="0"/>
+              </a:spcAft>
+              <a:buClr>
+                <a:srgbClr val="44546A"/>
+              </a:buClr>
+              <a:buSzPts val="1600"/>
+              <a:buFont typeface="Arial"/>
+              <a:buChar char="•"/>
+            </a:pPr>
+            <a:r>
+              <a:rPr sz="1600" b="0">
+                <a:solidFill>
+                  <a:srgbClr val="44546A"/>
+                </a:solidFill>
+                <a:latin typeface="Arial"/>
+              </a:rPr>
+              <a:t>Make sure your GitHub account and organisation access are set up</a:t>
+            </a:r>
+          </a:p>
+          <a:p>
+            <a:pPr marL="342900" indent="-342900" algn="l">
+              <a:lnSpc>
+                <a:spcPct val="90000"/>
+              </a:lnSpc>
+              <a:spcBef>
+                <a:spcPts val="1000"/>
+              </a:spcBef>
+              <a:spcAft>
+                <a:spcPts val="0"/>
+              </a:spcAft>
+              <a:buClr>
+                <a:srgbClr val="44546A"/>
+              </a:buClr>
+              <a:buSzPts val="1600"/>
+              <a:buFont typeface="Arial"/>
+              <a:buChar char="•"/>
+            </a:pPr>
+            <a:r>
+              <a:rPr sz="1600" b="0">
+                <a:solidFill>
+                  <a:srgbClr val="44546A"/>
+                </a:solidFill>
+                <a:latin typeface="Arial"/>
+              </a:rPr>
+              <a:t>Explore repositories relevant to your work</a:t>
+            </a:r>
+          </a:p>
+          <a:p>
+            <a:pPr marL="0" indent="0" algn="l">
+              <a:lnSpc>
+                <a:spcPct val="90000"/>
+              </a:lnSpc>
+              <a:spcBef>
+                <a:spcPts val="1000"/>
+              </a:spcBef>
+              <a:spcAft>
+                <a:spcPts val="0"/>
+              </a:spcAft>
+              <a:buNone/>
+            </a:pPr>
+            <a:r>
+              <a:rPr sz="1600" b="0">
+                <a:solidFill>
+                  <a:srgbClr val="44546A"/>
+                </a:solidFill>
+                <a:latin typeface="Arial"/>
+              </a:rPr>
+              <a:t/>
+            </a:r>
+          </a:p>
+          <a:p>
+            <a:pPr marL="0" indent="0" algn="l">
+              <a:lnSpc>
+                <a:spcPct val="90000"/>
+              </a:lnSpc>
+              <a:spcBef>
+                <a:spcPts val="1000"/>
+              </a:spcBef>
+              <a:spcAft>
+                <a:spcPts val="0"/>
+              </a:spcAft>
+              <a:buNone/>
+            </a:pPr>
+            <a:r>
+              <a:rPr sz="1800" b="1">
+                <a:solidFill>
+                  <a:srgbClr val="002060"/>
+                </a:solidFill>
+                <a:latin typeface="Arial"/>
+              </a:rPr>
+              <a:t>In the next month</a:t>
+            </a:r>
+          </a:p>
+          <a:p>
+            <a:pPr marL="342900" indent="-342900" algn="l">
+              <a:lnSpc>
+                <a:spcPct val="90000"/>
+              </a:lnSpc>
+              <a:spcBef>
+                <a:spcPts val="1000"/>
+              </a:spcBef>
+              <a:spcAft>
+                <a:spcPts val="0"/>
+              </a:spcAft>
+              <a:buClr>
+                <a:srgbClr val="44546A"/>
+              </a:buClr>
+              <a:buSzPts val="1600"/>
+              <a:buFont typeface="Arial"/>
+              <a:buChar char="•"/>
+            </a:pPr>
+            <a:r>
+              <a:rPr sz="1600" b="0">
+                <a:solidFill>
+                  <a:srgbClr val="44546A"/>
+                </a:solidFill>
+                <a:latin typeface="Arial"/>
+              </a:rPr>
+              <a:t>Practise the basic workflow regularly</a:t>
+            </a:r>
+          </a:p>
+          <a:p>
+            <a:pPr marL="342900" indent="-342900" algn="l">
+              <a:lnSpc>
+                <a:spcPct val="90000"/>
+              </a:lnSpc>
+              <a:spcBef>
+                <a:spcPts val="1000"/>
+              </a:spcBef>
+              <a:spcAft>
+                <a:spcPts val="0"/>
+              </a:spcAft>
+              <a:buClr>
+                <a:srgbClr val="44546A"/>
+              </a:buClr>
+              <a:buSzPts val="1600"/>
+              <a:buFont typeface="Arial"/>
+              <a:buChar char="•"/>
+            </a:pPr>
+            <a:r>
+              <a:rPr sz="1600" b="0">
+                <a:solidFill>
+                  <a:srgbClr val="44546A"/>
+                </a:solidFill>
+                <a:latin typeface="Arial"/>
+              </a:rPr>
+              <a:t>Use GitHub for at least one real work project</a:t>
+            </a:r>
+          </a:p>
+          <a:p>
+            <a:pPr marL="342900" indent="-342900" algn="l">
+              <a:lnSpc>
+                <a:spcPct val="90000"/>
+              </a:lnSpc>
+              <a:spcBef>
+                <a:spcPts val="1000"/>
+              </a:spcBef>
+              <a:spcAft>
+                <a:spcPts val="0"/>
+              </a:spcAft>
+              <a:buClr>
+                <a:srgbClr val="44546A"/>
+              </a:buClr>
+              <a:buSzPts val="1600"/>
+              <a:buFont typeface="Arial"/>
+              <a:buChar char="•"/>
+            </a:pPr>
+            <a:r>
+              <a:rPr sz="1600" b="0">
+                <a:solidFill>
+                  <a:srgbClr val="44546A"/>
+                </a:solidFill>
+                <a:latin typeface="Arial"/>
+              </a:rPr>
+              <a:t>Find a colleague to learn with</a:t>
             </a:r>
           </a:p>
         </p:txBody>
@@ -29038,7 +28992,7 @@
                 </a:solidFill>
                 <a:latin typeface="Arial"/>
               </a:rPr>
-              <a:t>Next Steps</a:t>
+              <a:t>Your Area: Checkpoint 9</a:t>
             </a:r>
           </a:p>
         </p:txBody>
@@ -29077,63 +29031,119 @@
                 </a:solidFill>
                 <a:latin typeface="Arial"/>
               </a:rPr>
-              <a:t>In the next week</a:t>
-            </a:r>
-          </a:p>
-          <a:p>
-            <a:pPr marL="342900" indent="-342900" algn="l">
-              <a:lnSpc>
-                <a:spcPct val="90000"/>
-              </a:lnSpc>
-              <a:spcBef>
-                <a:spcPts val="1000"/>
-              </a:spcBef>
-              <a:spcAft>
-                <a:spcPts val="0"/>
-              </a:spcAft>
-              <a:buClr>
-                <a:srgbClr val="44546A"/>
-              </a:buClr>
-              <a:buSzPts val="1600"/>
-              <a:buFont typeface="Arial"/>
-              <a:buChar char="•"/>
-            </a:pPr>
-            <a:r>
-              <a:rPr sz="1600" b="0">
-                <a:solidFill>
-                  <a:srgbClr val="44546A"/>
-                </a:solidFill>
-                <a:latin typeface="Arial"/>
-              </a:rPr>
-              <a:t>Make sure your GitHub account and organisation access are set up</a:t>
-            </a:r>
-          </a:p>
-          <a:p>
-            <a:pPr marL="342900" indent="-342900" algn="l">
-              <a:lnSpc>
-                <a:spcPct val="90000"/>
-              </a:lnSpc>
-              <a:spcBef>
-                <a:spcPts val="1000"/>
-              </a:spcBef>
-              <a:spcAft>
-                <a:spcPts val="0"/>
-              </a:spcAft>
-              <a:buClr>
-                <a:srgbClr val="44546A"/>
-              </a:buClr>
-              <a:buSzPts val="1600"/>
-              <a:buFont typeface="Arial"/>
-              <a:buChar char="•"/>
-            </a:pPr>
-            <a:r>
-              <a:rPr sz="1600" b="0">
-                <a:solidFill>
-                  <a:srgbClr val="44546A"/>
-                </a:solidFill>
-                <a:latin typeface="Arial"/>
-              </a:rPr>
-              <a:t>Explore repositories relevant to your work</a:t>
+              <a:t>Merge your area (15 minutes)</a:t>
+            </a:r>
+          </a:p>
+          <a:p>
+            <a:pPr marL="342900" indent="-342900" algn="l">
+              <a:lnSpc>
+                <a:spcPct val="90000"/>
+              </a:lnSpc>
+              <a:spcBef>
+                <a:spcPts val="1000"/>
+              </a:spcBef>
+              <a:spcAft>
+                <a:spcPts val="0"/>
+              </a:spcAft>
+              <a:buClr>
+                <a:srgbClr val="44546A"/>
+              </a:buClr>
+              <a:buSzPts val="1600"/>
+              <a:buFont typeface="Arial"/>
+              <a:buChar char="•"/>
+            </a:pPr>
+            <a:r>
+              <a:rPr sz="1600" b="0">
+                <a:solidFill>
+                  <a:srgbClr val="44546A"/>
+                </a:solidFill>
+                <a:latin typeface="Arial"/>
+              </a:rPr>
+              <a:t>Update your pull request description with a summary of what your area contains</a:t>
+            </a:r>
+          </a:p>
+          <a:p>
+            <a:pPr marL="342900" indent="-342900" algn="l">
+              <a:lnSpc>
+                <a:spcPct val="90000"/>
+              </a:lnSpc>
+              <a:spcBef>
+                <a:spcPts val="1000"/>
+              </a:spcBef>
+              <a:spcAft>
+                <a:spcPts val="0"/>
+              </a:spcAft>
+              <a:buClr>
+                <a:srgbClr val="44546A"/>
+              </a:buClr>
+              <a:buSzPts val="1600"/>
+              <a:buFont typeface="Arial"/>
+              <a:buChar char="•"/>
+            </a:pPr>
+            <a:r>
+              <a:rPr sz="1600" b="0">
+                <a:solidFill>
+                  <a:srgbClr val="44546A"/>
+                </a:solidFill>
+                <a:latin typeface="Arial"/>
+              </a:rPr>
+              <a:t>Review a partner's pull request with the checklist and leave one useful comment</a:t>
+            </a:r>
+          </a:p>
+          <a:p>
+            <a:pPr marL="342900" indent="-342900" algn="l">
+              <a:lnSpc>
+                <a:spcPct val="90000"/>
+              </a:lnSpc>
+              <a:spcBef>
+                <a:spcPts val="1000"/>
+              </a:spcBef>
+              <a:spcAft>
+                <a:spcPts val="0"/>
+              </a:spcAft>
+              <a:buClr>
+                <a:srgbClr val="44546A"/>
+              </a:buClr>
+              <a:buSzPts val="1600"/>
+              <a:buFont typeface="Arial"/>
+              <a:buChar char="•"/>
+            </a:pPr>
+            <a:r>
+              <a:rPr sz="1600" b="0">
+                <a:solidFill>
+                  <a:srgbClr val="44546A"/>
+                </a:solidFill>
+                <a:latin typeface="Arial"/>
+              </a:rPr>
+              <a:t>Resolve any conflicts and merge once approved</a:t>
+            </a:r>
+          </a:p>
+          <a:p>
+            <a:pPr marL="342900" indent="-342900" algn="l">
+              <a:lnSpc>
+                <a:spcPct val="90000"/>
+              </a:lnSpc>
+              <a:spcBef>
+                <a:spcPts val="1000"/>
+              </a:spcBef>
+              <a:spcAft>
+                <a:spcPts val="0"/>
+              </a:spcAft>
+              <a:buClr>
+                <a:srgbClr val="44546A"/>
+              </a:buClr>
+              <a:buSzPts val="1600"/>
+              <a:buFont typeface="Arial"/>
+              <a:buChar char="•"/>
+            </a:pPr>
+            <a:r>
+              <a:rPr sz="1600" b="0">
+                <a:solidFill>
+                  <a:srgbClr val="44546A"/>
+                </a:solidFill>
+                <a:latin typeface="Arial"/>
+              </a:rPr>
+              <a:t>Check that your row in the participants README matches what you built</a:t>
             </a:r>
           </a:p>
           <a:p>
@@ -29179,91 +29189,35 @@
                 </a:solidFill>
                 <a:latin typeface="Arial"/>
               </a:rPr>
-              <a:t>In the next month</a:t>
-            </a:r>
-          </a:p>
-          <a:p>
-            <a:pPr marL="342900" indent="-342900" algn="l">
-              <a:lnSpc>
-                <a:spcPct val="90000"/>
-              </a:lnSpc>
-              <a:spcBef>
-                <a:spcPts val="1000"/>
-              </a:spcBef>
-              <a:spcAft>
-                <a:spcPts val="0"/>
-              </a:spcAft>
-              <a:buClr>
-                <a:srgbClr val="44546A"/>
-              </a:buClr>
-              <a:buSzPts val="1600"/>
-              <a:buFont typeface="Arial"/>
-              <a:buChar char="•"/>
-            </a:pPr>
-            <a:r>
-              <a:rPr sz="1600" b="0">
-                <a:solidFill>
-                  <a:srgbClr val="44546A"/>
-                </a:solidFill>
-                <a:latin typeface="Arial"/>
-              </a:rPr>
-              <a:t>Practise the basic workflow regularly</a:t>
-            </a:r>
-          </a:p>
-          <a:p>
-            <a:pPr marL="342900" indent="-342900" algn="l">
-              <a:lnSpc>
-                <a:spcPct val="90000"/>
-              </a:lnSpc>
-              <a:spcBef>
-                <a:spcPts val="1000"/>
-              </a:spcBef>
-              <a:spcAft>
-                <a:spcPts val="0"/>
-              </a:spcAft>
-              <a:buClr>
-                <a:srgbClr val="44546A"/>
-              </a:buClr>
-              <a:buSzPts val="1600"/>
-              <a:buFont typeface="Arial"/>
-              <a:buChar char="•"/>
-            </a:pPr>
-            <a:r>
-              <a:rPr sz="1600" b="0">
-                <a:solidFill>
-                  <a:srgbClr val="44546A"/>
-                </a:solidFill>
-                <a:latin typeface="Arial"/>
-              </a:rPr>
-              <a:t>Use GitHub for at least one real work project</a:t>
-            </a:r>
-          </a:p>
-          <a:p>
-            <a:pPr marL="342900" indent="-342900" algn="l">
-              <a:lnSpc>
-                <a:spcPct val="90000"/>
-              </a:lnSpc>
-              <a:spcBef>
-                <a:spcPts val="1000"/>
-              </a:spcBef>
-              <a:spcAft>
-                <a:spcPts val="0"/>
-              </a:spcAft>
-              <a:buClr>
-                <a:srgbClr val="44546A"/>
-              </a:buClr>
-              <a:buSzPts val="1600"/>
-              <a:buFont typeface="Arial"/>
-              <a:buChar char="•"/>
-            </a:pPr>
-            <a:r>
-              <a:rPr sz="1600" b="0">
-                <a:solidFill>
-                  <a:srgbClr val="44546A"/>
-                </a:solidFill>
-                <a:latin typeface="Arial"/>
-              </a:rPr>
-              <a:t>Find a colleague to learn with</a:t>
+              <a:t>Your folder now contains</a:t>
+            </a:r>
+          </a:p>
+          <a:p>
+            <a:pPr marL="342900" indent="-342900" algn="l">
+              <a:lnSpc>
+                <a:spcPct val="90000"/>
+              </a:lnSpc>
+              <a:spcBef>
+                <a:spcPts val="1000"/>
+              </a:spcBef>
+              <a:spcAft>
+                <a:spcPts val="0"/>
+              </a:spcAft>
+              <a:buClr>
+                <a:srgbClr val="44546A"/>
+              </a:buClr>
+              <a:buSzPts val="1600"/>
+              <a:buFont typeface="Arial"/>
+              <a:buChar char="•"/>
+            </a:pPr>
+            <a:r>
+              <a:rPr sz="1600" b="0">
+                <a:solidFill>
+                  <a:srgbClr val="44546A"/>
+                </a:solidFill>
+                <a:latin typeface="Arial"/>
+              </a:rPr>
+              <a:t>Everything merged into main: a complete record of your day's work</a:t>
             </a:r>
           </a:p>
         </p:txBody>
@@ -29308,7 +29262,7 @@
                 </a:solidFill>
                 <a:latin typeface="Arial"/>
               </a:rPr>
-              <a:t>Your Area: Checkpoint 9</a:t>
+              <a:t>Optional Extension: SQL on the Academy Dataset</a:t>
             </a:r>
           </a:p>
         </p:txBody>
@@ -29347,119 +29301,91 @@
                 </a:solidFill>
                 <a:latin typeface="Arial"/>
               </a:rPr>
-              <a:t>Merge your area (15 minutes)</a:t>
-            </a:r>
-          </a:p>
-          <a:p>
-            <a:pPr marL="342900" indent="-342900" algn="l">
-              <a:lnSpc>
-                <a:spcPct val="90000"/>
-              </a:lnSpc>
-              <a:spcBef>
-                <a:spcPts val="1000"/>
-              </a:spcBef>
-              <a:spcAft>
-                <a:spcPts val="0"/>
-              </a:spcAft>
-              <a:buClr>
-                <a:srgbClr val="44546A"/>
-              </a:buClr>
-              <a:buSzPts val="1600"/>
-              <a:buFont typeface="Arial"/>
-              <a:buChar char="•"/>
-            </a:pPr>
-            <a:r>
-              <a:rPr sz="1600" b="0">
-                <a:solidFill>
-                  <a:srgbClr val="44546A"/>
-                </a:solidFill>
-                <a:latin typeface="Arial"/>
-              </a:rPr>
-              <a:t>Update your pull request description with a summary of what your area contains</a:t>
-            </a:r>
-          </a:p>
-          <a:p>
-            <a:pPr marL="342900" indent="-342900" algn="l">
-              <a:lnSpc>
-                <a:spcPct val="90000"/>
-              </a:lnSpc>
-              <a:spcBef>
-                <a:spcPts val="1000"/>
-              </a:spcBef>
-              <a:spcAft>
-                <a:spcPts val="0"/>
-              </a:spcAft>
-              <a:buClr>
-                <a:srgbClr val="44546A"/>
-              </a:buClr>
-              <a:buSzPts val="1600"/>
-              <a:buFont typeface="Arial"/>
-              <a:buChar char="•"/>
-            </a:pPr>
-            <a:r>
-              <a:rPr sz="1600" b="0">
-                <a:solidFill>
-                  <a:srgbClr val="44546A"/>
-                </a:solidFill>
-                <a:latin typeface="Arial"/>
-              </a:rPr>
-              <a:t>Review a partner's pull request with the checklist and leave one useful comment</a:t>
-            </a:r>
-          </a:p>
-          <a:p>
-            <a:pPr marL="342900" indent="-342900" algn="l">
-              <a:lnSpc>
-                <a:spcPct val="90000"/>
-              </a:lnSpc>
-              <a:spcBef>
-                <a:spcPts val="1000"/>
-              </a:spcBef>
-              <a:spcAft>
-                <a:spcPts val="0"/>
-              </a:spcAft>
-              <a:buClr>
-                <a:srgbClr val="44546A"/>
-              </a:buClr>
-              <a:buSzPts val="1600"/>
-              <a:buFont typeface="Arial"/>
-              <a:buChar char="•"/>
-            </a:pPr>
-            <a:r>
-              <a:rPr sz="1600" b="0">
-                <a:solidFill>
-                  <a:srgbClr val="44546A"/>
-                </a:solidFill>
-                <a:latin typeface="Arial"/>
-              </a:rPr>
-              <a:t>Resolve any conflicts and merge once approved</a:t>
-            </a:r>
-          </a:p>
-          <a:p>
-            <a:pPr marL="342900" indent="-342900" algn="l">
-              <a:lnSpc>
-                <a:spcPct val="90000"/>
-              </a:lnSpc>
-              <a:spcBef>
-                <a:spcPts val="1000"/>
-              </a:spcBef>
-              <a:spcAft>
-                <a:spcPts val="0"/>
-              </a:spcAft>
-              <a:buClr>
-                <a:srgbClr val="44546A"/>
-              </a:buClr>
-              <a:buSzPts val="1600"/>
-              <a:buFont typeface="Arial"/>
-              <a:buChar char="•"/>
-            </a:pPr>
-            <a:r>
-              <a:rPr sz="1600" b="0">
-                <a:solidFill>
-                  <a:srgbClr val="44546A"/>
-                </a:solidFill>
-                <a:latin typeface="Arial"/>
-              </a:rPr>
-              <a:t>Check that your row in the participants README matches what you built</a:t>
+              <a:t>For anyone with time, or after the day</a:t>
+            </a:r>
+          </a:p>
+          <a:p>
+            <a:pPr marL="342900" indent="-342900" algn="l">
+              <a:lnSpc>
+                <a:spcPct val="90000"/>
+              </a:lnSpc>
+              <a:spcBef>
+                <a:spcPts val="1000"/>
+              </a:spcBef>
+              <a:spcAft>
+                <a:spcPts val="0"/>
+              </a:spcAft>
+              <a:buClr>
+                <a:srgbClr val="44546A"/>
+              </a:buClr>
+              <a:buSzPts val="1600"/>
+              <a:buFont typeface="Arial"/>
+              <a:buChar char="•"/>
+            </a:pPr>
+            <a:r>
+              <a:rPr sz="1600" b="0">
+                <a:solidFill>
+                  <a:srgbClr val="44546A"/>
+                </a:solidFill>
+                <a:latin typeface="Arial"/>
+              </a:rPr>
+              <a:t>Needs access to the ndr-hb-abuhb-academy Google Cloud project, which is optional</a:t>
+            </a:r>
+          </a:p>
+          <a:p>
+            <a:pPr marL="342900" indent="-342900" algn="l">
+              <a:lnSpc>
+                <a:spcPct val="90000"/>
+              </a:lnSpc>
+              <a:spcBef>
+                <a:spcPts val="1000"/>
+              </a:spcBef>
+              <a:spcAft>
+                <a:spcPts val="0"/>
+              </a:spcAft>
+              <a:buClr>
+                <a:srgbClr val="44546A"/>
+              </a:buClr>
+              <a:buSzPts val="1600"/>
+              <a:buFont typeface="Arial"/>
+              <a:buChar char="•"/>
+            </a:pPr>
+            <a:r>
+              <a:rPr sz="1600" b="0">
+                <a:solidFill>
+                  <a:srgbClr val="44546A"/>
+                </a:solidFill>
+                <a:latin typeface="Arial"/>
+              </a:rPr>
+              <a:t>Copy the SQL script into your folder as referrals.sql and run it in BigQuery</a:t>
+            </a:r>
+          </a:p>
+          <a:p>
+            <a:pPr marL="342900" indent="-342900" algn="l">
+              <a:lnSpc>
+                <a:spcPct val="90000"/>
+              </a:lnSpc>
+              <a:spcBef>
+                <a:spcPts val="1000"/>
+              </a:spcBef>
+              <a:spcAft>
+                <a:spcPts val="0"/>
+              </a:spcAft>
+              <a:buClr>
+                <a:srgbClr val="44546A"/>
+              </a:buClr>
+              <a:buSzPts val="1600"/>
+              <a:buFont typeface="Arial"/>
+              <a:buChar char="•"/>
+            </a:pPr>
+            <a:r>
+              <a:rPr sz="1600" b="0">
+                <a:solidFill>
+                  <a:srgbClr val="44546A"/>
+                </a:solidFill>
+                <a:latin typeface="Arial"/>
+              </a:rPr>
+              <a:t>Preview with SELECT * and LIMIT, name your columns, then try SELECT DISTINCT</a:t>
             </a:r>
           </a:p>
           <a:p>
@@ -29505,35 +29431,81 @@
                 </a:solidFill>
                 <a:latin typeface="Arial"/>
               </a:rPr>
-              <a:t>Your folder now contains</a:t>
-            </a:r>
-          </a:p>
-          <a:p>
-            <a:pPr marL="342900" indent="-342900" algn="l">
-              <a:lnSpc>
-                <a:spcPct val="90000"/>
-              </a:lnSpc>
-              <a:spcBef>
-                <a:spcPts val="1000"/>
-              </a:spcBef>
-              <a:spcAft>
-                <a:spcPts val="0"/>
-              </a:spcAft>
-              <a:buClr>
-                <a:srgbClr val="44546A"/>
-              </a:buClr>
-              <a:buSzPts val="1600"/>
-              <a:buFont typeface="Arial"/>
-              <a:buChar char="•"/>
-            </a:pPr>
-            <a:r>
-              <a:rPr sz="1600" b="0">
-                <a:solidFill>
-                  <a:srgbClr val="44546A"/>
-                </a:solidFill>
-                <a:latin typeface="Arial"/>
-              </a:rPr>
-              <a:t>Everything merged into main: a complete record of your day's work</a:t>
+              <a:t>Why it belongs in Git</a:t>
+            </a:r>
+          </a:p>
+          <a:p>
+            <a:pPr marL="342900" indent="-342900" algn="l">
+              <a:lnSpc>
+                <a:spcPct val="90000"/>
+              </a:lnSpc>
+              <a:spcBef>
+                <a:spcPts val="1000"/>
+              </a:spcBef>
+              <a:spcAft>
+                <a:spcPts val="0"/>
+              </a:spcAft>
+              <a:buClr>
+                <a:srgbClr val="44546A"/>
+              </a:buClr>
+              <a:buSzPts val="1600"/>
+              <a:buFont typeface="Arial"/>
+              <a:buChar char="•"/>
+            </a:pPr>
+            <a:r>
+              <a:rPr sz="1600" b="0">
+                <a:solidFill>
+                  <a:srgbClr val="44546A"/>
+                </a:solidFill>
+                <a:latin typeface="Arial"/>
+              </a:rPr>
+              <a:t>SQL is code, so changes are tracked, reviewed and reversible</a:t>
+            </a:r>
+          </a:p>
+          <a:p>
+            <a:pPr marL="0" indent="0" algn="l">
+              <a:lnSpc>
+                <a:spcPct val="90000"/>
+              </a:lnSpc>
+              <a:spcBef>
+                <a:spcPts val="1000"/>
+              </a:spcBef>
+              <a:spcAft>
+                <a:spcPts val="0"/>
+              </a:spcAft>
+              <a:buNone/>
+            </a:pPr>
+            <a:r>
+              <a:rPr sz="1600" b="0">
+                <a:solidFill>
+                  <a:srgbClr val="44546A"/>
+                </a:solidFill>
+                <a:latin typeface="Arial"/>
+              </a:rPr>
+              <a:t/>
+            </a:r>
+          </a:p>
+          <a:p>
+            <a:pPr marL="0" indent="0" algn="l">
+              <a:lnSpc>
+                <a:spcPct val="90000"/>
+              </a:lnSpc>
+              <a:spcBef>
+                <a:spcPts val="1000"/>
+              </a:spcBef>
+              <a:spcAft>
+                <a:spcPts val="0"/>
+              </a:spcAft>
+              <a:buNone/>
+            </a:pPr>
+            <a:r>
+              <a:rPr sz="1400" b="0">
+                <a:solidFill>
+                  <a:srgbClr val="44546A"/>
+                </a:solidFill>
+                <a:latin typeface="Arial"/>
+              </a:rPr>
+              <a:t>BigQuery needs backticks round a table name with hyphens. Never commit results or data.</a:t>
             </a:r>
           </a:p>
         </p:txBody>
